--- a/downloads/presentations/IED_Unit0_Lesson_0.1_Course_Launch_Engineering_Mindset.pptx
+++ b/downloads/presentations/IED_Unit0_Lesson_0.1_Course_Launch_Engineering_Mindset.pptx
@@ -4,6 +4,9 @@
   <p:sldMasterIdLst>
     <p:sldMasterId id="2147483648" r:id="rId1"/>
   </p:sldMasterIdLst>
+  <p:notesMasterIdLst>
+    <p:notesMasterId r:id="rId19"/>
+  </p:notesMasterIdLst>
   <p:sldIdLst>
     <p:sldId id="256" r:id="rId2"/>
     <p:sldId id="257" r:id="rId3"/>
@@ -23,9 +26,6 @@
     <p:sldId id="271" r:id="rId17"/>
     <p:sldId id="272" r:id="rId18"/>
   </p:sldIdLst>
-  <p:notesMasterIdLst>
-    <p:notesMasterId r:id="rId19"/>
-  </p:notesMasterIdLst>
   <p:sldSz cx="12192000" cy="6858000"/>
   <p:notesSz cx="6858000" cy="12192000"/>
   <p:defaultTextStyle>
@@ -120,6 +120,11 @@
       </a:defRPr>
     </a:lvl9pPr>
   </p:defaultTextStyle>
+  <p:extLst>
+    <p:ext uri="{EFAFB233-063F-42B5-8137-9DF3F51BA10A}">
+      <p15:sldGuideLst xmlns:p15="http://schemas.microsoft.com/office/powerpoint/2012/main"/>
+    </p:ext>
+  </p:extLst>
 </p:presentation>
 </file>
 
@@ -145,234 +150,10 @@
           <a:chExt cx="0" cy="0"/>
         </a:xfrm>
       </p:grpSpPr>
-      <p:sp>
-        <p:nvSpPr>
-          <p:cNvPr id="2" name="Header Placeholder 1"/>
-          <p:cNvSpPr>
-            <a:spLocks noGrp="1"/>
-          </p:cNvSpPr>
-          <p:nvPr>
-            <p:ph type="hdr" sz="quarter"/>
-          </p:nvPr>
-        </p:nvSpPr>
-        <p:spPr>
-          <a:xfrm>
-            <a:off x="0" y="0"/>
-            <a:ext cx="2971800" cy="458788"/>
-          </a:xfrm>
-          <a:prstGeom prst="rect">
-            <a:avLst/>
-          </a:prstGeom>
-        </p:spPr>
-        <p:txBody>
-          <a:bodyPr vert="horz" lIns="91440" tIns="45720" rIns="91440" bIns="45720" rtlCol="0"/>
-          <a:lstStyle>
-            <a:lvl1pPr algn="l">
-              <a:defRPr sz="1200"/>
-            </a:lvl1pPr>
-          </a:lstStyle>
-          <a:p>
-            <a:endParaRPr lang="en-US"/>
-          </a:p>
-        </p:txBody>
-      </p:sp>
-      <p:sp>
-        <p:nvSpPr>
-          <p:cNvPr id="3" name="Date Placeholder 2"/>
-          <p:cNvSpPr>
-            <a:spLocks noGrp="1"/>
-          </p:cNvSpPr>
-          <p:nvPr>
-            <p:ph type="dt" idx="1"/>
-          </p:nvPr>
-        </p:nvSpPr>
-        <p:spPr>
-          <a:xfrm>
-            <a:off x="3884613" y="0"/>
-            <a:ext cx="2971800" cy="458788"/>
-          </a:xfrm>
-          <a:prstGeom prst="rect">
-            <a:avLst/>
-          </a:prstGeom>
-        </p:spPr>
-        <p:txBody>
-          <a:bodyPr vert="horz" lIns="91440" tIns="45720" rIns="91440" bIns="45720" rtlCol="0"/>
-          <a:lstStyle>
-            <a:lvl1pPr algn="r">
-              <a:defRPr sz="1200"/>
-            </a:lvl1pPr>
-          </a:lstStyle>
-          <a:p>
-            <a:fld id="{5282F153-3F37-0F45-9E97-73ACFA13230C}" type="datetimeFigureOut">
-              <a:rPr lang="en-US"/>
-              <a:t>7/23/19</a:t>
-            </a:fld>
-            <a:endParaRPr lang="en-US"/>
-          </a:p>
-        </p:txBody>
-      </p:sp>
-      <p:sp>
-        <p:nvSpPr>
-          <p:cNvPr id="4" name="Slide Image Placeholder 3"/>
-          <p:cNvSpPr>
-            <a:spLocks noGrp="1" noRot="1" noChangeAspect="1"/>
-          </p:cNvSpPr>
-          <p:nvPr>
-            <p:ph type="sldImg" idx="2"/>
-          </p:nvPr>
-        </p:nvSpPr>
-        <p:spPr>
-          <a:xfrm>
-            <a:off x="685800" y="1143000"/>
-            <a:ext cx="5486400" cy="3086100"/>
-          </a:xfrm>
-          <a:prstGeom prst="rect">
-            <a:avLst/>
-          </a:prstGeom>
-          <a:noFill/>
-          <a:ln w="12700">
-            <a:solidFill>
-              <a:prstClr val="black"/>
-            </a:solidFill>
-          </a:ln>
-        </p:spPr>
-        <p:txBody>
-          <a:bodyPr vert="horz" lIns="91440" tIns="45720" rIns="91440" bIns="45720" rtlCol="0" anchor="ctr"/>
-          <a:lstStyle/>
-          <a:p>
-            <a:endParaRPr lang="en-US"/>
-          </a:p>
-        </p:txBody>
-      </p:sp>
-      <p:sp>
-        <p:nvSpPr>
-          <p:cNvPr id="5" name="Notes Placeholder 4"/>
-          <p:cNvSpPr>
-            <a:spLocks noGrp="1"/>
-          </p:cNvSpPr>
-          <p:nvPr>
-            <p:ph type="body" sz="quarter" idx="3"/>
-          </p:nvPr>
-        </p:nvSpPr>
-        <p:spPr>
-          <a:xfrm>
-            <a:off x="685800" y="4400550"/>
-            <a:ext cx="5486400" cy="3600450"/>
-          </a:xfrm>
-          <a:prstGeom prst="rect">
-            <a:avLst/>
-          </a:prstGeom>
-        </p:spPr>
-        <p:txBody>
-          <a:bodyPr vert="horz" lIns="91440" tIns="45720" rIns="91440" bIns="45720" rtlCol="0"/>
-          <a:lstStyle/>
-          <a:p>
-            <a:pPr lvl="0"/>
-            <a:r>
-              <a:rPr lang="en-US"/>
-              <a:t>Click to edit Master text styles</a:t>
-            </a:r>
-          </a:p>
-          <a:p>
-            <a:pPr lvl="1"/>
-            <a:r>
-              <a:rPr lang="en-US"/>
-              <a:t>Second level</a:t>
-            </a:r>
-          </a:p>
-          <a:p>
-            <a:pPr lvl="2"/>
-            <a:r>
-              <a:rPr lang="en-US"/>
-              <a:t>Third level</a:t>
-            </a:r>
-          </a:p>
-          <a:p>
-            <a:pPr lvl="3"/>
-            <a:r>
-              <a:rPr lang="en-US"/>
-              <a:t>Fourth level</a:t>
-            </a:r>
-          </a:p>
-          <a:p>
-            <a:pPr lvl="4"/>
-            <a:r>
-              <a:rPr lang="en-US"/>
-              <a:t>Fifth level</a:t>
-            </a:r>
-          </a:p>
-        </p:txBody>
-      </p:sp>
-      <p:sp>
-        <p:nvSpPr>
-          <p:cNvPr id="6" name="Footer Placeholder 5"/>
-          <p:cNvSpPr>
-            <a:spLocks noGrp="1"/>
-          </p:cNvSpPr>
-          <p:nvPr>
-            <p:ph type="ftr" sz="quarter" idx="4"/>
-          </p:nvPr>
-        </p:nvSpPr>
-        <p:spPr>
-          <a:xfrm>
-            <a:off x="0" y="8685213"/>
-            <a:ext cx="2971800" cy="458787"/>
-          </a:xfrm>
-          <a:prstGeom prst="rect">
-            <a:avLst/>
-          </a:prstGeom>
-        </p:spPr>
-        <p:txBody>
-          <a:bodyPr vert="horz" lIns="91440" tIns="45720" rIns="91440" bIns="45720" rtlCol="0" anchor="b"/>
-          <a:lstStyle>
-            <a:lvl1pPr algn="l">
-              <a:defRPr sz="1200"/>
-            </a:lvl1pPr>
-          </a:lstStyle>
-          <a:p>
-            <a:endParaRPr lang="en-US"/>
-          </a:p>
-        </p:txBody>
-      </p:sp>
-      <p:sp>
-        <p:nvSpPr>
-          <p:cNvPr id="7" name="Slide Number Placeholder 6"/>
-          <p:cNvSpPr>
-            <a:spLocks noGrp="1"/>
-          </p:cNvSpPr>
-          <p:nvPr>
-            <p:ph type="sldNum" sz="quarter" idx="5"/>
-          </p:nvPr>
-        </p:nvSpPr>
-        <p:spPr>
-          <a:xfrm>
-            <a:off x="3884613" y="8685213"/>
-            <a:ext cx="2971800" cy="458787"/>
-          </a:xfrm>
-          <a:prstGeom prst="rect">
-            <a:avLst/>
-          </a:prstGeom>
-        </p:spPr>
-        <p:txBody>
-          <a:bodyPr vert="horz" lIns="91440" tIns="45720" rIns="91440" bIns="45720" rtlCol="0" anchor="b"/>
-          <a:lstStyle>
-            <a:lvl1pPr algn="r">
-              <a:defRPr sz="1200"/>
-            </a:lvl1pPr>
-          </a:lstStyle>
-          <a:p>
-            <a:fld id="{CE5E9CC1-C706-0F49-92D6-E571CC5EEA8F}" type="slidenum">
-              <a:rPr lang="en-US"/>
-              <a:t>‹#›</a:t>
-            </a:fld>
-            <a:endParaRPr lang="en-US"/>
-          </a:p>
-        </p:txBody>
-      </p:sp>
     </p:spTree>
     <p:extLst>
       <p:ext uri="{BB962C8B-B14F-4D97-AF65-F5344CB8AC3E}">
-        <p14:creationId xmlns:p14="http://schemas.microsoft.com/office/powerpoint/2010/main" val="1024086991"/>
+        <p14:creationId xmlns:p14="http://schemas.microsoft.com/office/powerpoint/2010/main" val="1573197881"/>
       </p:ext>
     </p:extLst>
   </p:cSld>
@@ -516,10 +297,6 @@
           <a:bodyPr/>
           <a:lstStyle/>
           <a:p>
-            <a:r>
-              <a:rPr lang="en-US" dirty="0"/>
-              <a:t/>
-            </a:r>
             <a:endParaRPr lang="en-US" dirty="0"/>
           </a:p>
         </p:txBody>
@@ -604,10 +381,6 @@
           <a:bodyPr/>
           <a:lstStyle/>
           <a:p>
-            <a:r>
-              <a:rPr lang="en-US" dirty="0"/>
-              <a:t/>
-            </a:r>
             <a:endParaRPr lang="en-US" dirty="0"/>
           </a:p>
         </p:txBody>
@@ -692,10 +465,6 @@
           <a:bodyPr/>
           <a:lstStyle/>
           <a:p>
-            <a:r>
-              <a:rPr lang="en-US" dirty="0"/>
-              <a:t/>
-            </a:r>
             <a:endParaRPr lang="en-US" dirty="0"/>
           </a:p>
         </p:txBody>
@@ -780,10 +549,6 @@
           <a:bodyPr/>
           <a:lstStyle/>
           <a:p>
-            <a:r>
-              <a:rPr lang="en-US" dirty="0"/>
-              <a:t/>
-            </a:r>
             <a:endParaRPr lang="en-US" dirty="0"/>
           </a:p>
         </p:txBody>
@@ -868,10 +633,6 @@
           <a:bodyPr/>
           <a:lstStyle/>
           <a:p>
-            <a:r>
-              <a:rPr lang="en-US" dirty="0"/>
-              <a:t/>
-            </a:r>
             <a:endParaRPr lang="en-US" dirty="0"/>
           </a:p>
         </p:txBody>
@@ -956,10 +717,6 @@
           <a:bodyPr/>
           <a:lstStyle/>
           <a:p>
-            <a:r>
-              <a:rPr lang="en-US" dirty="0"/>
-              <a:t/>
-            </a:r>
             <a:endParaRPr lang="en-US" dirty="0"/>
           </a:p>
         </p:txBody>
@@ -1044,10 +801,6 @@
           <a:bodyPr/>
           <a:lstStyle/>
           <a:p>
-            <a:r>
-              <a:rPr lang="en-US" dirty="0"/>
-              <a:t/>
-            </a:r>
             <a:endParaRPr lang="en-US" dirty="0"/>
           </a:p>
         </p:txBody>
@@ -1132,10 +885,6 @@
           <a:bodyPr/>
           <a:lstStyle/>
           <a:p>
-            <a:r>
-              <a:rPr lang="en-US" dirty="0"/>
-              <a:t/>
-            </a:r>
             <a:endParaRPr lang="en-US" dirty="0"/>
           </a:p>
         </p:txBody>
@@ -1220,10 +969,6 @@
           <a:bodyPr/>
           <a:lstStyle/>
           <a:p>
-            <a:r>
-              <a:rPr lang="en-US" dirty="0"/>
-              <a:t/>
-            </a:r>
             <a:endParaRPr lang="en-US" dirty="0"/>
           </a:p>
         </p:txBody>
@@ -1308,10 +1053,6 @@
           <a:bodyPr/>
           <a:lstStyle/>
           <a:p>
-            <a:r>
-              <a:rPr lang="en-US" dirty="0"/>
-              <a:t/>
-            </a:r>
             <a:endParaRPr lang="en-US" dirty="0"/>
           </a:p>
         </p:txBody>
@@ -1396,10 +1137,6 @@
           <a:bodyPr/>
           <a:lstStyle/>
           <a:p>
-            <a:r>
-              <a:rPr lang="en-US" dirty="0"/>
-              <a:t/>
-            </a:r>
             <a:endParaRPr lang="en-US" dirty="0"/>
           </a:p>
         </p:txBody>
@@ -1484,10 +1221,6 @@
           <a:bodyPr/>
           <a:lstStyle/>
           <a:p>
-            <a:r>
-              <a:rPr lang="en-US" dirty="0"/>
-              <a:t/>
-            </a:r>
             <a:endParaRPr lang="en-US" dirty="0"/>
           </a:p>
         </p:txBody>
@@ -1572,10 +1305,6 @@
           <a:bodyPr/>
           <a:lstStyle/>
           <a:p>
-            <a:r>
-              <a:rPr lang="en-US" dirty="0"/>
-              <a:t/>
-            </a:r>
             <a:endParaRPr lang="en-US" dirty="0"/>
           </a:p>
         </p:txBody>
@@ -1660,10 +1389,6 @@
           <a:bodyPr/>
           <a:lstStyle/>
           <a:p>
-            <a:r>
-              <a:rPr lang="en-US" dirty="0"/>
-              <a:t/>
-            </a:r>
             <a:endParaRPr lang="en-US" dirty="0"/>
           </a:p>
         </p:txBody>
@@ -1748,10 +1473,6 @@
           <a:bodyPr/>
           <a:lstStyle/>
           <a:p>
-            <a:r>
-              <a:rPr lang="en-US" dirty="0"/>
-              <a:t/>
-            </a:r>
             <a:endParaRPr lang="en-US" dirty="0"/>
           </a:p>
         </p:txBody>
@@ -1836,10 +1557,6 @@
           <a:bodyPr/>
           <a:lstStyle/>
           <a:p>
-            <a:r>
-              <a:rPr lang="en-US" dirty="0"/>
-              <a:t/>
-            </a:r>
             <a:endParaRPr lang="en-US" dirty="0"/>
           </a:p>
         </p:txBody>
@@ -1924,10 +1641,6 @@
           <a:bodyPr/>
           <a:lstStyle/>
           <a:p>
-            <a:r>
-              <a:rPr lang="en-US" dirty="0"/>
-              <a:t/>
-            </a:r>
             <a:endParaRPr lang="en-US" dirty="0"/>
           </a:p>
         </p:txBody>
@@ -2001,6 +1714,11 @@
 <file path=ppt/slideMasters/slideMaster1.xml><?xml version="1.0" encoding="utf-8"?>
 <p:sldMaster xmlns:a="http://schemas.openxmlformats.org/drawingml/2006/main" xmlns:r="http://schemas.openxmlformats.org/officeDocument/2006/relationships" xmlns:p="http://schemas.openxmlformats.org/presentationml/2006/main">
   <p:cSld>
+    <p:bg>
+      <p:bgRef idx="1001">
+        <a:schemeClr val="bg1"/>
+      </p:bgRef>
+    </p:bg>
     <p:spTree>
       <p:nvGrpSpPr>
         <p:cNvPr id="1" name=""/>
@@ -2283,6 +2001,7 @@
         <a:solidFill>
           <a:srgbClr val="081B33"/>
         </a:solidFill>
+        <a:effectLst/>
       </p:bgPr>
     </p:bg>
     <p:spTree>
@@ -2328,14 +2047,14 @@
       </p:sp>
       <p:pic>
         <p:nvPicPr>
-          <p:cNvPr id="3" name="Image 0" descr="/mnt/data/lockwoodstem-logo-white.png">    </p:cNvPr>
+          <p:cNvPr id="3" name="Image 0" descr="/mnt/data/lockwoodstem-logo-white.png"/>
           <p:cNvPicPr>
             <a:picLocks noChangeAspect="1"/>
           </p:cNvPicPr>
           <p:nvPr/>
         </p:nvPicPr>
         <p:blipFill>
-          <a:blip r:embed="rId1"/>
+          <a:blip r:embed="rId3"/>
           <a:stretch>
             <a:fillRect/>
           </a:stretch>
@@ -2402,7 +2121,7 @@
           <a:bodyPr wrap="square" lIns="0" tIns="0" rIns="0" bIns="0" rtlCol="0" anchor="ctr"/>
           <a:lstStyle/>
           <a:p>
-            <a:pPr algn="ctr" indent="0" marL="0">
+            <a:pPr marL="0" indent="0" algn="ctr">
               <a:buNone/>
             </a:pPr>
             <a:r>
@@ -2443,7 +2162,7 @@
           </a:bodyPr>
           <a:lstStyle/>
           <a:p>
-            <a:pPr indent="0" marL="0">
+            <a:pPr marL="0" indent="0">
               <a:buNone/>
             </a:pPr>
             <a:r>
@@ -2460,7 +2179,7 @@
             <a:endParaRPr lang="en-US" sz="3600" dirty="0"/>
           </a:p>
           <a:p>
-            <a:pPr indent="0" marL="0">
+            <a:pPr marL="0" indent="0">
               <a:buNone/>
             </a:pPr>
             <a:r>
@@ -2528,7 +2247,7 @@
           <a:bodyPr wrap="square" lIns="0" tIns="0" rIns="0" bIns="0" rtlCol="0" anchor="ctr"/>
           <a:lstStyle/>
           <a:p>
-            <a:pPr indent="0" marL="0">
+            <a:pPr marL="0" indent="0">
               <a:buNone/>
             </a:pPr>
             <a:r>
@@ -2569,7 +2288,7 @@
           </a:bodyPr>
           <a:lstStyle/>
           <a:p>
-            <a:pPr indent="0" marL="0">
+            <a:pPr marL="0" indent="0">
               <a:buNone/>
             </a:pPr>
             <a:r>
@@ -2635,7 +2354,7 @@
           <a:bodyPr wrap="square" lIns="0" tIns="0" rIns="0" bIns="0" rtlCol="0" anchor="ctr"/>
           <a:lstStyle/>
           <a:p>
-            <a:pPr indent="0" marL="0">
+            <a:pPr marL="0" indent="0">
               <a:buNone/>
             </a:pPr>
             <a:r>
@@ -2671,7 +2390,7 @@
           <a:bodyPr wrap="square" lIns="0" tIns="0" rIns="0" bIns="0" rtlCol="0" anchor="ctr"/>
           <a:lstStyle/>
           <a:p>
-            <a:pPr algn="r" indent="0" marL="0">
+            <a:pPr marL="0" indent="0" algn="r">
               <a:buNone/>
             </a:pPr>
             <a:r>
@@ -2734,7 +2453,7 @@
           <a:bodyPr wrap="square" lIns="0" tIns="0" rIns="0" bIns="0" rtlCol="0" anchor="ctr"/>
           <a:lstStyle/>
           <a:p>
-            <a:pPr indent="0" marL="0">
+            <a:pPr marL="0" indent="0">
               <a:buNone/>
             </a:pPr>
             <a:r>
@@ -2770,7 +2489,7 @@
           <a:bodyPr wrap="square" lIns="0" tIns="0" rIns="0" bIns="0" rtlCol="0" anchor="ctr"/>
           <a:lstStyle/>
           <a:p>
-            <a:pPr algn="r" indent="0" marL="0">
+            <a:pPr marL="0" indent="0" algn="r">
               <a:buNone/>
             </a:pPr>
             <a:r>
@@ -2833,7 +2552,7 @@
           <a:bodyPr wrap="square" lIns="0" tIns="0" rIns="0" bIns="0" rtlCol="0" anchor="ctr"/>
           <a:lstStyle/>
           <a:p>
-            <a:pPr indent="0" marL="0">
+            <a:pPr marL="0" indent="0">
               <a:buNone/>
             </a:pPr>
             <a:r>
@@ -2869,7 +2588,7 @@
           <a:bodyPr wrap="square" lIns="0" tIns="0" rIns="0" bIns="0" rtlCol="0" anchor="ctr"/>
           <a:lstStyle/>
           <a:p>
-            <a:pPr algn="r" indent="0" marL="0">
+            <a:pPr marL="0" indent="0" algn="r">
               <a:buNone/>
             </a:pPr>
             <a:r>
@@ -2905,7 +2624,7 @@
           <a:bodyPr wrap="square" lIns="0" tIns="0" rIns="0" bIns="0" rtlCol="0" anchor="ctr"/>
           <a:lstStyle/>
           <a:p>
-            <a:pPr indent="0" marL="0">
+            <a:pPr marL="0" indent="0">
               <a:buNone/>
             </a:pPr>
             <a:r>
@@ -2939,6 +2658,7 @@
         <a:solidFill>
           <a:srgbClr val="081B33"/>
         </a:solidFill>
+        <a:effectLst/>
       </p:bgPr>
     </p:bg>
     <p:spTree>
@@ -3003,7 +2723,7 @@
           <a:bodyPr wrap="square" lIns="0" tIns="0" rIns="0" bIns="0" rtlCol="0" anchor="ctr"/>
           <a:lstStyle/>
           <a:p>
-            <a:pPr indent="0" marL="0">
+            <a:pPr marL="0" indent="0">
               <a:buNone/>
             </a:pPr>
             <a:r>
@@ -3042,7 +2762,7 @@
           <a:bodyPr wrap="square" lIns="0" tIns="0" rIns="0" bIns="0" rtlCol="0" anchor="ctr"/>
           <a:lstStyle/>
           <a:p>
-            <a:pPr indent="0" marL="0">
+            <a:pPr marL="0" indent="0">
               <a:buNone/>
             </a:pPr>
             <a:r>
@@ -3081,7 +2801,7 @@
           <a:bodyPr wrap="square" lIns="0" tIns="0" rIns="0" bIns="0" rtlCol="0" anchor="ctr"/>
           <a:lstStyle/>
           <a:p>
-            <a:pPr indent="0" marL="0">
+            <a:pPr marL="0" indent="0">
               <a:buNone/>
             </a:pPr>
             <a:r>
@@ -3101,14 +2821,14 @@
       </p:sp>
       <p:pic>
         <p:nvPicPr>
-          <p:cNvPr id="6" name="Image 0" descr="/mnt/data/lockwoodstem-logo-white.png">    </p:cNvPr>
+          <p:cNvPr id="6" name="Image 0" descr="/mnt/data/lockwoodstem-logo-white.png"/>
           <p:cNvPicPr>
             <a:picLocks noChangeAspect="1"/>
           </p:cNvPicPr>
           <p:nvPr/>
         </p:nvPicPr>
         <p:blipFill>
-          <a:blip r:embed="rId1"/>
+          <a:blip r:embed="rId3"/>
           <a:stretch>
             <a:fillRect/>
           </a:stretch>
@@ -3173,7 +2893,7 @@
           <a:bodyPr wrap="square" lIns="0" tIns="0" rIns="0" bIns="0" rtlCol="0" anchor="ctr"/>
           <a:lstStyle/>
           <a:p>
-            <a:pPr algn="ctr" indent="0" marL="0">
+            <a:pPr marL="0" indent="0" algn="ctr">
               <a:buNone/>
             </a:pPr>
             <a:r>
@@ -3211,7 +2931,7 @@
           </a:bodyPr>
           <a:lstStyle/>
           <a:p>
-            <a:pPr algn="ctr" indent="0" marL="0">
+            <a:pPr marL="0" indent="0" algn="ctr">
               <a:buNone/>
             </a:pPr>
             <a:r>
@@ -3303,7 +3023,7 @@
           <a:bodyPr wrap="square" lIns="0" tIns="0" rIns="0" bIns="0" rtlCol="0" anchor="ctr"/>
           <a:lstStyle/>
           <a:p>
-            <a:pPr algn="ctr" indent="0" marL="0">
+            <a:pPr marL="0" indent="0" algn="ctr">
               <a:buNone/>
             </a:pPr>
             <a:r>
@@ -3341,7 +3061,7 @@
           </a:bodyPr>
           <a:lstStyle/>
           <a:p>
-            <a:pPr algn="ctr" indent="0" marL="0">
+            <a:pPr marL="0" indent="0" algn="ctr">
               <a:buNone/>
             </a:pPr>
             <a:r>
@@ -3433,7 +3153,7 @@
           <a:bodyPr wrap="square" lIns="0" tIns="0" rIns="0" bIns="0" rtlCol="0" anchor="ctr"/>
           <a:lstStyle/>
           <a:p>
-            <a:pPr algn="ctr" indent="0" marL="0">
+            <a:pPr marL="0" indent="0" algn="ctr">
               <a:buNone/>
             </a:pPr>
             <a:r>
@@ -3471,7 +3191,7 @@
           </a:bodyPr>
           <a:lstStyle/>
           <a:p>
-            <a:pPr algn="ctr" indent="0" marL="0">
+            <a:pPr marL="0" indent="0" algn="ctr">
               <a:buNone/>
             </a:pPr>
             <a:r>
@@ -3507,7 +3227,7 @@
           <a:bodyPr wrap="square" lIns="0" tIns="0" rIns="0" bIns="0" rtlCol="0" anchor="ctr"/>
           <a:lstStyle/>
           <a:p>
-            <a:pPr indent="0" marL="0">
+            <a:pPr marL="0" indent="0">
               <a:buNone/>
             </a:pPr>
             <a:r>
@@ -3572,7 +3292,7 @@
           <a:bodyPr wrap="square" lIns="0" tIns="0" rIns="0" bIns="0" rtlCol="0" anchor="ctr"/>
           <a:lstStyle/>
           <a:p>
-            <a:pPr algn="ctr" indent="0" marL="0">
+            <a:pPr marL="0" indent="0" algn="ctr">
               <a:buNone/>
             </a:pPr>
             <a:r>
@@ -3637,7 +3357,7 @@
           <a:bodyPr wrap="square" lIns="0" tIns="0" rIns="0" bIns="0" rtlCol="0" anchor="ctr"/>
           <a:lstStyle/>
           <a:p>
-            <a:pPr algn="ctr" indent="0" marL="0">
+            <a:pPr marL="0" indent="0" algn="ctr">
               <a:buNone/>
             </a:pPr>
             <a:r>
@@ -3702,7 +3422,7 @@
           <a:bodyPr wrap="square" lIns="0" tIns="0" rIns="0" bIns="0" rtlCol="0" anchor="ctr"/>
           <a:lstStyle/>
           <a:p>
-            <a:pPr algn="ctr" indent="0" marL="0">
+            <a:pPr marL="0" indent="0" algn="ctr">
               <a:buNone/>
             </a:pPr>
             <a:r>
@@ -3767,7 +3487,7 @@
           <a:bodyPr wrap="square" lIns="0" tIns="0" rIns="0" bIns="0" rtlCol="0" anchor="ctr"/>
           <a:lstStyle/>
           <a:p>
-            <a:pPr algn="ctr" indent="0" marL="0">
+            <a:pPr marL="0" indent="0" algn="ctr">
               <a:buNone/>
             </a:pPr>
             <a:r>
@@ -3832,7 +3552,7 @@
           <a:bodyPr wrap="square" lIns="0" tIns="0" rIns="0" bIns="0" rtlCol="0" anchor="ctr"/>
           <a:lstStyle/>
           <a:p>
-            <a:pPr algn="ctr" indent="0" marL="0">
+            <a:pPr marL="0" indent="0" algn="ctr">
               <a:buNone/>
             </a:pPr>
             <a:r>
@@ -3897,7 +3617,7 @@
           <a:bodyPr wrap="square" lIns="0" tIns="0" rIns="0" bIns="0" rtlCol="0" anchor="ctr"/>
           <a:lstStyle/>
           <a:p>
-            <a:pPr algn="ctr" indent="0" marL="0">
+            <a:pPr marL="0" indent="0" algn="ctr">
               <a:buNone/>
             </a:pPr>
             <a:r>
@@ -3958,7 +3678,7 @@
           <a:bodyPr wrap="square" lIns="0" tIns="0" rIns="0" bIns="0" rtlCol="0" anchor="ctr"/>
           <a:lstStyle/>
           <a:p>
-            <a:pPr indent="0" marL="0">
+            <a:pPr marL="0" indent="0">
               <a:buNone/>
             </a:pPr>
             <a:r>
@@ -3997,7 +3717,7 @@
           <a:bodyPr wrap="square" lIns="0" tIns="0" rIns="0" bIns="0" rtlCol="0" anchor="ctr"/>
           <a:lstStyle/>
           <a:p>
-            <a:pPr algn="r" indent="0" marL="0">
+            <a:pPr marL="0" indent="0" algn="r">
               <a:buNone/>
             </a:pPr>
             <a:r>
@@ -4031,6 +3751,7 @@
         <a:solidFill>
           <a:srgbClr val="081B33"/>
         </a:solidFill>
+        <a:effectLst/>
       </p:bgPr>
     </p:bg>
     <p:spTree>
@@ -4095,7 +3816,7 @@
           <a:bodyPr wrap="square" lIns="0" tIns="0" rIns="0" bIns="0" rtlCol="0" anchor="ctr"/>
           <a:lstStyle/>
           <a:p>
-            <a:pPr indent="0" marL="0">
+            <a:pPr marL="0" indent="0">
               <a:buNone/>
             </a:pPr>
             <a:r>
@@ -4134,7 +3855,7 @@
           <a:bodyPr wrap="square" lIns="0" tIns="0" rIns="0" bIns="0" rtlCol="0" anchor="ctr"/>
           <a:lstStyle/>
           <a:p>
-            <a:pPr indent="0" marL="0">
+            <a:pPr marL="0" indent="0">
               <a:buNone/>
             </a:pPr>
             <a:r>
@@ -4173,7 +3894,7 @@
           <a:bodyPr wrap="square" lIns="0" tIns="0" rIns="0" bIns="0" rtlCol="0" anchor="ctr"/>
           <a:lstStyle/>
           <a:p>
-            <a:pPr indent="0" marL="0">
+            <a:pPr marL="0" indent="0">
               <a:buNone/>
             </a:pPr>
             <a:r>
@@ -4193,14 +3914,14 @@
       </p:sp>
       <p:pic>
         <p:nvPicPr>
-          <p:cNvPr id="6" name="Image 0" descr="/mnt/data/lockwoodstem-logo-white.png">    </p:cNvPr>
+          <p:cNvPr id="6" name="Image 0" descr="/mnt/data/lockwoodstem-logo-white.png"/>
           <p:cNvPicPr>
             <a:picLocks noChangeAspect="1"/>
           </p:cNvPicPr>
           <p:nvPr/>
         </p:nvPicPr>
         <p:blipFill>
-          <a:blip r:embed="rId1"/>
+          <a:blip r:embed="rId3"/>
           <a:stretch>
             <a:fillRect/>
           </a:stretch>
@@ -4265,7 +3986,7 @@
           <a:bodyPr wrap="square" lIns="0" tIns="0" rIns="0" bIns="0" rtlCol="0" anchor="ctr"/>
           <a:lstStyle/>
           <a:p>
-            <a:pPr indent="0" marL="0">
+            <a:pPr marL="0" indent="0">
               <a:buNone/>
             </a:pPr>
             <a:r>
@@ -4303,7 +4024,7 @@
           </a:bodyPr>
           <a:lstStyle/>
           <a:p>
-            <a:pPr indent="0" marL="0">
+            <a:pPr marL="0" indent="0">
               <a:buNone/>
             </a:pPr>
             <a:r>
@@ -4339,7 +4060,7 @@
           <a:bodyPr wrap="square" lIns="0" tIns="0" rIns="0" bIns="0" rtlCol="0" anchor="ctr"/>
           <a:lstStyle/>
           <a:p>
-            <a:pPr indent="0" marL="0">
+            <a:pPr marL="0" indent="0">
               <a:buNone/>
             </a:pPr>
             <a:r>
@@ -4404,7 +4125,7 @@
           <a:bodyPr wrap="square" lIns="0" tIns="0" rIns="0" bIns="0" rtlCol="0" anchor="ctr"/>
           <a:lstStyle/>
           <a:p>
-            <a:pPr indent="0" marL="0">
+            <a:pPr marL="0" indent="0">
               <a:buNone/>
             </a:pPr>
             <a:r>
@@ -4442,7 +4163,7 @@
           </a:bodyPr>
           <a:lstStyle/>
           <a:p>
-            <a:pPr indent="0" marL="0">
+            <a:pPr marL="0" indent="0">
               <a:buNone/>
             </a:pPr>
             <a:r>
@@ -4507,7 +4228,7 @@
           <a:bodyPr wrap="square" lIns="0" tIns="0" rIns="0" bIns="0" rtlCol="0" anchor="ctr"/>
           <a:lstStyle/>
           <a:p>
-            <a:pPr indent="0" marL="0">
+            <a:pPr marL="0" indent="0">
               <a:buNone/>
             </a:pPr>
             <a:r>
@@ -4545,7 +4266,7 @@
           </a:bodyPr>
           <a:lstStyle/>
           <a:p>
-            <a:pPr indent="0" marL="0">
+            <a:pPr marL="0" indent="0">
               <a:buNone/>
             </a:pPr>
             <a:r>
@@ -4610,7 +4331,7 @@
           <a:bodyPr wrap="square" lIns="0" tIns="0" rIns="0" bIns="0" rtlCol="0" anchor="ctr"/>
           <a:lstStyle/>
           <a:p>
-            <a:pPr indent="0" marL="0">
+            <a:pPr marL="0" indent="0">
               <a:buNone/>
             </a:pPr>
             <a:r>
@@ -4648,7 +4369,7 @@
           </a:bodyPr>
           <a:lstStyle/>
           <a:p>
-            <a:pPr indent="0" marL="0">
+            <a:pPr marL="0" indent="0">
               <a:buNone/>
             </a:pPr>
             <a:r>
@@ -4713,7 +4434,7 @@
           <a:bodyPr wrap="square" lIns="0" tIns="0" rIns="0" bIns="0" rtlCol="0" anchor="ctr"/>
           <a:lstStyle/>
           <a:p>
-            <a:pPr indent="0" marL="0">
+            <a:pPr marL="0" indent="0">
               <a:buNone/>
             </a:pPr>
             <a:r>
@@ -4751,7 +4472,7 @@
           </a:bodyPr>
           <a:lstStyle/>
           <a:p>
-            <a:pPr indent="0" marL="0">
+            <a:pPr marL="0" indent="0">
               <a:buNone/>
             </a:pPr>
             <a:r>
@@ -4816,7 +4537,7 @@
           <a:bodyPr wrap="square" lIns="0" tIns="0" rIns="0" bIns="0" rtlCol="0" anchor="ctr"/>
           <a:lstStyle/>
           <a:p>
-            <a:pPr indent="0" marL="0">
+            <a:pPr marL="0" indent="0">
               <a:buNone/>
             </a:pPr>
             <a:r>
@@ -4854,7 +4575,7 @@
           </a:bodyPr>
           <a:lstStyle/>
           <a:p>
-            <a:pPr indent="0" marL="0">
+            <a:pPr marL="0" indent="0">
               <a:buNone/>
             </a:pPr>
             <a:r>
@@ -4921,7 +4642,7 @@
           </a:bodyPr>
           <a:lstStyle/>
           <a:p>
-            <a:pPr algn="ctr" indent="0" marL="0">
+            <a:pPr marL="0" indent="0" algn="ctr">
               <a:buNone/>
             </a:pPr>
             <a:r>
@@ -4982,7 +4703,7 @@
           <a:bodyPr wrap="square" lIns="0" tIns="0" rIns="0" bIns="0" rtlCol="0" anchor="ctr"/>
           <a:lstStyle/>
           <a:p>
-            <a:pPr indent="0" marL="0">
+            <a:pPr marL="0" indent="0">
               <a:buNone/>
             </a:pPr>
             <a:r>
@@ -5021,7 +4742,7 @@
           <a:bodyPr wrap="square" lIns="0" tIns="0" rIns="0" bIns="0" rtlCol="0" anchor="ctr"/>
           <a:lstStyle/>
           <a:p>
-            <a:pPr algn="r" indent="0" marL="0">
+            <a:pPr marL="0" indent="0" algn="r">
               <a:buNone/>
             </a:pPr>
             <a:r>
@@ -5055,6 +4776,7 @@
         <a:solidFill>
           <a:srgbClr val="081B33"/>
         </a:solidFill>
+        <a:effectLst/>
       </p:bgPr>
     </p:bg>
     <p:spTree>
@@ -5119,7 +4841,7 @@
           <a:bodyPr wrap="square" lIns="0" tIns="0" rIns="0" bIns="0" rtlCol="0" anchor="ctr"/>
           <a:lstStyle/>
           <a:p>
-            <a:pPr indent="0" marL="0">
+            <a:pPr marL="0" indent="0">
               <a:buNone/>
             </a:pPr>
             <a:r>
@@ -5158,7 +4880,7 @@
           <a:bodyPr wrap="square" lIns="0" tIns="0" rIns="0" bIns="0" rtlCol="0" anchor="ctr"/>
           <a:lstStyle/>
           <a:p>
-            <a:pPr indent="0" marL="0">
+            <a:pPr marL="0" indent="0">
               <a:buNone/>
             </a:pPr>
             <a:r>
@@ -5197,7 +4919,7 @@
           <a:bodyPr wrap="square" lIns="0" tIns="0" rIns="0" bIns="0" rtlCol="0" anchor="ctr"/>
           <a:lstStyle/>
           <a:p>
-            <a:pPr indent="0" marL="0">
+            <a:pPr marL="0" indent="0">
               <a:buNone/>
             </a:pPr>
             <a:r>
@@ -5217,14 +4939,14 @@
       </p:sp>
       <p:pic>
         <p:nvPicPr>
-          <p:cNvPr id="6" name="Image 0" descr="/mnt/data/lockwoodstem-logo-white.png">    </p:cNvPr>
+          <p:cNvPr id="6" name="Image 0" descr="/mnt/data/lockwoodstem-logo-white.png"/>
           <p:cNvPicPr>
             <a:picLocks noChangeAspect="1"/>
           </p:cNvPicPr>
           <p:nvPr/>
         </p:nvPicPr>
         <p:blipFill>
-          <a:blip r:embed="rId1"/>
+          <a:blip r:embed="rId3"/>
           <a:stretch>
             <a:fillRect/>
           </a:stretch>
@@ -5260,7 +4982,7 @@
           <a:bodyPr wrap="square" lIns="0" tIns="0" rIns="0" bIns="0" rtlCol="0" anchor="ctr"/>
           <a:lstStyle/>
           <a:p>
-            <a:pPr indent="0" marL="0">
+            <a:pPr marL="0" indent="0">
               <a:buNone/>
             </a:pPr>
             <a:r>
@@ -5325,7 +5047,7 @@
           <a:bodyPr wrap="square" lIns="0" tIns="0" rIns="0" bIns="0" rtlCol="0" anchor="ctr"/>
           <a:lstStyle/>
           <a:p>
-            <a:pPr indent="0" marL="0">
+            <a:pPr marL="0" indent="0">
               <a:buNone/>
             </a:pPr>
             <a:r>
@@ -5363,7 +5085,7 @@
           </a:bodyPr>
           <a:lstStyle/>
           <a:p>
-            <a:pPr indent="0" marL="0">
+            <a:pPr marL="0" indent="0">
               <a:buNone/>
             </a:pPr>
             <a:r>
@@ -5401,7 +5123,7 @@
           </a:bodyPr>
           <a:lstStyle/>
           <a:p>
-            <a:pPr algn="ctr" indent="0" marL="0">
+            <a:pPr marL="0" indent="0" algn="ctr">
               <a:buNone/>
             </a:pPr>
             <a:r>
@@ -5466,7 +5188,7 @@
           <a:bodyPr wrap="square" lIns="0" tIns="0" rIns="0" bIns="0" rtlCol="0" anchor="ctr"/>
           <a:lstStyle/>
           <a:p>
-            <a:pPr indent="0" marL="0">
+            <a:pPr marL="0" indent="0">
               <a:buNone/>
             </a:pPr>
             <a:r>
@@ -5504,7 +5226,7 @@
           </a:bodyPr>
           <a:lstStyle/>
           <a:p>
-            <a:pPr indent="0" marL="0">
+            <a:pPr marL="0" indent="0">
               <a:buNone/>
             </a:pPr>
             <a:r>
@@ -5542,7 +5264,7 @@
           </a:bodyPr>
           <a:lstStyle/>
           <a:p>
-            <a:pPr algn="ctr" indent="0" marL="0">
+            <a:pPr marL="0" indent="0" algn="ctr">
               <a:buNone/>
             </a:pPr>
             <a:r>
@@ -5580,7 +5302,7 @@
           </a:bodyPr>
           <a:lstStyle/>
           <a:p>
-            <a:pPr algn="ctr" indent="0" marL="0">
+            <a:pPr marL="0" indent="0" algn="ctr">
               <a:buNone/>
             </a:pPr>
             <a:r>
@@ -5641,7 +5363,7 @@
           <a:bodyPr wrap="square" lIns="0" tIns="0" rIns="0" bIns="0" rtlCol="0" anchor="ctr"/>
           <a:lstStyle/>
           <a:p>
-            <a:pPr indent="0" marL="0">
+            <a:pPr marL="0" indent="0">
               <a:buNone/>
             </a:pPr>
             <a:r>
@@ -5680,7 +5402,7 @@
           <a:bodyPr wrap="square" lIns="0" tIns="0" rIns="0" bIns="0" rtlCol="0" anchor="ctr"/>
           <a:lstStyle/>
           <a:p>
-            <a:pPr algn="r" indent="0" marL="0">
+            <a:pPr marL="0" indent="0" algn="r">
               <a:buNone/>
             </a:pPr>
             <a:r>
@@ -5714,6 +5436,7 @@
         <a:solidFill>
           <a:srgbClr val="081B33"/>
         </a:solidFill>
+        <a:effectLst/>
       </p:bgPr>
     </p:bg>
     <p:spTree>
@@ -5778,7 +5501,7 @@
           <a:bodyPr wrap="square" lIns="0" tIns="0" rIns="0" bIns="0" rtlCol="0" anchor="ctr"/>
           <a:lstStyle/>
           <a:p>
-            <a:pPr indent="0" marL="0">
+            <a:pPr marL="0" indent="0">
               <a:buNone/>
             </a:pPr>
             <a:r>
@@ -5817,7 +5540,7 @@
           <a:bodyPr wrap="square" lIns="0" tIns="0" rIns="0" bIns="0" rtlCol="0" anchor="ctr"/>
           <a:lstStyle/>
           <a:p>
-            <a:pPr indent="0" marL="0">
+            <a:pPr marL="0" indent="0">
               <a:buNone/>
             </a:pPr>
             <a:r>
@@ -5856,7 +5579,7 @@
           <a:bodyPr wrap="square" lIns="0" tIns="0" rIns="0" bIns="0" rtlCol="0" anchor="ctr"/>
           <a:lstStyle/>
           <a:p>
-            <a:pPr indent="0" marL="0">
+            <a:pPr marL="0" indent="0">
               <a:buNone/>
             </a:pPr>
             <a:r>
@@ -5876,14 +5599,14 @@
       </p:sp>
       <p:pic>
         <p:nvPicPr>
-          <p:cNvPr id="6" name="Image 0" descr="/mnt/data/lockwoodstem-logo-white.png">    </p:cNvPr>
+          <p:cNvPr id="6" name="Image 0" descr="/mnt/data/lockwoodstem-logo-white.png"/>
           <p:cNvPicPr>
             <a:picLocks noChangeAspect="1"/>
           </p:cNvPicPr>
           <p:nvPr/>
         </p:nvPicPr>
         <p:blipFill>
-          <a:blip r:embed="rId1"/>
+          <a:blip r:embed="rId3"/>
           <a:stretch>
             <a:fillRect/>
           </a:stretch>
@@ -5921,7 +5644,7 @@
           </a:bodyPr>
           <a:lstStyle/>
           <a:p>
-            <a:pPr indent="0" marL="0">
+            <a:pPr marL="0" indent="0">
               <a:buNone/>
             </a:pPr>
             <a:r>
@@ -5986,7 +5709,7 @@
           <a:bodyPr wrap="square" lIns="0" tIns="0" rIns="0" bIns="0" rtlCol="0" anchor="ctr"/>
           <a:lstStyle/>
           <a:p>
-            <a:pPr indent="0" marL="0">
+            <a:pPr marL="0" indent="0">
               <a:buNone/>
             </a:pPr>
             <a:r>
@@ -6024,7 +5747,7 @@
           </a:bodyPr>
           <a:lstStyle/>
           <a:p>
-            <a:pPr indent="0" marL="0">
+            <a:pPr marL="0" indent="0">
               <a:buNone/>
             </a:pPr>
             <a:r>
@@ -6089,7 +5812,7 @@
           <a:bodyPr wrap="square" lIns="0" tIns="0" rIns="0" bIns="0" rtlCol="0" anchor="ctr"/>
           <a:lstStyle/>
           <a:p>
-            <a:pPr indent="0" marL="0">
+            <a:pPr marL="0" indent="0">
               <a:buNone/>
             </a:pPr>
             <a:r>
@@ -6127,7 +5850,7 @@
           </a:bodyPr>
           <a:lstStyle/>
           <a:p>
-            <a:pPr indent="0" marL="0">
+            <a:pPr marL="0" indent="0">
               <a:buNone/>
             </a:pPr>
             <a:r>
@@ -6192,7 +5915,7 @@
           <a:bodyPr wrap="square" lIns="0" tIns="0" rIns="0" bIns="0" rtlCol="0" anchor="ctr"/>
           <a:lstStyle/>
           <a:p>
-            <a:pPr indent="0" marL="0">
+            <a:pPr marL="0" indent="0">
               <a:buNone/>
             </a:pPr>
             <a:r>
@@ -6230,7 +5953,7 @@
           </a:bodyPr>
           <a:lstStyle/>
           <a:p>
-            <a:pPr indent="0" marL="0">
+            <a:pPr marL="0" indent="0">
               <a:buNone/>
             </a:pPr>
             <a:r>
@@ -6295,7 +6018,7 @@
           <a:bodyPr wrap="square" lIns="0" tIns="0" rIns="0" bIns="0" rtlCol="0" anchor="ctr"/>
           <a:lstStyle/>
           <a:p>
-            <a:pPr indent="0" marL="0">
+            <a:pPr marL="0" indent="0">
               <a:buNone/>
             </a:pPr>
             <a:r>
@@ -6333,7 +6056,7 @@
           </a:bodyPr>
           <a:lstStyle/>
           <a:p>
-            <a:pPr indent="0" marL="0">
+            <a:pPr marL="0" indent="0">
               <a:buNone/>
             </a:pPr>
             <a:r>
@@ -6400,7 +6123,7 @@
           </a:bodyPr>
           <a:lstStyle/>
           <a:p>
-            <a:pPr algn="ctr" indent="0" marL="0">
+            <a:pPr marL="0" indent="0" algn="ctr">
               <a:buNone/>
             </a:pPr>
             <a:r>
@@ -6461,7 +6184,7 @@
           <a:bodyPr wrap="square" lIns="0" tIns="0" rIns="0" bIns="0" rtlCol="0" anchor="ctr"/>
           <a:lstStyle/>
           <a:p>
-            <a:pPr indent="0" marL="0">
+            <a:pPr marL="0" indent="0">
               <a:buNone/>
             </a:pPr>
             <a:r>
@@ -6500,7 +6223,7 @@
           <a:bodyPr wrap="square" lIns="0" tIns="0" rIns="0" bIns="0" rtlCol="0" anchor="ctr"/>
           <a:lstStyle/>
           <a:p>
-            <a:pPr algn="r" indent="0" marL="0">
+            <a:pPr marL="0" indent="0" algn="r">
               <a:buNone/>
             </a:pPr>
             <a:r>
@@ -6534,6 +6257,7 @@
         <a:solidFill>
           <a:srgbClr val="081B33"/>
         </a:solidFill>
+        <a:effectLst/>
       </p:bgPr>
     </p:bg>
     <p:spTree>
@@ -6598,7 +6322,7 @@
           <a:bodyPr wrap="square" lIns="0" tIns="0" rIns="0" bIns="0" rtlCol="0" anchor="ctr"/>
           <a:lstStyle/>
           <a:p>
-            <a:pPr indent="0" marL="0">
+            <a:pPr marL="0" indent="0">
               <a:buNone/>
             </a:pPr>
             <a:r>
@@ -6637,7 +6361,7 @@
           <a:bodyPr wrap="square" lIns="0" tIns="0" rIns="0" bIns="0" rtlCol="0" anchor="ctr"/>
           <a:lstStyle/>
           <a:p>
-            <a:pPr indent="0" marL="0">
+            <a:pPr marL="0" indent="0">
               <a:buNone/>
             </a:pPr>
             <a:r>
@@ -6676,7 +6400,7 @@
           <a:bodyPr wrap="square" lIns="0" tIns="0" rIns="0" bIns="0" rtlCol="0" anchor="ctr"/>
           <a:lstStyle/>
           <a:p>
-            <a:pPr indent="0" marL="0">
+            <a:pPr marL="0" indent="0">
               <a:buNone/>
             </a:pPr>
             <a:r>
@@ -6696,14 +6420,14 @@
       </p:sp>
       <p:pic>
         <p:nvPicPr>
-          <p:cNvPr id="6" name="Image 0" descr="/mnt/data/lockwoodstem-logo-white.png">    </p:cNvPr>
+          <p:cNvPr id="6" name="Image 0" descr="/mnt/data/lockwoodstem-logo-white.png"/>
           <p:cNvPicPr>
             <a:picLocks noChangeAspect="1"/>
           </p:cNvPicPr>
           <p:nvPr/>
         </p:nvPicPr>
         <p:blipFill>
-          <a:blip r:embed="rId1"/>
+          <a:blip r:embed="rId3"/>
           <a:stretch>
             <a:fillRect/>
           </a:stretch>
@@ -6739,7 +6463,7 @@
           <a:bodyPr wrap="square" lIns="0" tIns="0" rIns="0" bIns="0" rtlCol="0" anchor="ctr"/>
           <a:lstStyle/>
           <a:p>
-            <a:pPr indent="0" marL="0">
+            <a:pPr marL="0" indent="0">
               <a:buNone/>
             </a:pPr>
             <a:r>
@@ -6806,7 +6530,7 @@
           </a:bodyPr>
           <a:lstStyle/>
           <a:p>
-            <a:pPr algn="ctr" indent="0" marL="0">
+            <a:pPr marL="0" indent="0" algn="ctr">
               <a:buNone/>
             </a:pPr>
             <a:r>
@@ -6873,7 +6597,7 @@
           </a:bodyPr>
           <a:lstStyle/>
           <a:p>
-            <a:pPr algn="ctr" indent="0" marL="0">
+            <a:pPr marL="0" indent="0" algn="ctr">
               <a:buNone/>
             </a:pPr>
             <a:r>
@@ -6911,7 +6635,7 @@
           </a:bodyPr>
           <a:lstStyle/>
           <a:p>
-            <a:pPr algn="ctr" indent="0" marL="0">
+            <a:pPr marL="0" indent="0" algn="ctr">
               <a:buNone/>
             </a:pPr>
             <a:r>
@@ -6978,7 +6702,7 @@
           </a:bodyPr>
           <a:lstStyle/>
           <a:p>
-            <a:pPr algn="ctr" indent="0" marL="0">
+            <a:pPr marL="0" indent="0" algn="ctr">
               <a:buNone/>
             </a:pPr>
             <a:r>
@@ -7016,7 +6740,7 @@
           </a:bodyPr>
           <a:lstStyle/>
           <a:p>
-            <a:pPr algn="ctr" indent="0" marL="0">
+            <a:pPr marL="0" indent="0" algn="ctr">
               <a:buNone/>
             </a:pPr>
             <a:r>
@@ -7083,7 +6807,7 @@
           </a:bodyPr>
           <a:lstStyle/>
           <a:p>
-            <a:pPr algn="ctr" indent="0" marL="0">
+            <a:pPr marL="0" indent="0" algn="ctr">
               <a:buNone/>
             </a:pPr>
             <a:r>
@@ -7121,7 +6845,7 @@
           </a:bodyPr>
           <a:lstStyle/>
           <a:p>
-            <a:pPr algn="ctr" indent="0" marL="0">
+            <a:pPr marL="0" indent="0" algn="ctr">
               <a:buNone/>
             </a:pPr>
             <a:r>
@@ -7159,7 +6883,7 @@
           </a:bodyPr>
           <a:lstStyle/>
           <a:p>
-            <a:pPr algn="ctr" indent="0" marL="0">
+            <a:pPr marL="0" indent="0" algn="ctr">
               <a:buNone/>
             </a:pPr>
             <a:r>
@@ -7220,7 +6944,7 @@
           <a:bodyPr wrap="square" lIns="0" tIns="0" rIns="0" bIns="0" rtlCol="0" anchor="ctr"/>
           <a:lstStyle/>
           <a:p>
-            <a:pPr indent="0" marL="0">
+            <a:pPr marL="0" indent="0">
               <a:buNone/>
             </a:pPr>
             <a:r>
@@ -7259,7 +6983,7 @@
           <a:bodyPr wrap="square" lIns="0" tIns="0" rIns="0" bIns="0" rtlCol="0" anchor="ctr"/>
           <a:lstStyle/>
           <a:p>
-            <a:pPr algn="r" indent="0" marL="0">
+            <a:pPr marL="0" indent="0" algn="r">
               <a:buNone/>
             </a:pPr>
             <a:r>
@@ -7293,6 +7017,7 @@
         <a:solidFill>
           <a:srgbClr val="081B33"/>
         </a:solidFill>
+        <a:effectLst/>
       </p:bgPr>
     </p:bg>
     <p:spTree>
@@ -7357,7 +7082,7 @@
           <a:bodyPr wrap="square" lIns="0" tIns="0" rIns="0" bIns="0" rtlCol="0" anchor="ctr"/>
           <a:lstStyle/>
           <a:p>
-            <a:pPr indent="0" marL="0">
+            <a:pPr marL="0" indent="0">
               <a:buNone/>
             </a:pPr>
             <a:r>
@@ -7396,7 +7121,7 @@
           <a:bodyPr wrap="square" lIns="0" tIns="0" rIns="0" bIns="0" rtlCol="0" anchor="ctr"/>
           <a:lstStyle/>
           <a:p>
-            <a:pPr indent="0" marL="0">
+            <a:pPr marL="0" indent="0">
               <a:buNone/>
             </a:pPr>
             <a:r>
@@ -7435,7 +7160,7 @@
           <a:bodyPr wrap="square" lIns="0" tIns="0" rIns="0" bIns="0" rtlCol="0" anchor="ctr"/>
           <a:lstStyle/>
           <a:p>
-            <a:pPr indent="0" marL="0">
+            <a:pPr marL="0" indent="0">
               <a:buNone/>
             </a:pPr>
             <a:r>
@@ -7455,14 +7180,14 @@
       </p:sp>
       <p:pic>
         <p:nvPicPr>
-          <p:cNvPr id="6" name="Image 0" descr="/mnt/data/lockwoodstem-logo-white.png">    </p:cNvPr>
+          <p:cNvPr id="6" name="Image 0" descr="/mnt/data/lockwoodstem-logo-white.png"/>
           <p:cNvPicPr>
             <a:picLocks noChangeAspect="1"/>
           </p:cNvPicPr>
           <p:nvPr/>
         </p:nvPicPr>
         <p:blipFill>
-          <a:blip r:embed="rId1"/>
+          <a:blip r:embed="rId3"/>
           <a:stretch>
             <a:fillRect/>
           </a:stretch>
@@ -7554,7 +7279,7 @@
           <a:bodyPr wrap="square" lIns="0" tIns="0" rIns="0" bIns="0" rtlCol="0" anchor="ctr"/>
           <a:lstStyle/>
           <a:p>
-            <a:pPr algn="ctr" indent="0" marL="0">
+            <a:pPr marL="0" indent="0" algn="ctr">
               <a:buNone/>
             </a:pPr>
             <a:r>
@@ -7592,7 +7317,7 @@
           </a:bodyPr>
           <a:lstStyle/>
           <a:p>
-            <a:pPr indent="0" marL="0">
+            <a:pPr marL="0" indent="0">
               <a:buNone/>
             </a:pPr>
             <a:r>
@@ -7628,7 +7353,7 @@
           <a:bodyPr wrap="square" lIns="0" tIns="0" rIns="0" bIns="0" rtlCol="0" anchor="ctr"/>
           <a:lstStyle/>
           <a:p>
-            <a:pPr algn="ctr" indent="0" marL="0">
+            <a:pPr marL="0" indent="0" algn="ctr">
               <a:buNone/>
             </a:pPr>
             <a:r>
@@ -7720,7 +7445,7 @@
           <a:bodyPr wrap="square" lIns="0" tIns="0" rIns="0" bIns="0" rtlCol="0" anchor="ctr"/>
           <a:lstStyle/>
           <a:p>
-            <a:pPr algn="ctr" indent="0" marL="0">
+            <a:pPr marL="0" indent="0" algn="ctr">
               <a:buNone/>
             </a:pPr>
             <a:r>
@@ -7758,7 +7483,7 @@
           </a:bodyPr>
           <a:lstStyle/>
           <a:p>
-            <a:pPr indent="0" marL="0">
+            <a:pPr marL="0" indent="0">
               <a:buNone/>
             </a:pPr>
             <a:r>
@@ -7794,7 +7519,7 @@
           <a:bodyPr wrap="square" lIns="0" tIns="0" rIns="0" bIns="0" rtlCol="0" anchor="ctr"/>
           <a:lstStyle/>
           <a:p>
-            <a:pPr algn="ctr" indent="0" marL="0">
+            <a:pPr marL="0" indent="0" algn="ctr">
               <a:buNone/>
             </a:pPr>
             <a:r>
@@ -7886,7 +7611,7 @@
           <a:bodyPr wrap="square" lIns="0" tIns="0" rIns="0" bIns="0" rtlCol="0" anchor="ctr"/>
           <a:lstStyle/>
           <a:p>
-            <a:pPr algn="ctr" indent="0" marL="0">
+            <a:pPr marL="0" indent="0" algn="ctr">
               <a:buNone/>
             </a:pPr>
             <a:r>
@@ -7924,7 +7649,7 @@
           </a:bodyPr>
           <a:lstStyle/>
           <a:p>
-            <a:pPr indent="0" marL="0">
+            <a:pPr marL="0" indent="0">
               <a:buNone/>
             </a:pPr>
             <a:r>
@@ -7960,7 +7685,7 @@
           <a:bodyPr wrap="square" lIns="0" tIns="0" rIns="0" bIns="0" rtlCol="0" anchor="ctr"/>
           <a:lstStyle/>
           <a:p>
-            <a:pPr algn="ctr" indent="0" marL="0">
+            <a:pPr marL="0" indent="0" algn="ctr">
               <a:buNone/>
             </a:pPr>
             <a:r>
@@ -8027,7 +7752,7 @@
           </a:bodyPr>
           <a:lstStyle/>
           <a:p>
-            <a:pPr algn="ctr" indent="0" marL="0">
+            <a:pPr marL="0" indent="0" algn="ctr">
               <a:buNone/>
             </a:pPr>
             <a:r>
@@ -8088,7 +7813,7 @@
           <a:bodyPr wrap="square" lIns="0" tIns="0" rIns="0" bIns="0" rtlCol="0" anchor="ctr"/>
           <a:lstStyle/>
           <a:p>
-            <a:pPr indent="0" marL="0">
+            <a:pPr marL="0" indent="0">
               <a:buNone/>
             </a:pPr>
             <a:r>
@@ -8127,7 +7852,7 @@
           <a:bodyPr wrap="square" lIns="0" tIns="0" rIns="0" bIns="0" rtlCol="0" anchor="ctr"/>
           <a:lstStyle/>
           <a:p>
-            <a:pPr algn="r" indent="0" marL="0">
+            <a:pPr marL="0" indent="0" algn="r">
               <a:buNone/>
             </a:pPr>
             <a:r>
@@ -8161,6 +7886,7 @@
         <a:solidFill>
           <a:srgbClr val="081B33"/>
         </a:solidFill>
+        <a:effectLst/>
       </p:bgPr>
     </p:bg>
     <p:spTree>
@@ -8225,7 +7951,7 @@
           <a:bodyPr wrap="square" lIns="0" tIns="0" rIns="0" bIns="0" rtlCol="0" anchor="ctr"/>
           <a:lstStyle/>
           <a:p>
-            <a:pPr indent="0" marL="0">
+            <a:pPr marL="0" indent="0">
               <a:buNone/>
             </a:pPr>
             <a:r>
@@ -8264,7 +7990,7 @@
           <a:bodyPr wrap="square" lIns="0" tIns="0" rIns="0" bIns="0" rtlCol="0" anchor="ctr"/>
           <a:lstStyle/>
           <a:p>
-            <a:pPr indent="0" marL="0">
+            <a:pPr marL="0" indent="0">
               <a:buNone/>
             </a:pPr>
             <a:r>
@@ -8303,7 +8029,7 @@
           <a:bodyPr wrap="square" lIns="0" tIns="0" rIns="0" bIns="0" rtlCol="0" anchor="ctr"/>
           <a:lstStyle/>
           <a:p>
-            <a:pPr indent="0" marL="0">
+            <a:pPr marL="0" indent="0">
               <a:buNone/>
             </a:pPr>
             <a:r>
@@ -8323,14 +8049,14 @@
       </p:sp>
       <p:pic>
         <p:nvPicPr>
-          <p:cNvPr id="6" name="Image 0" descr="/mnt/data/lockwoodstem-logo-white.png">    </p:cNvPr>
+          <p:cNvPr id="6" name="Image 0" descr="/mnt/data/lockwoodstem-logo-white.png"/>
           <p:cNvPicPr>
             <a:picLocks noChangeAspect="1"/>
           </p:cNvPicPr>
           <p:nvPr/>
         </p:nvPicPr>
         <p:blipFill>
-          <a:blip r:embed="rId1"/>
+          <a:blip r:embed="rId3"/>
           <a:stretch>
             <a:fillRect/>
           </a:stretch>
@@ -8422,7 +8148,7 @@
           <a:bodyPr wrap="square" lIns="0" tIns="0" rIns="0" bIns="0" rtlCol="0" anchor="ctr"/>
           <a:lstStyle/>
           <a:p>
-            <a:pPr algn="ctr" indent="0" marL="0">
+            <a:pPr marL="0" indent="0" algn="ctr">
               <a:buNone/>
             </a:pPr>
             <a:r>
@@ -8460,7 +8186,7 @@
           </a:bodyPr>
           <a:lstStyle/>
           <a:p>
-            <a:pPr indent="0" marL="0">
+            <a:pPr marL="0" indent="0">
               <a:buNone/>
             </a:pPr>
             <a:r>
@@ -8498,7 +8224,7 @@
           </a:bodyPr>
           <a:lstStyle/>
           <a:p>
-            <a:pPr indent="0" marL="0">
+            <a:pPr marL="0" indent="0">
               <a:buNone/>
             </a:pPr>
             <a:r>
@@ -8590,7 +8316,7 @@
           <a:bodyPr wrap="square" lIns="0" tIns="0" rIns="0" bIns="0" rtlCol="0" anchor="ctr"/>
           <a:lstStyle/>
           <a:p>
-            <a:pPr algn="ctr" indent="0" marL="0">
+            <a:pPr marL="0" indent="0" algn="ctr">
               <a:buNone/>
             </a:pPr>
             <a:r>
@@ -8628,7 +8354,7 @@
           </a:bodyPr>
           <a:lstStyle/>
           <a:p>
-            <a:pPr indent="0" marL="0">
+            <a:pPr marL="0" indent="0">
               <a:buNone/>
             </a:pPr>
             <a:r>
@@ -8666,7 +8392,7 @@
           </a:bodyPr>
           <a:lstStyle/>
           <a:p>
-            <a:pPr indent="0" marL="0">
+            <a:pPr marL="0" indent="0">
               <a:buNone/>
             </a:pPr>
             <a:r>
@@ -8758,7 +8484,7 @@
           <a:bodyPr wrap="square" lIns="0" tIns="0" rIns="0" bIns="0" rtlCol="0" anchor="ctr"/>
           <a:lstStyle/>
           <a:p>
-            <a:pPr algn="ctr" indent="0" marL="0">
+            <a:pPr marL="0" indent="0" algn="ctr">
               <a:buNone/>
             </a:pPr>
             <a:r>
@@ -8796,7 +8522,7 @@
           </a:bodyPr>
           <a:lstStyle/>
           <a:p>
-            <a:pPr indent="0" marL="0">
+            <a:pPr marL="0" indent="0">
               <a:buNone/>
             </a:pPr>
             <a:r>
@@ -8834,7 +8560,7 @@
           </a:bodyPr>
           <a:lstStyle/>
           <a:p>
-            <a:pPr indent="0" marL="0">
+            <a:pPr marL="0" indent="0">
               <a:buNone/>
             </a:pPr>
             <a:r>
@@ -8872,7 +8598,7 @@
           </a:bodyPr>
           <a:lstStyle/>
           <a:p>
-            <a:pPr algn="ctr" indent="0" marL="0">
+            <a:pPr marL="0" indent="0" algn="ctr">
               <a:buNone/>
             </a:pPr>
             <a:r>
@@ -8933,7 +8659,7 @@
           <a:bodyPr wrap="square" lIns="0" tIns="0" rIns="0" bIns="0" rtlCol="0" anchor="ctr"/>
           <a:lstStyle/>
           <a:p>
-            <a:pPr indent="0" marL="0">
+            <a:pPr marL="0" indent="0">
               <a:buNone/>
             </a:pPr>
             <a:r>
@@ -8972,7 +8698,7 @@
           <a:bodyPr wrap="square" lIns="0" tIns="0" rIns="0" bIns="0" rtlCol="0" anchor="ctr"/>
           <a:lstStyle/>
           <a:p>
-            <a:pPr algn="r" indent="0" marL="0">
+            <a:pPr marL="0" indent="0" algn="r">
               <a:buNone/>
             </a:pPr>
             <a:r>
@@ -9006,6 +8732,7 @@
         <a:solidFill>
           <a:srgbClr val="081B33"/>
         </a:solidFill>
+        <a:effectLst/>
       </p:bgPr>
     </p:bg>
     <p:spTree>
@@ -9070,7 +8797,7 @@
           <a:bodyPr wrap="square" lIns="0" tIns="0" rIns="0" bIns="0" rtlCol="0" anchor="ctr"/>
           <a:lstStyle/>
           <a:p>
-            <a:pPr indent="0" marL="0">
+            <a:pPr marL="0" indent="0">
               <a:buNone/>
             </a:pPr>
             <a:r>
@@ -9109,7 +8836,7 @@
           <a:bodyPr wrap="square" lIns="0" tIns="0" rIns="0" bIns="0" rtlCol="0" anchor="ctr"/>
           <a:lstStyle/>
           <a:p>
-            <a:pPr indent="0" marL="0">
+            <a:pPr marL="0" indent="0">
               <a:buNone/>
             </a:pPr>
             <a:r>
@@ -9148,7 +8875,7 @@
           <a:bodyPr wrap="square" lIns="0" tIns="0" rIns="0" bIns="0" rtlCol="0" anchor="ctr"/>
           <a:lstStyle/>
           <a:p>
-            <a:pPr indent="0" marL="0">
+            <a:pPr marL="0" indent="0">
               <a:buNone/>
             </a:pPr>
             <a:r>
@@ -9168,14 +8895,14 @@
       </p:sp>
       <p:pic>
         <p:nvPicPr>
-          <p:cNvPr id="6" name="Image 0" descr="/mnt/data/lockwoodstem-logo-white.png">    </p:cNvPr>
+          <p:cNvPr id="6" name="Image 0" descr="/mnt/data/lockwoodstem-logo-white.png"/>
           <p:cNvPicPr>
             <a:picLocks noChangeAspect="1"/>
           </p:cNvPicPr>
           <p:nvPr/>
         </p:nvPicPr>
         <p:blipFill>
-          <a:blip r:embed="rId1"/>
+          <a:blip r:embed="rId3"/>
           <a:stretch>
             <a:fillRect/>
           </a:stretch>
@@ -9240,7 +8967,7 @@
           <a:bodyPr wrap="square" lIns="0" tIns="0" rIns="0" bIns="0" rtlCol="0" anchor="ctr"/>
           <a:lstStyle/>
           <a:p>
-            <a:pPr indent="0" marL="0">
+            <a:pPr marL="0" indent="0">
               <a:buNone/>
             </a:pPr>
             <a:r>
@@ -9303,7 +9030,7 @@
           <a:bodyPr wrap="square" lIns="0" tIns="0" rIns="0" bIns="0" rtlCol="0" anchor="ctr"/>
           <a:lstStyle/>
           <a:p>
-            <a:pPr algn="ctr" indent="0" marL="0">
+            <a:pPr marL="0" indent="0" algn="ctr">
               <a:buNone/>
             </a:pPr>
             <a:r>
@@ -9341,7 +9068,7 @@
           </a:bodyPr>
           <a:lstStyle/>
           <a:p>
-            <a:pPr indent="0" marL="0">
+            <a:pPr marL="0" indent="0">
               <a:buNone/>
             </a:pPr>
             <a:r>
@@ -9404,7 +9131,7 @@
           <a:bodyPr wrap="square" lIns="0" tIns="0" rIns="0" bIns="0" rtlCol="0" anchor="ctr"/>
           <a:lstStyle/>
           <a:p>
-            <a:pPr algn="ctr" indent="0" marL="0">
+            <a:pPr marL="0" indent="0" algn="ctr">
               <a:buNone/>
             </a:pPr>
             <a:r>
@@ -9442,7 +9169,7 @@
           </a:bodyPr>
           <a:lstStyle/>
           <a:p>
-            <a:pPr indent="0" marL="0">
+            <a:pPr marL="0" indent="0">
               <a:buNone/>
             </a:pPr>
             <a:r>
@@ -9505,7 +9232,7 @@
           <a:bodyPr wrap="square" lIns="0" tIns="0" rIns="0" bIns="0" rtlCol="0" anchor="ctr"/>
           <a:lstStyle/>
           <a:p>
-            <a:pPr algn="ctr" indent="0" marL="0">
+            <a:pPr marL="0" indent="0" algn="ctr">
               <a:buNone/>
             </a:pPr>
             <a:r>
@@ -9543,7 +9270,7 @@
           </a:bodyPr>
           <a:lstStyle/>
           <a:p>
-            <a:pPr indent="0" marL="0">
+            <a:pPr marL="0" indent="0">
               <a:buNone/>
             </a:pPr>
             <a:r>
@@ -9608,7 +9335,7 @@
           <a:bodyPr wrap="square" lIns="0" tIns="0" rIns="0" bIns="0" rtlCol="0" anchor="ctr"/>
           <a:lstStyle/>
           <a:p>
-            <a:pPr algn="ctr" indent="0" marL="0">
+            <a:pPr marL="0" indent="0" algn="ctr">
               <a:buNone/>
             </a:pPr>
             <a:r>
@@ -9669,7 +9396,7 @@
           <a:bodyPr wrap="square" lIns="0" tIns="0" rIns="0" bIns="0" rtlCol="0" anchor="ctr"/>
           <a:lstStyle/>
           <a:p>
-            <a:pPr indent="0" marL="0">
+            <a:pPr marL="0" indent="0">
               <a:buNone/>
             </a:pPr>
             <a:r>
@@ -9708,7 +9435,7 @@
           <a:bodyPr wrap="square" lIns="0" tIns="0" rIns="0" bIns="0" rtlCol="0" anchor="ctr"/>
           <a:lstStyle/>
           <a:p>
-            <a:pPr algn="r" indent="0" marL="0">
+            <a:pPr marL="0" indent="0" algn="r">
               <a:buNone/>
             </a:pPr>
             <a:r>
@@ -9742,6 +9469,7 @@
         <a:solidFill>
           <a:srgbClr val="081B33"/>
         </a:solidFill>
+        <a:effectLst/>
       </p:bgPr>
     </p:bg>
     <p:spTree>
@@ -9806,7 +9534,7 @@
           <a:bodyPr wrap="square" lIns="0" tIns="0" rIns="0" bIns="0" rtlCol="0" anchor="ctr"/>
           <a:lstStyle/>
           <a:p>
-            <a:pPr indent="0" marL="0">
+            <a:pPr marL="0" indent="0">
               <a:buNone/>
             </a:pPr>
             <a:r>
@@ -9845,7 +9573,7 @@
           <a:bodyPr wrap="square" lIns="0" tIns="0" rIns="0" bIns="0" rtlCol="0" anchor="ctr"/>
           <a:lstStyle/>
           <a:p>
-            <a:pPr indent="0" marL="0">
+            <a:pPr marL="0" indent="0">
               <a:buNone/>
             </a:pPr>
             <a:r>
@@ -9884,7 +9612,7 @@
           <a:bodyPr wrap="square" lIns="0" tIns="0" rIns="0" bIns="0" rtlCol="0" anchor="ctr"/>
           <a:lstStyle/>
           <a:p>
-            <a:pPr indent="0" marL="0">
+            <a:pPr marL="0" indent="0">
               <a:buNone/>
             </a:pPr>
             <a:r>
@@ -9904,14 +9632,14 @@
       </p:sp>
       <p:pic>
         <p:nvPicPr>
-          <p:cNvPr id="6" name="Image 0" descr="/mnt/data/lockwoodstem-logo-white.png">    </p:cNvPr>
+          <p:cNvPr id="6" name="Image 0" descr="/mnt/data/lockwoodstem-logo-white.png"/>
           <p:cNvPicPr>
             <a:picLocks noChangeAspect="1"/>
           </p:cNvPicPr>
           <p:nvPr/>
         </p:nvPicPr>
         <p:blipFill>
-          <a:blip r:embed="rId1"/>
+          <a:blip r:embed="rId3"/>
           <a:stretch>
             <a:fillRect/>
           </a:stretch>
@@ -9976,7 +9704,7 @@
           <a:bodyPr wrap="square" lIns="0" tIns="0" rIns="0" bIns="0" rtlCol="0" anchor="ctr"/>
           <a:lstStyle/>
           <a:p>
-            <a:pPr indent="0" marL="0">
+            <a:pPr marL="0" indent="0">
               <a:buNone/>
             </a:pPr>
             <a:r>
@@ -10012,7 +9740,7 @@
           <a:bodyPr wrap="square" lIns="0" tIns="0" rIns="0" bIns="0" rtlCol="0" anchor="ctr"/>
           <a:lstStyle/>
           <a:p>
-            <a:pPr indent="0" marL="0">
+            <a:pPr marL="0" indent="0">
               <a:buNone/>
             </a:pPr>
             <a:r>
@@ -10050,7 +9778,7 @@
           </a:bodyPr>
           <a:lstStyle/>
           <a:p>
-            <a:pPr indent="0" marL="0">
+            <a:pPr marL="0" indent="0">
               <a:buNone/>
             </a:pPr>
             <a:r>
@@ -10089,7 +9817,7 @@
           <a:bodyPr wrap="square" lIns="0" tIns="0" rIns="0" bIns="0" rtlCol="0" anchor="ctr"/>
           <a:lstStyle/>
           <a:p>
-            <a:pPr indent="0" marL="0">
+            <a:pPr marL="0" indent="0">
               <a:buNone/>
             </a:pPr>
             <a:r>
@@ -10127,7 +9855,7 @@
           </a:bodyPr>
           <a:lstStyle/>
           <a:p>
-            <a:pPr indent="0" marL="0">
+            <a:pPr marL="0" indent="0">
               <a:buNone/>
             </a:pPr>
             <a:r>
@@ -10166,7 +9894,7 @@
           <a:bodyPr wrap="square" lIns="0" tIns="0" rIns="0" bIns="0" rtlCol="0" anchor="ctr"/>
           <a:lstStyle/>
           <a:p>
-            <a:pPr indent="0" marL="0">
+            <a:pPr marL="0" indent="0">
               <a:buNone/>
             </a:pPr>
             <a:r>
@@ -10204,7 +9932,7 @@
           </a:bodyPr>
           <a:lstStyle/>
           <a:p>
-            <a:pPr indent="0" marL="0">
+            <a:pPr marL="0" indent="0">
               <a:buNone/>
             </a:pPr>
             <a:r>
@@ -10268,7 +9996,7 @@
           <a:bodyPr wrap="square" lIns="0" tIns="0" rIns="0" bIns="0" rtlCol="0" anchor="ctr"/>
           <a:lstStyle/>
           <a:p>
-            <a:pPr indent="0" marL="0">
+            <a:pPr marL="0" indent="0">
               <a:buNone/>
             </a:pPr>
             <a:r>
@@ -10306,7 +10034,7 @@
           </a:bodyPr>
           <a:lstStyle/>
           <a:p>
-            <a:pPr indent="0" marL="0">
+            <a:pPr marL="0" indent="0">
               <a:buNone/>
             </a:pPr>
             <a:r>
@@ -10371,7 +10099,7 @@
           <a:bodyPr wrap="square" lIns="0" tIns="0" rIns="0" bIns="0" rtlCol="0" anchor="ctr"/>
           <a:lstStyle/>
           <a:p>
-            <a:pPr indent="0" marL="0">
+            <a:pPr marL="0" indent="0">
               <a:buNone/>
             </a:pPr>
             <a:r>
@@ -10436,7 +10164,7 @@
           <a:bodyPr wrap="square" lIns="0" tIns="0" rIns="0" bIns="0" rtlCol="0" anchor="ctr"/>
           <a:lstStyle/>
           <a:p>
-            <a:pPr algn="ctr" indent="0" marL="0">
+            <a:pPr marL="0" indent="0" algn="ctr">
               <a:buNone/>
             </a:pPr>
             <a:r>
@@ -10474,7 +10202,7 @@
           </a:bodyPr>
           <a:lstStyle/>
           <a:p>
-            <a:pPr indent="0" marL="0">
+            <a:pPr marL="0" indent="0">
               <a:buNone/>
             </a:pPr>
             <a:r>
@@ -10539,7 +10267,7 @@
           <a:bodyPr wrap="square" lIns="0" tIns="0" rIns="0" bIns="0" rtlCol="0" anchor="ctr"/>
           <a:lstStyle/>
           <a:p>
-            <a:pPr algn="ctr" indent="0" marL="0">
+            <a:pPr marL="0" indent="0" algn="ctr">
               <a:buNone/>
             </a:pPr>
             <a:r>
@@ -10577,7 +10305,7 @@
           </a:bodyPr>
           <a:lstStyle/>
           <a:p>
-            <a:pPr indent="0" marL="0">
+            <a:pPr marL="0" indent="0">
               <a:buNone/>
             </a:pPr>
             <a:r>
@@ -10642,7 +10370,7 @@
           <a:bodyPr wrap="square" lIns="0" tIns="0" rIns="0" bIns="0" rtlCol="0" anchor="ctr"/>
           <a:lstStyle/>
           <a:p>
-            <a:pPr algn="ctr" indent="0" marL="0">
+            <a:pPr marL="0" indent="0" algn="ctr">
               <a:buNone/>
             </a:pPr>
             <a:r>
@@ -10680,7 +10408,7 @@
           </a:bodyPr>
           <a:lstStyle/>
           <a:p>
-            <a:pPr indent="0" marL="0">
+            <a:pPr marL="0" indent="0">
               <a:buNone/>
             </a:pPr>
             <a:r>
@@ -10745,7 +10473,7 @@
           <a:bodyPr wrap="square" lIns="0" tIns="0" rIns="0" bIns="0" rtlCol="0" anchor="ctr"/>
           <a:lstStyle/>
           <a:p>
-            <a:pPr algn="ctr" indent="0" marL="0">
+            <a:pPr marL="0" indent="0" algn="ctr">
               <a:buNone/>
             </a:pPr>
             <a:r>
@@ -10783,7 +10511,7 @@
           </a:bodyPr>
           <a:lstStyle/>
           <a:p>
-            <a:pPr indent="0" marL="0">
+            <a:pPr marL="0" indent="0">
               <a:buNone/>
             </a:pPr>
             <a:r>
@@ -10848,7 +10576,7 @@
           <a:bodyPr wrap="square" lIns="0" tIns="0" rIns="0" bIns="0" rtlCol="0" anchor="ctr"/>
           <a:lstStyle/>
           <a:p>
-            <a:pPr algn="ctr" indent="0" marL="0">
+            <a:pPr marL="0" indent="0" algn="ctr">
               <a:buNone/>
             </a:pPr>
             <a:r>
@@ -10886,7 +10614,7 @@
           </a:bodyPr>
           <a:lstStyle/>
           <a:p>
-            <a:pPr indent="0" marL="0">
+            <a:pPr marL="0" indent="0">
               <a:buNone/>
             </a:pPr>
             <a:r>
@@ -10951,7 +10679,7 @@
           <a:bodyPr wrap="square" lIns="0" tIns="0" rIns="0" bIns="0" rtlCol="0" anchor="ctr"/>
           <a:lstStyle/>
           <a:p>
-            <a:pPr algn="ctr" indent="0" marL="0">
+            <a:pPr marL="0" indent="0" algn="ctr">
               <a:buNone/>
             </a:pPr>
             <a:r>
@@ -10989,7 +10717,7 @@
           </a:bodyPr>
           <a:lstStyle/>
           <a:p>
-            <a:pPr indent="0" marL="0">
+            <a:pPr marL="0" indent="0">
               <a:buNone/>
             </a:pPr>
             <a:r>
@@ -11054,7 +10782,7 @@
           <a:bodyPr wrap="square" lIns="0" tIns="0" rIns="0" bIns="0" rtlCol="0" anchor="ctr"/>
           <a:lstStyle/>
           <a:p>
-            <a:pPr algn="ctr" indent="0" marL="0">
+            <a:pPr marL="0" indent="0" algn="ctr">
               <a:buNone/>
             </a:pPr>
             <a:r>
@@ -11092,7 +10820,7 @@
           </a:bodyPr>
           <a:lstStyle/>
           <a:p>
-            <a:pPr indent="0" marL="0">
+            <a:pPr marL="0" indent="0">
               <a:buNone/>
             </a:pPr>
             <a:r>
@@ -11153,7 +10881,7 @@
           <a:bodyPr wrap="square" lIns="0" tIns="0" rIns="0" bIns="0" rtlCol="0" anchor="ctr"/>
           <a:lstStyle/>
           <a:p>
-            <a:pPr indent="0" marL="0">
+            <a:pPr marL="0" indent="0">
               <a:buNone/>
             </a:pPr>
             <a:r>
@@ -11192,7 +10920,7 @@
           <a:bodyPr wrap="square" lIns="0" tIns="0" rIns="0" bIns="0" rtlCol="0" anchor="ctr"/>
           <a:lstStyle/>
           <a:p>
-            <a:pPr algn="r" indent="0" marL="0">
+            <a:pPr marL="0" indent="0" algn="r">
               <a:buNone/>
             </a:pPr>
             <a:r>
@@ -11226,6 +10954,7 @@
         <a:solidFill>
           <a:srgbClr val="081B33"/>
         </a:solidFill>
+        <a:effectLst/>
       </p:bgPr>
     </p:bg>
     <p:spTree>
@@ -11290,7 +11019,7 @@
           <a:bodyPr wrap="square" lIns="0" tIns="0" rIns="0" bIns="0" rtlCol="0" anchor="ctr"/>
           <a:lstStyle/>
           <a:p>
-            <a:pPr indent="0" marL="0">
+            <a:pPr marL="0" indent="0">
               <a:buNone/>
             </a:pPr>
             <a:r>
@@ -11329,7 +11058,7 @@
           <a:bodyPr wrap="square" lIns="0" tIns="0" rIns="0" bIns="0" rtlCol="0" anchor="ctr"/>
           <a:lstStyle/>
           <a:p>
-            <a:pPr indent="0" marL="0">
+            <a:pPr marL="0" indent="0">
               <a:buNone/>
             </a:pPr>
             <a:r>
@@ -11368,7 +11097,7 @@
           <a:bodyPr wrap="square" lIns="0" tIns="0" rIns="0" bIns="0" rtlCol="0" anchor="ctr"/>
           <a:lstStyle/>
           <a:p>
-            <a:pPr indent="0" marL="0">
+            <a:pPr marL="0" indent="0">
               <a:buNone/>
             </a:pPr>
             <a:r>
@@ -11388,14 +11117,14 @@
       </p:sp>
       <p:pic>
         <p:nvPicPr>
-          <p:cNvPr id="6" name="Image 0" descr="/mnt/data/lockwoodstem-logo-white.png">    </p:cNvPr>
+          <p:cNvPr id="6" name="Image 0" descr="/mnt/data/lockwoodstem-logo-white.png"/>
           <p:cNvPicPr>
             <a:picLocks noChangeAspect="1"/>
           </p:cNvPicPr>
           <p:nvPr/>
         </p:nvPicPr>
         <p:blipFill>
-          <a:blip r:embed="rId1"/>
+          <a:blip r:embed="rId3"/>
           <a:stretch>
             <a:fillRect/>
           </a:stretch>
@@ -11433,7 +11162,7 @@
           </a:bodyPr>
           <a:lstStyle/>
           <a:p>
-            <a:pPr indent="0" marL="0">
+            <a:pPr marL="0" indent="0">
               <a:buNone/>
             </a:pPr>
             <a:r>
@@ -11498,7 +11227,7 @@
           <a:bodyPr wrap="square" lIns="0" tIns="0" rIns="0" bIns="0" rtlCol="0" anchor="ctr"/>
           <a:lstStyle/>
           <a:p>
-            <a:pPr indent="0" marL="0">
+            <a:pPr marL="0" indent="0">
               <a:buNone/>
             </a:pPr>
             <a:r>
@@ -11536,7 +11265,7 @@
           </a:bodyPr>
           <a:lstStyle/>
           <a:p>
-            <a:pPr indent="0" marL="0">
+            <a:pPr marL="0" indent="0">
               <a:buNone/>
             </a:pPr>
             <a:r>
@@ -11603,7 +11332,7 @@
           </a:bodyPr>
           <a:lstStyle/>
           <a:p>
-            <a:pPr algn="ctr" indent="0" marL="0">
+            <a:pPr marL="0" indent="0" algn="ctr">
               <a:buNone/>
             </a:pPr>
             <a:r>
@@ -11641,7 +11370,7 @@
           </a:bodyPr>
           <a:lstStyle/>
           <a:p>
-            <a:pPr algn="ctr" indent="0" marL="0">
+            <a:pPr marL="0" indent="0" algn="ctr">
               <a:buNone/>
             </a:pPr>
             <a:r>
@@ -11702,7 +11431,7 @@
           <a:bodyPr wrap="square" lIns="0" tIns="0" rIns="0" bIns="0" rtlCol="0" anchor="ctr"/>
           <a:lstStyle/>
           <a:p>
-            <a:pPr indent="0" marL="0">
+            <a:pPr marL="0" indent="0">
               <a:buNone/>
             </a:pPr>
             <a:r>
@@ -11741,7 +11470,7 @@
           <a:bodyPr wrap="square" lIns="0" tIns="0" rIns="0" bIns="0" rtlCol="0" anchor="ctr"/>
           <a:lstStyle/>
           <a:p>
-            <a:pPr algn="r" indent="0" marL="0">
+            <a:pPr marL="0" indent="0" algn="r">
               <a:buNone/>
             </a:pPr>
             <a:r>
@@ -11775,6 +11504,7 @@
         <a:solidFill>
           <a:srgbClr val="081B33"/>
         </a:solidFill>
+        <a:effectLst/>
       </p:bgPr>
     </p:bg>
     <p:spTree>
@@ -11839,7 +11569,7 @@
           <a:bodyPr wrap="square" lIns="0" tIns="0" rIns="0" bIns="0" rtlCol="0" anchor="ctr"/>
           <a:lstStyle/>
           <a:p>
-            <a:pPr indent="0" marL="0">
+            <a:pPr marL="0" indent="0">
               <a:buNone/>
             </a:pPr>
             <a:r>
@@ -11878,7 +11608,7 @@
           <a:bodyPr wrap="square" lIns="0" tIns="0" rIns="0" bIns="0" rtlCol="0" anchor="ctr"/>
           <a:lstStyle/>
           <a:p>
-            <a:pPr indent="0" marL="0">
+            <a:pPr marL="0" indent="0">
               <a:buNone/>
             </a:pPr>
             <a:r>
@@ -11917,7 +11647,7 @@
           <a:bodyPr wrap="square" lIns="0" tIns="0" rIns="0" bIns="0" rtlCol="0" anchor="ctr"/>
           <a:lstStyle/>
           <a:p>
-            <a:pPr indent="0" marL="0">
+            <a:pPr marL="0" indent="0">
               <a:buNone/>
             </a:pPr>
             <a:r>
@@ -11937,14 +11667,14 @@
       </p:sp>
       <p:pic>
         <p:nvPicPr>
-          <p:cNvPr id="6" name="Image 0" descr="/mnt/data/lockwoodstem-logo-white.png">    </p:cNvPr>
+          <p:cNvPr id="6" name="Image 0" descr="/mnt/data/lockwoodstem-logo-white.png"/>
           <p:cNvPicPr>
             <a:picLocks noChangeAspect="1"/>
           </p:cNvPicPr>
           <p:nvPr/>
         </p:nvPicPr>
         <p:blipFill>
-          <a:blip r:embed="rId1"/>
+          <a:blip r:embed="rId3"/>
           <a:stretch>
             <a:fillRect/>
           </a:stretch>
@@ -11982,7 +11712,7 @@
           </a:bodyPr>
           <a:lstStyle/>
           <a:p>
-            <a:pPr indent="0" marL="0">
+            <a:pPr marL="0" indent="0">
               <a:buNone/>
             </a:pPr>
             <a:r>
@@ -12049,7 +11779,7 @@
           </a:bodyPr>
           <a:lstStyle/>
           <a:p>
-            <a:pPr algn="ctr" indent="0" marL="0">
+            <a:pPr marL="0" indent="0" algn="ctr">
               <a:buNone/>
             </a:pPr>
             <a:r>
@@ -12087,7 +11817,7 @@
           </a:bodyPr>
           <a:lstStyle/>
           <a:p>
-            <a:pPr indent="0" marL="0">
+            <a:pPr marL="0" indent="0">
               <a:buNone/>
             </a:pPr>
             <a:r>
@@ -12154,7 +11884,7 @@
           </a:bodyPr>
           <a:lstStyle/>
           <a:p>
-            <a:pPr algn="ctr" indent="0" marL="0">
+            <a:pPr marL="0" indent="0" algn="ctr">
               <a:buNone/>
             </a:pPr>
             <a:r>
@@ -12192,7 +11922,7 @@
           </a:bodyPr>
           <a:lstStyle/>
           <a:p>
-            <a:pPr indent="0" marL="0">
+            <a:pPr marL="0" indent="0">
               <a:buNone/>
             </a:pPr>
             <a:r>
@@ -12259,7 +11989,7 @@
           </a:bodyPr>
           <a:lstStyle/>
           <a:p>
-            <a:pPr algn="ctr" indent="0" marL="0">
+            <a:pPr marL="0" indent="0" algn="ctr">
               <a:buNone/>
             </a:pPr>
             <a:r>
@@ -12297,7 +12027,7 @@
           </a:bodyPr>
           <a:lstStyle/>
           <a:p>
-            <a:pPr indent="0" marL="0">
+            <a:pPr marL="0" indent="0">
               <a:buNone/>
             </a:pPr>
             <a:r>
@@ -12364,7 +12094,7 @@
           </a:bodyPr>
           <a:lstStyle/>
           <a:p>
-            <a:pPr algn="ctr" indent="0" marL="0">
+            <a:pPr marL="0" indent="0" algn="ctr">
               <a:buNone/>
             </a:pPr>
             <a:r>
@@ -12402,7 +12132,7 @@
           </a:bodyPr>
           <a:lstStyle/>
           <a:p>
-            <a:pPr indent="0" marL="0">
+            <a:pPr marL="0" indent="0">
               <a:buNone/>
             </a:pPr>
             <a:r>
@@ -12440,7 +12170,7 @@
           </a:bodyPr>
           <a:lstStyle/>
           <a:p>
-            <a:pPr algn="ctr" indent="0" marL="0">
+            <a:pPr marL="0" indent="0" algn="ctr">
               <a:buNone/>
             </a:pPr>
             <a:r>
@@ -12501,7 +12231,7 @@
           <a:bodyPr wrap="square" lIns="0" tIns="0" rIns="0" bIns="0" rtlCol="0" anchor="ctr"/>
           <a:lstStyle/>
           <a:p>
-            <a:pPr indent="0" marL="0">
+            <a:pPr marL="0" indent="0">
               <a:buNone/>
             </a:pPr>
             <a:r>
@@ -12540,7 +12270,7 @@
           <a:bodyPr wrap="square" lIns="0" tIns="0" rIns="0" bIns="0" rtlCol="0" anchor="ctr"/>
           <a:lstStyle/>
           <a:p>
-            <a:pPr algn="r" indent="0" marL="0">
+            <a:pPr marL="0" indent="0" algn="r">
               <a:buNone/>
             </a:pPr>
             <a:r>
@@ -12574,6 +12304,7 @@
         <a:solidFill>
           <a:srgbClr val="081B33"/>
         </a:solidFill>
+        <a:effectLst/>
       </p:bgPr>
     </p:bg>
     <p:spTree>
@@ -12638,7 +12369,7 @@
           <a:bodyPr wrap="square" lIns="0" tIns="0" rIns="0" bIns="0" rtlCol="0" anchor="ctr"/>
           <a:lstStyle/>
           <a:p>
-            <a:pPr indent="0" marL="0">
+            <a:pPr marL="0" indent="0">
               <a:buNone/>
             </a:pPr>
             <a:r>
@@ -12677,7 +12408,7 @@
           <a:bodyPr wrap="square" lIns="0" tIns="0" rIns="0" bIns="0" rtlCol="0" anchor="ctr"/>
           <a:lstStyle/>
           <a:p>
-            <a:pPr indent="0" marL="0">
+            <a:pPr marL="0" indent="0">
               <a:buNone/>
             </a:pPr>
             <a:r>
@@ -12716,7 +12447,7 @@
           <a:bodyPr wrap="square" lIns="0" tIns="0" rIns="0" bIns="0" rtlCol="0" anchor="ctr"/>
           <a:lstStyle/>
           <a:p>
-            <a:pPr indent="0" marL="0">
+            <a:pPr marL="0" indent="0">
               <a:buNone/>
             </a:pPr>
             <a:r>
@@ -12736,14 +12467,14 @@
       </p:sp>
       <p:pic>
         <p:nvPicPr>
-          <p:cNvPr id="6" name="Image 0" descr="/mnt/data/lockwoodstem-logo-white.png">    </p:cNvPr>
+          <p:cNvPr id="6" name="Image 0" descr="/mnt/data/lockwoodstem-logo-white.png"/>
           <p:cNvPicPr>
             <a:picLocks noChangeAspect="1"/>
           </p:cNvPicPr>
           <p:nvPr/>
         </p:nvPicPr>
         <p:blipFill>
-          <a:blip r:embed="rId1"/>
+          <a:blip r:embed="rId3"/>
           <a:stretch>
             <a:fillRect/>
           </a:stretch>
@@ -12779,7 +12510,7 @@
           <a:bodyPr wrap="square" lIns="0" tIns="0" rIns="0" bIns="0" rtlCol="0" anchor="ctr"/>
           <a:lstStyle/>
           <a:p>
-            <a:pPr indent="0" marL="0">
+            <a:pPr marL="0" indent="0">
               <a:buNone/>
             </a:pPr>
             <a:r>
@@ -12871,7 +12602,7 @@
           <a:bodyPr wrap="square" lIns="0" tIns="0" rIns="0" bIns="0" rtlCol="0" anchor="ctr"/>
           <a:lstStyle/>
           <a:p>
-            <a:pPr algn="ctr" indent="0" marL="0">
+            <a:pPr marL="0" indent="0" algn="ctr">
               <a:buNone/>
             </a:pPr>
             <a:r>
@@ -12909,7 +12640,7 @@
           </a:bodyPr>
           <a:lstStyle/>
           <a:p>
-            <a:pPr indent="0" marL="0">
+            <a:pPr marL="0" indent="0">
               <a:buNone/>
             </a:pPr>
             <a:r>
@@ -12945,7 +12676,7 @@
           <a:bodyPr wrap="square" lIns="0" tIns="0" rIns="0" bIns="0" rtlCol="0" anchor="ctr"/>
           <a:lstStyle/>
           <a:p>
-            <a:pPr indent="0" marL="0">
+            <a:pPr marL="0" indent="0">
               <a:buNone/>
             </a:pPr>
             <a:r>
@@ -13037,7 +12768,7 @@
           <a:bodyPr wrap="square" lIns="0" tIns="0" rIns="0" bIns="0" rtlCol="0" anchor="ctr"/>
           <a:lstStyle/>
           <a:p>
-            <a:pPr algn="ctr" indent="0" marL="0">
+            <a:pPr marL="0" indent="0" algn="ctr">
               <a:buNone/>
             </a:pPr>
             <a:r>
@@ -13075,7 +12806,7 @@
           </a:bodyPr>
           <a:lstStyle/>
           <a:p>
-            <a:pPr indent="0" marL="0">
+            <a:pPr marL="0" indent="0">
               <a:buNone/>
             </a:pPr>
             <a:r>
@@ -13111,7 +12842,7 @@
           <a:bodyPr wrap="square" lIns="0" tIns="0" rIns="0" bIns="0" rtlCol="0" anchor="ctr"/>
           <a:lstStyle/>
           <a:p>
-            <a:pPr indent="0" marL="0">
+            <a:pPr marL="0" indent="0">
               <a:buNone/>
             </a:pPr>
             <a:r>
@@ -13203,7 +12934,7 @@
           <a:bodyPr wrap="square" lIns="0" tIns="0" rIns="0" bIns="0" rtlCol="0" anchor="ctr"/>
           <a:lstStyle/>
           <a:p>
-            <a:pPr algn="ctr" indent="0" marL="0">
+            <a:pPr marL="0" indent="0" algn="ctr">
               <a:buNone/>
             </a:pPr>
             <a:r>
@@ -13241,7 +12972,7 @@
           </a:bodyPr>
           <a:lstStyle/>
           <a:p>
-            <a:pPr indent="0" marL="0">
+            <a:pPr marL="0" indent="0">
               <a:buNone/>
             </a:pPr>
             <a:r>
@@ -13277,7 +13008,7 @@
           <a:bodyPr wrap="square" lIns="0" tIns="0" rIns="0" bIns="0" rtlCol="0" anchor="ctr"/>
           <a:lstStyle/>
           <a:p>
-            <a:pPr indent="0" marL="0">
+            <a:pPr marL="0" indent="0">
               <a:buNone/>
             </a:pPr>
             <a:r>
@@ -13369,7 +13100,7 @@
           <a:bodyPr wrap="square" lIns="0" tIns="0" rIns="0" bIns="0" rtlCol="0" anchor="ctr"/>
           <a:lstStyle/>
           <a:p>
-            <a:pPr algn="ctr" indent="0" marL="0">
+            <a:pPr marL="0" indent="0" algn="ctr">
               <a:buNone/>
             </a:pPr>
             <a:r>
@@ -13407,7 +13138,7 @@
           </a:bodyPr>
           <a:lstStyle/>
           <a:p>
-            <a:pPr indent="0" marL="0">
+            <a:pPr marL="0" indent="0">
               <a:buNone/>
             </a:pPr>
             <a:r>
@@ -13443,7 +13174,7 @@
           <a:bodyPr wrap="square" lIns="0" tIns="0" rIns="0" bIns="0" rtlCol="0" anchor="ctr"/>
           <a:lstStyle/>
           <a:p>
-            <a:pPr indent="0" marL="0">
+            <a:pPr marL="0" indent="0">
               <a:buNone/>
             </a:pPr>
             <a:r>
@@ -13510,7 +13241,7 @@
           </a:bodyPr>
           <a:lstStyle/>
           <a:p>
-            <a:pPr algn="ctr" indent="0" marL="0">
+            <a:pPr marL="0" indent="0" algn="ctr">
               <a:buNone/>
             </a:pPr>
             <a:r>
@@ -13571,7 +13302,7 @@
           <a:bodyPr wrap="square" lIns="0" tIns="0" rIns="0" bIns="0" rtlCol="0" anchor="ctr"/>
           <a:lstStyle/>
           <a:p>
-            <a:pPr indent="0" marL="0">
+            <a:pPr marL="0" indent="0">
               <a:buNone/>
             </a:pPr>
             <a:r>
@@ -13610,7 +13341,7 @@
           <a:bodyPr wrap="square" lIns="0" tIns="0" rIns="0" bIns="0" rtlCol="0" anchor="ctr"/>
           <a:lstStyle/>
           <a:p>
-            <a:pPr algn="r" indent="0" marL="0">
+            <a:pPr marL="0" indent="0" algn="r">
               <a:buNone/>
             </a:pPr>
             <a:r>
@@ -13644,6 +13375,7 @@
         <a:solidFill>
           <a:srgbClr val="081B33"/>
         </a:solidFill>
+        <a:effectLst/>
       </p:bgPr>
     </p:bg>
     <p:spTree>
@@ -13708,7 +13440,7 @@
           <a:bodyPr wrap="square" lIns="0" tIns="0" rIns="0" bIns="0" rtlCol="0" anchor="ctr"/>
           <a:lstStyle/>
           <a:p>
-            <a:pPr indent="0" marL="0">
+            <a:pPr marL="0" indent="0">
               <a:buNone/>
             </a:pPr>
             <a:r>
@@ -13747,7 +13479,7 @@
           <a:bodyPr wrap="square" lIns="0" tIns="0" rIns="0" bIns="0" rtlCol="0" anchor="ctr"/>
           <a:lstStyle/>
           <a:p>
-            <a:pPr indent="0" marL="0">
+            <a:pPr marL="0" indent="0">
               <a:buNone/>
             </a:pPr>
             <a:r>
@@ -13786,7 +13518,7 @@
           <a:bodyPr wrap="square" lIns="0" tIns="0" rIns="0" bIns="0" rtlCol="0" anchor="ctr"/>
           <a:lstStyle/>
           <a:p>
-            <a:pPr indent="0" marL="0">
+            <a:pPr marL="0" indent="0">
               <a:buNone/>
             </a:pPr>
             <a:r>
@@ -13806,14 +13538,14 @@
       </p:sp>
       <p:pic>
         <p:nvPicPr>
-          <p:cNvPr id="6" name="Image 0" descr="/mnt/data/lockwoodstem-logo-white.png">    </p:cNvPr>
+          <p:cNvPr id="6" name="Image 0" descr="/mnt/data/lockwoodstem-logo-white.png"/>
           <p:cNvPicPr>
             <a:picLocks noChangeAspect="1"/>
           </p:cNvPicPr>
           <p:nvPr/>
         </p:nvPicPr>
         <p:blipFill>
-          <a:blip r:embed="rId1"/>
+          <a:blip r:embed="rId3"/>
           <a:stretch>
             <a:fillRect/>
           </a:stretch>
@@ -13849,7 +13581,7 @@
           <a:bodyPr wrap="square" lIns="0" tIns="0" rIns="0" bIns="0" rtlCol="0" anchor="ctr"/>
           <a:lstStyle/>
           <a:p>
-            <a:pPr indent="0" marL="0">
+            <a:pPr marL="0" indent="0">
               <a:buNone/>
             </a:pPr>
             <a:r>
@@ -13916,7 +13648,7 @@
           </a:bodyPr>
           <a:lstStyle/>
           <a:p>
-            <a:pPr algn="ctr" indent="0" marL="0">
+            <a:pPr marL="0" indent="0" algn="ctr">
               <a:buNone/>
             </a:pPr>
             <a:r>
@@ -13983,7 +13715,7 @@
           </a:bodyPr>
           <a:lstStyle/>
           <a:p>
-            <a:pPr algn="ctr" indent="0" marL="0">
+            <a:pPr marL="0" indent="0" algn="ctr">
               <a:buNone/>
             </a:pPr>
             <a:r>
@@ -14021,7 +13753,7 @@
           </a:bodyPr>
           <a:lstStyle/>
           <a:p>
-            <a:pPr algn="ctr" indent="0" marL="0">
+            <a:pPr marL="0" indent="0" algn="ctr">
               <a:buNone/>
             </a:pPr>
             <a:r>
@@ -14088,7 +13820,7 @@
           </a:bodyPr>
           <a:lstStyle/>
           <a:p>
-            <a:pPr algn="ctr" indent="0" marL="0">
+            <a:pPr marL="0" indent="0" algn="ctr">
               <a:buNone/>
             </a:pPr>
             <a:r>
@@ -14126,7 +13858,7 @@
           </a:bodyPr>
           <a:lstStyle/>
           <a:p>
-            <a:pPr algn="ctr" indent="0" marL="0">
+            <a:pPr marL="0" indent="0" algn="ctr">
               <a:buNone/>
             </a:pPr>
             <a:r>
@@ -14193,7 +13925,7 @@
           </a:bodyPr>
           <a:lstStyle/>
           <a:p>
-            <a:pPr algn="ctr" indent="0" marL="0">
+            <a:pPr marL="0" indent="0" algn="ctr">
               <a:buNone/>
             </a:pPr>
             <a:r>
@@ -14231,7 +13963,7 @@
           </a:bodyPr>
           <a:lstStyle/>
           <a:p>
-            <a:pPr algn="ctr" indent="0" marL="0">
+            <a:pPr marL="0" indent="0" algn="ctr">
               <a:buNone/>
             </a:pPr>
             <a:r>
@@ -14292,7 +14024,7 @@
           <a:bodyPr wrap="square" lIns="0" tIns="0" rIns="0" bIns="0" rtlCol="0" anchor="ctr"/>
           <a:lstStyle/>
           <a:p>
-            <a:pPr indent="0" marL="0">
+            <a:pPr marL="0" indent="0">
               <a:buNone/>
             </a:pPr>
             <a:r>
@@ -14331,7 +14063,7 @@
           <a:bodyPr wrap="square" lIns="0" tIns="0" rIns="0" bIns="0" rtlCol="0" anchor="ctr"/>
           <a:lstStyle/>
           <a:p>
-            <a:pPr algn="r" indent="0" marL="0">
+            <a:pPr marL="0" indent="0" algn="r">
               <a:buNone/>
             </a:pPr>
             <a:r>
@@ -14365,6 +14097,7 @@
         <a:solidFill>
           <a:srgbClr val="081B33"/>
         </a:solidFill>
+        <a:effectLst/>
       </p:bgPr>
     </p:bg>
     <p:spTree>
@@ -14429,7 +14162,7 @@
           <a:bodyPr wrap="square" lIns="0" tIns="0" rIns="0" bIns="0" rtlCol="0" anchor="ctr"/>
           <a:lstStyle/>
           <a:p>
-            <a:pPr indent="0" marL="0">
+            <a:pPr marL="0" indent="0">
               <a:buNone/>
             </a:pPr>
             <a:r>
@@ -14468,7 +14201,7 @@
           <a:bodyPr wrap="square" lIns="0" tIns="0" rIns="0" bIns="0" rtlCol="0" anchor="ctr"/>
           <a:lstStyle/>
           <a:p>
-            <a:pPr indent="0" marL="0">
+            <a:pPr marL="0" indent="0">
               <a:buNone/>
             </a:pPr>
             <a:r>
@@ -14507,7 +14240,7 @@
           <a:bodyPr wrap="square" lIns="0" tIns="0" rIns="0" bIns="0" rtlCol="0" anchor="ctr"/>
           <a:lstStyle/>
           <a:p>
-            <a:pPr indent="0" marL="0">
+            <a:pPr marL="0" indent="0">
               <a:buNone/>
             </a:pPr>
             <a:r>
@@ -14527,14 +14260,14 @@
       </p:sp>
       <p:pic>
         <p:nvPicPr>
-          <p:cNvPr id="6" name="Image 0" descr="/mnt/data/lockwoodstem-logo-white.png">    </p:cNvPr>
+          <p:cNvPr id="6" name="Image 0" descr="/mnt/data/lockwoodstem-logo-white.png"/>
           <p:cNvPicPr>
             <a:picLocks noChangeAspect="1"/>
           </p:cNvPicPr>
           <p:nvPr/>
         </p:nvPicPr>
         <p:blipFill>
-          <a:blip r:embed="rId1"/>
+          <a:blip r:embed="rId3"/>
           <a:stretch>
             <a:fillRect/>
           </a:stretch>
@@ -14599,7 +14332,7 @@
           <a:bodyPr wrap="square" lIns="0" tIns="0" rIns="0" bIns="0" rtlCol="0" anchor="ctr"/>
           <a:lstStyle/>
           <a:p>
-            <a:pPr indent="0" marL="0">
+            <a:pPr marL="0" indent="0">
               <a:buNone/>
             </a:pPr>
             <a:r>
@@ -14635,7 +14368,7 @@
           <a:bodyPr wrap="square" lIns="0" tIns="0" rIns="0" bIns="0" rtlCol="0" anchor="ctr"/>
           <a:lstStyle/>
           <a:p>
-            <a:pPr indent="0" marL="0">
+            <a:pPr marL="0" indent="0">
               <a:buNone/>
             </a:pPr>
             <a:r>
@@ -14673,7 +14406,7 @@
           </a:bodyPr>
           <a:lstStyle/>
           <a:p>
-            <a:pPr indent="0" marL="0">
+            <a:pPr marL="0" indent="0">
               <a:buNone/>
             </a:pPr>
             <a:r>
@@ -14712,7 +14445,7 @@
           <a:bodyPr wrap="square" lIns="0" tIns="0" rIns="0" bIns="0" rtlCol="0" anchor="ctr"/>
           <a:lstStyle/>
           <a:p>
-            <a:pPr indent="0" marL="0">
+            <a:pPr marL="0" indent="0">
               <a:buNone/>
             </a:pPr>
             <a:r>
@@ -14750,7 +14483,7 @@
           </a:bodyPr>
           <a:lstStyle/>
           <a:p>
-            <a:pPr indent="0" marL="0">
+            <a:pPr marL="0" indent="0">
               <a:buNone/>
             </a:pPr>
             <a:r>
@@ -14789,7 +14522,7 @@
           <a:bodyPr wrap="square" lIns="0" tIns="0" rIns="0" bIns="0" rtlCol="0" anchor="ctr"/>
           <a:lstStyle/>
           <a:p>
-            <a:pPr indent="0" marL="0">
+            <a:pPr marL="0" indent="0">
               <a:buNone/>
             </a:pPr>
             <a:r>
@@ -14827,7 +14560,7 @@
           </a:bodyPr>
           <a:lstStyle/>
           <a:p>
-            <a:pPr indent="0" marL="0">
+            <a:pPr marL="0" indent="0">
               <a:buNone/>
             </a:pPr>
             <a:r>
@@ -14866,7 +14599,7 @@
           <a:bodyPr wrap="square" lIns="0" tIns="0" rIns="0" bIns="0" rtlCol="0" anchor="ctr"/>
           <a:lstStyle/>
           <a:p>
-            <a:pPr indent="0" marL="0">
+            <a:pPr marL="0" indent="0">
               <a:buNone/>
             </a:pPr>
             <a:r>
@@ -14904,7 +14637,7 @@
           </a:bodyPr>
           <a:lstStyle/>
           <a:p>
-            <a:pPr indent="0" marL="0">
+            <a:pPr marL="0" indent="0">
               <a:buNone/>
             </a:pPr>
             <a:r>
@@ -14943,7 +14676,7 @@
           <a:bodyPr wrap="square" lIns="0" tIns="0" rIns="0" bIns="0" rtlCol="0" anchor="ctr"/>
           <a:lstStyle/>
           <a:p>
-            <a:pPr indent="0" marL="0">
+            <a:pPr marL="0" indent="0">
               <a:buNone/>
             </a:pPr>
             <a:r>
@@ -14981,7 +14714,7 @@
           </a:bodyPr>
           <a:lstStyle/>
           <a:p>
-            <a:pPr indent="0" marL="0">
+            <a:pPr marL="0" indent="0">
               <a:buNone/>
             </a:pPr>
             <a:r>
@@ -15049,7 +14782,7 @@
           <a:bodyPr wrap="square" lIns="0" tIns="0" rIns="0" bIns="0" rtlCol="0" anchor="ctr"/>
           <a:lstStyle/>
           <a:p>
-            <a:pPr indent="0" marL="0">
+            <a:pPr marL="0" indent="0">
               <a:buNone/>
             </a:pPr>
             <a:r>
@@ -15085,7 +14818,7 @@
           <a:bodyPr wrap="square" lIns="0" tIns="0" rIns="0" bIns="0" rtlCol="0" anchor="ctr"/>
           <a:lstStyle/>
           <a:p>
-            <a:pPr indent="0" marL="0">
+            <a:pPr marL="0" indent="0">
               <a:buNone/>
             </a:pPr>
             <a:r>
@@ -15123,7 +14856,7 @@
           </a:bodyPr>
           <a:lstStyle/>
           <a:p>
-            <a:pPr indent="0" marL="0">
+            <a:pPr marL="0" indent="0">
               <a:buNone/>
             </a:pPr>
             <a:r>
@@ -15162,7 +14895,7 @@
           <a:bodyPr wrap="square" lIns="0" tIns="0" rIns="0" bIns="0" rtlCol="0" anchor="ctr"/>
           <a:lstStyle/>
           <a:p>
-            <a:pPr indent="0" marL="0">
+            <a:pPr marL="0" indent="0">
               <a:buNone/>
             </a:pPr>
             <a:r>
@@ -15200,7 +14933,7 @@
           </a:bodyPr>
           <a:lstStyle/>
           <a:p>
-            <a:pPr indent="0" marL="0">
+            <a:pPr marL="0" indent="0">
               <a:buNone/>
             </a:pPr>
             <a:r>
@@ -15239,7 +14972,7 @@
           <a:bodyPr wrap="square" lIns="0" tIns="0" rIns="0" bIns="0" rtlCol="0" anchor="ctr"/>
           <a:lstStyle/>
           <a:p>
-            <a:pPr indent="0" marL="0">
+            <a:pPr marL="0" indent="0">
               <a:buNone/>
             </a:pPr>
             <a:r>
@@ -15277,7 +15010,7 @@
           </a:bodyPr>
           <a:lstStyle/>
           <a:p>
-            <a:pPr indent="0" marL="0">
+            <a:pPr marL="0" indent="0">
               <a:buNone/>
             </a:pPr>
             <a:r>
@@ -15316,7 +15049,7 @@
           <a:bodyPr wrap="square" lIns="0" tIns="0" rIns="0" bIns="0" rtlCol="0" anchor="ctr"/>
           <a:lstStyle/>
           <a:p>
-            <a:pPr indent="0" marL="0">
+            <a:pPr marL="0" indent="0">
               <a:buNone/>
             </a:pPr>
             <a:r>
@@ -15354,7 +15087,7 @@
           </a:bodyPr>
           <a:lstStyle/>
           <a:p>
-            <a:pPr indent="0" marL="0">
+            <a:pPr marL="0" indent="0">
               <a:buNone/>
             </a:pPr>
             <a:r>
@@ -15393,7 +15126,7 @@
           <a:bodyPr wrap="square" lIns="0" tIns="0" rIns="0" bIns="0" rtlCol="0" anchor="ctr"/>
           <a:lstStyle/>
           <a:p>
-            <a:pPr indent="0" marL="0">
+            <a:pPr marL="0" indent="0">
               <a:buNone/>
             </a:pPr>
             <a:r>
@@ -15431,7 +15164,7 @@
           </a:bodyPr>
           <a:lstStyle/>
           <a:p>
-            <a:pPr indent="0" marL="0">
+            <a:pPr marL="0" indent="0">
               <a:buNone/>
             </a:pPr>
             <a:r>
@@ -15520,7 +15253,7 @@
           <a:bodyPr wrap="square" lIns="0" tIns="0" rIns="0" bIns="0" rtlCol="0" anchor="ctr"/>
           <a:lstStyle/>
           <a:p>
-            <a:pPr indent="0" marL="0">
+            <a:pPr marL="0" indent="0">
               <a:buNone/>
             </a:pPr>
             <a:r>
@@ -15559,7 +15292,7 @@
           <a:bodyPr wrap="square" lIns="0" tIns="0" rIns="0" bIns="0" rtlCol="0" anchor="ctr"/>
           <a:lstStyle/>
           <a:p>
-            <a:pPr algn="r" indent="0" marL="0">
+            <a:pPr marL="0" indent="0" algn="r">
               <a:buNone/>
             </a:pPr>
             <a:r>
@@ -15593,6 +15326,7 @@
         <a:solidFill>
           <a:srgbClr val="081B33"/>
         </a:solidFill>
+        <a:effectLst/>
       </p:bgPr>
     </p:bg>
     <p:spTree>
@@ -15657,7 +15391,7 @@
           <a:bodyPr wrap="square" lIns="0" tIns="0" rIns="0" bIns="0" rtlCol="0" anchor="ctr"/>
           <a:lstStyle/>
           <a:p>
-            <a:pPr indent="0" marL="0">
+            <a:pPr marL="0" indent="0">
               <a:buNone/>
             </a:pPr>
             <a:r>
@@ -15696,7 +15430,7 @@
           <a:bodyPr wrap="square" lIns="0" tIns="0" rIns="0" bIns="0" rtlCol="0" anchor="ctr"/>
           <a:lstStyle/>
           <a:p>
-            <a:pPr indent="0" marL="0">
+            <a:pPr marL="0" indent="0">
               <a:buNone/>
             </a:pPr>
             <a:r>
@@ -15735,7 +15469,7 @@
           <a:bodyPr wrap="square" lIns="0" tIns="0" rIns="0" bIns="0" rtlCol="0" anchor="ctr"/>
           <a:lstStyle/>
           <a:p>
-            <a:pPr indent="0" marL="0">
+            <a:pPr marL="0" indent="0">
               <a:buNone/>
             </a:pPr>
             <a:r>
@@ -15755,14 +15489,14 @@
       </p:sp>
       <p:pic>
         <p:nvPicPr>
-          <p:cNvPr id="6" name="Image 0" descr="/mnt/data/lockwoodstem-logo-white.png">    </p:cNvPr>
+          <p:cNvPr id="6" name="Image 0" descr="/mnt/data/lockwoodstem-logo-white.png"/>
           <p:cNvPicPr>
             <a:picLocks noChangeAspect="1"/>
           </p:cNvPicPr>
           <p:nvPr/>
         </p:nvPicPr>
         <p:blipFill>
-          <a:blip r:embed="rId1"/>
+          <a:blip r:embed="rId3"/>
           <a:stretch>
             <a:fillRect/>
           </a:stretch>
@@ -15827,7 +15561,7 @@
           <a:bodyPr wrap="square" lIns="0" tIns="0" rIns="0" bIns="0" rtlCol="0" anchor="ctr"/>
           <a:lstStyle/>
           <a:p>
-            <a:pPr indent="0" marL="0">
+            <a:pPr marL="0" indent="0">
               <a:buNone/>
             </a:pPr>
             <a:r>
@@ -15863,7 +15597,7 @@
           <a:bodyPr wrap="square" lIns="0" tIns="0" rIns="0" bIns="0" rtlCol="0" anchor="ctr"/>
           <a:lstStyle/>
           <a:p>
-            <a:pPr indent="0" marL="0">
+            <a:pPr marL="0" indent="0">
               <a:buNone/>
             </a:pPr>
             <a:r>
@@ -15901,7 +15635,7 @@
           </a:bodyPr>
           <a:lstStyle/>
           <a:p>
-            <a:pPr indent="0" marL="0">
+            <a:pPr marL="0" indent="0">
               <a:buNone/>
             </a:pPr>
             <a:r>
@@ -15940,7 +15674,7 @@
           <a:bodyPr wrap="square" lIns="0" tIns="0" rIns="0" bIns="0" rtlCol="0" anchor="ctr"/>
           <a:lstStyle/>
           <a:p>
-            <a:pPr indent="0" marL="0">
+            <a:pPr marL="0" indent="0">
               <a:buNone/>
             </a:pPr>
             <a:r>
@@ -15978,7 +15712,7 @@
           </a:bodyPr>
           <a:lstStyle/>
           <a:p>
-            <a:pPr indent="0" marL="0">
+            <a:pPr marL="0" indent="0">
               <a:buNone/>
             </a:pPr>
             <a:r>
@@ -16017,7 +15751,7 @@
           <a:bodyPr wrap="square" lIns="0" tIns="0" rIns="0" bIns="0" rtlCol="0" anchor="ctr"/>
           <a:lstStyle/>
           <a:p>
-            <a:pPr indent="0" marL="0">
+            <a:pPr marL="0" indent="0">
               <a:buNone/>
             </a:pPr>
             <a:r>
@@ -16055,7 +15789,7 @@
           </a:bodyPr>
           <a:lstStyle/>
           <a:p>
-            <a:pPr indent="0" marL="0">
+            <a:pPr marL="0" indent="0">
               <a:buNone/>
             </a:pPr>
             <a:r>
@@ -16094,7 +15828,7 @@
           <a:bodyPr wrap="square" lIns="0" tIns="0" rIns="0" bIns="0" rtlCol="0" anchor="ctr"/>
           <a:lstStyle/>
           <a:p>
-            <a:pPr indent="0" marL="0">
+            <a:pPr marL="0" indent="0">
               <a:buNone/>
             </a:pPr>
             <a:r>
@@ -16132,7 +15866,7 @@
           </a:bodyPr>
           <a:lstStyle/>
           <a:p>
-            <a:pPr indent="0" marL="0">
+            <a:pPr marL="0" indent="0">
               <a:buNone/>
             </a:pPr>
             <a:r>
@@ -16171,7 +15905,7 @@
           <a:bodyPr wrap="square" lIns="0" tIns="0" rIns="0" bIns="0" rtlCol="0" anchor="ctr"/>
           <a:lstStyle/>
           <a:p>
-            <a:pPr indent="0" marL="0">
+            <a:pPr marL="0" indent="0">
               <a:buNone/>
             </a:pPr>
             <a:r>
@@ -16209,7 +15943,7 @@
           </a:bodyPr>
           <a:lstStyle/>
           <a:p>
-            <a:pPr indent="0" marL="0">
+            <a:pPr marL="0" indent="0">
               <a:buNone/>
             </a:pPr>
             <a:r>
@@ -16248,7 +15982,7 @@
           <a:bodyPr wrap="square" lIns="0" tIns="0" rIns="0" bIns="0" rtlCol="0" anchor="ctr"/>
           <a:lstStyle/>
           <a:p>
-            <a:pPr indent="0" marL="0">
+            <a:pPr marL="0" indent="0">
               <a:buNone/>
             </a:pPr>
             <a:r>
@@ -16286,7 +16020,7 @@
           </a:bodyPr>
           <a:lstStyle/>
           <a:p>
-            <a:pPr indent="0" marL="0">
+            <a:pPr marL="0" indent="0">
               <a:buNone/>
             </a:pPr>
             <a:r>
@@ -16351,7 +16085,7 @@
           <a:bodyPr wrap="square" lIns="0" tIns="0" rIns="0" bIns="0" rtlCol="0" anchor="ctr"/>
           <a:lstStyle/>
           <a:p>
-            <a:pPr indent="0" marL="0">
+            <a:pPr marL="0" indent="0">
               <a:buNone/>
             </a:pPr>
             <a:r>
@@ -16416,7 +16150,7 @@
           <a:bodyPr wrap="square" lIns="0" tIns="0" rIns="0" bIns="0" rtlCol="0" anchor="ctr"/>
           <a:lstStyle/>
           <a:p>
-            <a:pPr algn="ctr" indent="0" marL="0">
+            <a:pPr marL="0" indent="0" algn="ctr">
               <a:buNone/>
             </a:pPr>
             <a:r>
@@ -16454,7 +16188,7 @@
           </a:bodyPr>
           <a:lstStyle/>
           <a:p>
-            <a:pPr indent="0" marL="0">
+            <a:pPr marL="0" indent="0">
               <a:buNone/>
             </a:pPr>
             <a:r>
@@ -16519,7 +16253,7 @@
           <a:bodyPr wrap="square" lIns="0" tIns="0" rIns="0" bIns="0" rtlCol="0" anchor="ctr"/>
           <a:lstStyle/>
           <a:p>
-            <a:pPr algn="ctr" indent="0" marL="0">
+            <a:pPr marL="0" indent="0" algn="ctr">
               <a:buNone/>
             </a:pPr>
             <a:r>
@@ -16557,7 +16291,7 @@
           </a:bodyPr>
           <a:lstStyle/>
           <a:p>
-            <a:pPr indent="0" marL="0">
+            <a:pPr marL="0" indent="0">
               <a:buNone/>
             </a:pPr>
             <a:r>
@@ -16622,7 +16356,7 @@
           <a:bodyPr wrap="square" lIns="0" tIns="0" rIns="0" bIns="0" rtlCol="0" anchor="ctr"/>
           <a:lstStyle/>
           <a:p>
-            <a:pPr algn="ctr" indent="0" marL="0">
+            <a:pPr marL="0" indent="0" algn="ctr">
               <a:buNone/>
             </a:pPr>
             <a:r>
@@ -16660,7 +16394,7 @@
           </a:bodyPr>
           <a:lstStyle/>
           <a:p>
-            <a:pPr indent="0" marL="0">
+            <a:pPr marL="0" indent="0">
               <a:buNone/>
             </a:pPr>
             <a:r>
@@ -16725,7 +16459,7 @@
           <a:bodyPr wrap="square" lIns="0" tIns="0" rIns="0" bIns="0" rtlCol="0" anchor="ctr"/>
           <a:lstStyle/>
           <a:p>
-            <a:pPr algn="ctr" indent="0" marL="0">
+            <a:pPr marL="0" indent="0" algn="ctr">
               <a:buNone/>
             </a:pPr>
             <a:r>
@@ -16763,7 +16497,7 @@
           </a:bodyPr>
           <a:lstStyle/>
           <a:p>
-            <a:pPr indent="0" marL="0">
+            <a:pPr marL="0" indent="0">
               <a:buNone/>
             </a:pPr>
             <a:r>
@@ -16828,7 +16562,7 @@
           <a:bodyPr wrap="square" lIns="0" tIns="0" rIns="0" bIns="0" rtlCol="0" anchor="ctr"/>
           <a:lstStyle/>
           <a:p>
-            <a:pPr algn="ctr" indent="0" marL="0">
+            <a:pPr marL="0" indent="0" algn="ctr">
               <a:buNone/>
             </a:pPr>
             <a:r>
@@ -16866,7 +16600,7 @@
           </a:bodyPr>
           <a:lstStyle/>
           <a:p>
-            <a:pPr indent="0" marL="0">
+            <a:pPr marL="0" indent="0">
               <a:buNone/>
             </a:pPr>
             <a:r>
@@ -16904,7 +16638,7 @@
           </a:bodyPr>
           <a:lstStyle/>
           <a:p>
-            <a:pPr indent="0" marL="0">
+            <a:pPr marL="0" indent="0">
               <a:buNone/>
             </a:pPr>
             <a:r>
@@ -16965,7 +16699,7 @@
           <a:bodyPr wrap="square" lIns="0" tIns="0" rIns="0" bIns="0" rtlCol="0" anchor="ctr"/>
           <a:lstStyle/>
           <a:p>
-            <a:pPr indent="0" marL="0">
+            <a:pPr marL="0" indent="0">
               <a:buNone/>
             </a:pPr>
             <a:r>
@@ -17004,7 +16738,7 @@
           <a:bodyPr wrap="square" lIns="0" tIns="0" rIns="0" bIns="0" rtlCol="0" anchor="ctr"/>
           <a:lstStyle/>
           <a:p>
-            <a:pPr algn="r" indent="0" marL="0">
+            <a:pPr marL="0" indent="0" algn="r">
               <a:buNone/>
             </a:pPr>
             <a:r>
@@ -17038,6 +16772,7 @@
         <a:solidFill>
           <a:srgbClr val="081B33"/>
         </a:solidFill>
+        <a:effectLst/>
       </p:bgPr>
     </p:bg>
     <p:spTree>
@@ -17102,7 +16837,7 @@
           <a:bodyPr wrap="square" lIns="0" tIns="0" rIns="0" bIns="0" rtlCol="0" anchor="ctr"/>
           <a:lstStyle/>
           <a:p>
-            <a:pPr indent="0" marL="0">
+            <a:pPr marL="0" indent="0">
               <a:buNone/>
             </a:pPr>
             <a:r>
@@ -17141,7 +16876,7 @@
           <a:bodyPr wrap="square" lIns="0" tIns="0" rIns="0" bIns="0" rtlCol="0" anchor="ctr"/>
           <a:lstStyle/>
           <a:p>
-            <a:pPr indent="0" marL="0">
+            <a:pPr marL="0" indent="0">
               <a:buNone/>
             </a:pPr>
             <a:r>
@@ -17180,7 +16915,7 @@
           <a:bodyPr wrap="square" lIns="0" tIns="0" rIns="0" bIns="0" rtlCol="0" anchor="ctr"/>
           <a:lstStyle/>
           <a:p>
-            <a:pPr indent="0" marL="0">
+            <a:pPr marL="0" indent="0">
               <a:buNone/>
             </a:pPr>
             <a:r>
@@ -17200,14 +16935,14 @@
       </p:sp>
       <p:pic>
         <p:nvPicPr>
-          <p:cNvPr id="6" name="Image 0" descr="/mnt/data/lockwoodstem-logo-white.png">    </p:cNvPr>
+          <p:cNvPr id="6" name="Image 0" descr="/mnt/data/lockwoodstem-logo-white.png"/>
           <p:cNvPicPr>
             <a:picLocks noChangeAspect="1"/>
           </p:cNvPicPr>
           <p:nvPr/>
         </p:nvPicPr>
         <p:blipFill>
-          <a:blip r:embed="rId1"/>
+          <a:blip r:embed="rId3"/>
           <a:stretch>
             <a:fillRect/>
           </a:stretch>
@@ -17272,7 +17007,7 @@
           <a:bodyPr wrap="square" lIns="0" tIns="0" rIns="0" bIns="0" rtlCol="0" anchor="ctr"/>
           <a:lstStyle/>
           <a:p>
-            <a:pPr indent="0" marL="0">
+            <a:pPr marL="0" indent="0">
               <a:buNone/>
             </a:pPr>
             <a:r>
@@ -17308,7 +17043,7 @@
           <a:bodyPr wrap="square" lIns="0" tIns="0" rIns="0" bIns="0" rtlCol="0" anchor="ctr"/>
           <a:lstStyle/>
           <a:p>
-            <a:pPr indent="0" marL="0">
+            <a:pPr marL="0" indent="0">
               <a:buNone/>
             </a:pPr>
             <a:r>
@@ -17344,7 +17079,7 @@
           <a:bodyPr wrap="square" lIns="0" tIns="0" rIns="0" bIns="0" rtlCol="0" anchor="ctr"/>
           <a:lstStyle/>
           <a:p>
-            <a:pPr indent="0" marL="0">
+            <a:pPr marL="0" indent="0">
               <a:buNone/>
             </a:pPr>
             <a:r>
@@ -17382,7 +17117,7 @@
           </a:bodyPr>
           <a:lstStyle/>
           <a:p>
-            <a:pPr indent="0" marL="0">
+            <a:pPr marL="0" indent="0">
               <a:buNone/>
             </a:pPr>
             <a:r>
@@ -17421,7 +17156,7 @@
           <a:bodyPr wrap="square" lIns="0" tIns="0" rIns="0" bIns="0" rtlCol="0" anchor="ctr"/>
           <a:lstStyle/>
           <a:p>
-            <a:pPr indent="0" marL="0">
+            <a:pPr marL="0" indent="0">
               <a:buNone/>
             </a:pPr>
             <a:r>
@@ -17459,7 +17194,7 @@
           </a:bodyPr>
           <a:lstStyle/>
           <a:p>
-            <a:pPr indent="0" marL="0">
+            <a:pPr marL="0" indent="0">
               <a:buNone/>
             </a:pPr>
             <a:r>
@@ -17498,7 +17233,7 @@
           <a:bodyPr wrap="square" lIns="0" tIns="0" rIns="0" bIns="0" rtlCol="0" anchor="ctr"/>
           <a:lstStyle/>
           <a:p>
-            <a:pPr indent="0" marL="0">
+            <a:pPr marL="0" indent="0">
               <a:buNone/>
             </a:pPr>
             <a:r>
@@ -17536,7 +17271,7 @@
           </a:bodyPr>
           <a:lstStyle/>
           <a:p>
-            <a:pPr indent="0" marL="0">
+            <a:pPr marL="0" indent="0">
               <a:buNone/>
             </a:pPr>
             <a:r>
@@ -17575,7 +17310,7 @@
           <a:bodyPr wrap="square" lIns="0" tIns="0" rIns="0" bIns="0" rtlCol="0" anchor="ctr"/>
           <a:lstStyle/>
           <a:p>
-            <a:pPr indent="0" marL="0">
+            <a:pPr marL="0" indent="0">
               <a:buNone/>
             </a:pPr>
             <a:r>
@@ -17613,7 +17348,7 @@
           </a:bodyPr>
           <a:lstStyle/>
           <a:p>
-            <a:pPr indent="0" marL="0">
+            <a:pPr marL="0" indent="0">
               <a:buNone/>
             </a:pPr>
             <a:r>
@@ -17681,7 +17416,7 @@
           <a:bodyPr wrap="square" lIns="0" tIns="0" rIns="0" bIns="0" rtlCol="0" anchor="ctr"/>
           <a:lstStyle/>
           <a:p>
-            <a:pPr indent="0" marL="0">
+            <a:pPr marL="0" indent="0">
               <a:buNone/>
             </a:pPr>
             <a:r>
@@ -17717,7 +17452,7 @@
           <a:bodyPr wrap="square" lIns="0" tIns="0" rIns="0" bIns="0" rtlCol="0" anchor="ctr"/>
           <a:lstStyle/>
           <a:p>
-            <a:pPr indent="0" marL="0">
+            <a:pPr marL="0" indent="0">
               <a:buNone/>
             </a:pPr>
             <a:r>
@@ -17753,7 +17488,7 @@
           <a:bodyPr wrap="square" lIns="0" tIns="0" rIns="0" bIns="0" rtlCol="0" anchor="ctr"/>
           <a:lstStyle/>
           <a:p>
-            <a:pPr indent="0" marL="0">
+            <a:pPr marL="0" indent="0">
               <a:buNone/>
             </a:pPr>
             <a:r>
@@ -17791,7 +17526,7 @@
           </a:bodyPr>
           <a:lstStyle/>
           <a:p>
-            <a:pPr indent="0" marL="0">
+            <a:pPr marL="0" indent="0">
               <a:buNone/>
             </a:pPr>
             <a:r>
@@ -17830,7 +17565,7 @@
           <a:bodyPr wrap="square" lIns="0" tIns="0" rIns="0" bIns="0" rtlCol="0" anchor="ctr"/>
           <a:lstStyle/>
           <a:p>
-            <a:pPr indent="0" marL="0">
+            <a:pPr marL="0" indent="0">
               <a:buNone/>
             </a:pPr>
             <a:r>
@@ -17868,7 +17603,7 @@
           </a:bodyPr>
           <a:lstStyle/>
           <a:p>
-            <a:pPr indent="0" marL="0">
+            <a:pPr marL="0" indent="0">
               <a:buNone/>
             </a:pPr>
             <a:r>
@@ -17907,7 +17642,7 @@
           <a:bodyPr wrap="square" lIns="0" tIns="0" rIns="0" bIns="0" rtlCol="0" anchor="ctr"/>
           <a:lstStyle/>
           <a:p>
-            <a:pPr indent="0" marL="0">
+            <a:pPr marL="0" indent="0">
               <a:buNone/>
             </a:pPr>
             <a:r>
@@ -17945,7 +17680,7 @@
           </a:bodyPr>
           <a:lstStyle/>
           <a:p>
-            <a:pPr indent="0" marL="0">
+            <a:pPr marL="0" indent="0">
               <a:buNone/>
             </a:pPr>
             <a:r>
@@ -17984,7 +17719,7 @@
           <a:bodyPr wrap="square" lIns="0" tIns="0" rIns="0" bIns="0" rtlCol="0" anchor="ctr"/>
           <a:lstStyle/>
           <a:p>
-            <a:pPr indent="0" marL="0">
+            <a:pPr marL="0" indent="0">
               <a:buNone/>
             </a:pPr>
             <a:r>
@@ -18022,7 +17757,7 @@
           </a:bodyPr>
           <a:lstStyle/>
           <a:p>
-            <a:pPr indent="0" marL="0">
+            <a:pPr marL="0" indent="0">
               <a:buNone/>
             </a:pPr>
             <a:r>
@@ -18113,7 +17848,7 @@
           <a:bodyPr wrap="square" lIns="0" tIns="0" rIns="0" bIns="0" rtlCol="0" anchor="ctr"/>
           <a:lstStyle/>
           <a:p>
-            <a:pPr indent="0" marL="0">
+            <a:pPr marL="0" indent="0">
               <a:buNone/>
             </a:pPr>
             <a:r>
@@ -18152,7 +17887,7 @@
           <a:bodyPr wrap="square" lIns="0" tIns="0" rIns="0" bIns="0" rtlCol="0" anchor="ctr"/>
           <a:lstStyle/>
           <a:p>
-            <a:pPr algn="r" indent="0" marL="0">
+            <a:pPr marL="0" indent="0" algn="r">
               <a:buNone/>
             </a:pPr>
             <a:r>
@@ -18471,4 +18206,319 @@
     </a:ext>
   </a:extLst>
 </a:theme>
+</file>
+
+<file path=ppt/theme/theme2.xml><?xml version="1.0" encoding="utf-8"?>
+<a:theme xmlns:a="http://schemas.openxmlformats.org/drawingml/2006/main" name="Office Theme">
+  <a:themeElements>
+    <a:clrScheme name="Office">
+      <a:dk1>
+        <a:sysClr val="windowText" lastClr="000000"/>
+      </a:dk1>
+      <a:lt1>
+        <a:sysClr val="window" lastClr="FFFFFF"/>
+      </a:lt1>
+      <a:dk2>
+        <a:srgbClr val="0E2841"/>
+      </a:dk2>
+      <a:lt2>
+        <a:srgbClr val="E8E8E8"/>
+      </a:lt2>
+      <a:accent1>
+        <a:srgbClr val="156082"/>
+      </a:accent1>
+      <a:accent2>
+        <a:srgbClr val="E97132"/>
+      </a:accent2>
+      <a:accent3>
+        <a:srgbClr val="196B24"/>
+      </a:accent3>
+      <a:accent4>
+        <a:srgbClr val="0F9ED5"/>
+      </a:accent4>
+      <a:accent5>
+        <a:srgbClr val="A02B93"/>
+      </a:accent5>
+      <a:accent6>
+        <a:srgbClr val="4EA72E"/>
+      </a:accent6>
+      <a:hlink>
+        <a:srgbClr val="467886"/>
+      </a:hlink>
+      <a:folHlink>
+        <a:srgbClr val="96607D"/>
+      </a:folHlink>
+    </a:clrScheme>
+    <a:fontScheme name="Office">
+      <a:majorFont>
+        <a:latin typeface="Aptos Display" panose="02110004020202020204"/>
+        <a:ea typeface=""/>
+        <a:cs typeface=""/>
+        <a:font script="Jpan" typeface="游ゴシック Light"/>
+        <a:font script="Hang" typeface="맑은 고딕"/>
+        <a:font script="Hans" typeface="等线 Light"/>
+        <a:font script="Hant" typeface="新細明體"/>
+        <a:font script="Arab" typeface="Times New Roman"/>
+        <a:font script="Hebr" typeface="Times New Roman"/>
+        <a:font script="Thai" typeface="Angsana New"/>
+        <a:font script="Ethi" typeface="Nyala"/>
+        <a:font script="Beng" typeface="Vrinda"/>
+        <a:font script="Gujr" typeface="Shruti"/>
+        <a:font script="Khmr" typeface="MoolBoran"/>
+        <a:font script="Knda" typeface="Tunga"/>
+        <a:font script="Guru" typeface="Raavi"/>
+        <a:font script="Cans" typeface="Euphemia"/>
+        <a:font script="Cher" typeface="Plantagenet Cherokee"/>
+        <a:font script="Yiii" typeface="Microsoft Yi Baiti"/>
+        <a:font script="Tibt" typeface="Microsoft Himalaya"/>
+        <a:font script="Thaa" typeface="MV Boli"/>
+        <a:font script="Deva" typeface="Mangal"/>
+        <a:font script="Telu" typeface="Gautami"/>
+        <a:font script="Taml" typeface="Latha"/>
+        <a:font script="Syrc" typeface="Estrangelo Edessa"/>
+        <a:font script="Orya" typeface="Kalinga"/>
+        <a:font script="Mlym" typeface="Kartika"/>
+        <a:font script="Laoo" typeface="DokChampa"/>
+        <a:font script="Sinh" typeface="Iskoola Pota"/>
+        <a:font script="Mong" typeface="Mongolian Baiti"/>
+        <a:font script="Viet" typeface="Times New Roman"/>
+        <a:font script="Uigh" typeface="Microsoft Uighur"/>
+        <a:font script="Geor" typeface="Sylfaen"/>
+        <a:font script="Armn" typeface="Arial"/>
+        <a:font script="Bugi" typeface="Leelawadee UI"/>
+        <a:font script="Bopo" typeface="Microsoft JhengHei"/>
+        <a:font script="Java" typeface="Javanese Text"/>
+        <a:font script="Lisu" typeface="Segoe UI"/>
+        <a:font script="Mymr" typeface="Myanmar Text"/>
+        <a:font script="Nkoo" typeface="Ebrima"/>
+        <a:font script="Olck" typeface="Nirmala UI"/>
+        <a:font script="Osma" typeface="Ebrima"/>
+        <a:font script="Phag" typeface="Phagspa"/>
+        <a:font script="Syrn" typeface="Estrangelo Edessa"/>
+        <a:font script="Syrj" typeface="Estrangelo Edessa"/>
+        <a:font script="Syre" typeface="Estrangelo Edessa"/>
+        <a:font script="Sora" typeface="Nirmala UI"/>
+        <a:font script="Tale" typeface="Microsoft Tai Le"/>
+        <a:font script="Talu" typeface="Microsoft New Tai Lue"/>
+        <a:font script="Tfng" typeface="Ebrima"/>
+      </a:majorFont>
+      <a:minorFont>
+        <a:latin typeface="Aptos" panose="02110004020202020204"/>
+        <a:ea typeface=""/>
+        <a:cs typeface=""/>
+        <a:font script="Jpan" typeface="游ゴシック"/>
+        <a:font script="Hang" typeface="맑은 고딕"/>
+        <a:font script="Hans" typeface="等线"/>
+        <a:font script="Hant" typeface="新細明體"/>
+        <a:font script="Arab" typeface="Arial"/>
+        <a:font script="Hebr" typeface="Arial"/>
+        <a:font script="Thai" typeface="Cordia New"/>
+        <a:font script="Ethi" typeface="Nyala"/>
+        <a:font script="Beng" typeface="Vrinda"/>
+        <a:font script="Gujr" typeface="Shruti"/>
+        <a:font script="Khmr" typeface="DaunPenh"/>
+        <a:font script="Knda" typeface="Tunga"/>
+        <a:font script="Guru" typeface="Raavi"/>
+        <a:font script="Cans" typeface="Euphemia"/>
+        <a:font script="Cher" typeface="Plantagenet Cherokee"/>
+        <a:font script="Yiii" typeface="Microsoft Yi Baiti"/>
+        <a:font script="Tibt" typeface="Microsoft Himalaya"/>
+        <a:font script="Thaa" typeface="MV Boli"/>
+        <a:font script="Deva" typeface="Mangal"/>
+        <a:font script="Telu" typeface="Gautami"/>
+        <a:font script="Taml" typeface="Latha"/>
+        <a:font script="Syrc" typeface="Estrangelo Edessa"/>
+        <a:font script="Orya" typeface="Kalinga"/>
+        <a:font script="Mlym" typeface="Kartika"/>
+        <a:font script="Laoo" typeface="DokChampa"/>
+        <a:font script="Sinh" typeface="Iskoola Pota"/>
+        <a:font script="Mong" typeface="Mongolian Baiti"/>
+        <a:font script="Viet" typeface="Arial"/>
+        <a:font script="Uigh" typeface="Microsoft Uighur"/>
+        <a:font script="Geor" typeface="Sylfaen"/>
+        <a:font script="Armn" typeface="Arial"/>
+        <a:font script="Bugi" typeface="Leelawadee UI"/>
+        <a:font script="Bopo" typeface="Microsoft JhengHei"/>
+        <a:font script="Java" typeface="Javanese Text"/>
+        <a:font script="Lisu" typeface="Segoe UI"/>
+        <a:font script="Mymr" typeface="Myanmar Text"/>
+        <a:font script="Nkoo" typeface="Ebrima"/>
+        <a:font script="Olck" typeface="Nirmala UI"/>
+        <a:font script="Osma" typeface="Ebrima"/>
+        <a:font script="Phag" typeface="Phagspa"/>
+        <a:font script="Syrn" typeface="Estrangelo Edessa"/>
+        <a:font script="Syrj" typeface="Estrangelo Edessa"/>
+        <a:font script="Syre" typeface="Estrangelo Edessa"/>
+        <a:font script="Sora" typeface="Nirmala UI"/>
+        <a:font script="Tale" typeface="Microsoft Tai Le"/>
+        <a:font script="Talu" typeface="Microsoft New Tai Lue"/>
+        <a:font script="Tfng" typeface="Ebrima"/>
+      </a:minorFont>
+    </a:fontScheme>
+    <a:fmtScheme name="Office">
+      <a:fillStyleLst>
+        <a:solidFill>
+          <a:schemeClr val="phClr"/>
+        </a:solidFill>
+        <a:gradFill rotWithShape="1">
+          <a:gsLst>
+            <a:gs pos="0">
+              <a:schemeClr val="phClr">
+                <a:lumMod val="110000"/>
+                <a:satMod val="105000"/>
+                <a:tint val="67000"/>
+              </a:schemeClr>
+            </a:gs>
+            <a:gs pos="50000">
+              <a:schemeClr val="phClr">
+                <a:lumMod val="105000"/>
+                <a:satMod val="103000"/>
+                <a:tint val="73000"/>
+              </a:schemeClr>
+            </a:gs>
+            <a:gs pos="100000">
+              <a:schemeClr val="phClr">
+                <a:lumMod val="105000"/>
+                <a:satMod val="109000"/>
+                <a:tint val="81000"/>
+              </a:schemeClr>
+            </a:gs>
+          </a:gsLst>
+          <a:lin ang="5400000" scaled="0"/>
+        </a:gradFill>
+        <a:gradFill rotWithShape="1">
+          <a:gsLst>
+            <a:gs pos="0">
+              <a:schemeClr val="phClr">
+                <a:satMod val="103000"/>
+                <a:lumMod val="102000"/>
+                <a:tint val="94000"/>
+              </a:schemeClr>
+            </a:gs>
+            <a:gs pos="50000">
+              <a:schemeClr val="phClr">
+                <a:satMod val="110000"/>
+                <a:lumMod val="100000"/>
+                <a:shade val="100000"/>
+              </a:schemeClr>
+            </a:gs>
+            <a:gs pos="100000">
+              <a:schemeClr val="phClr">
+                <a:lumMod val="99000"/>
+                <a:satMod val="120000"/>
+                <a:shade val="78000"/>
+              </a:schemeClr>
+            </a:gs>
+          </a:gsLst>
+          <a:lin ang="5400000" scaled="0"/>
+        </a:gradFill>
+      </a:fillStyleLst>
+      <a:lnStyleLst>
+        <a:ln w="12700" cap="flat" cmpd="sng" algn="ctr">
+          <a:solidFill>
+            <a:schemeClr val="phClr"/>
+          </a:solidFill>
+          <a:prstDash val="solid"/>
+          <a:miter lim="800000"/>
+        </a:ln>
+        <a:ln w="19050" cap="flat" cmpd="sng" algn="ctr">
+          <a:solidFill>
+            <a:schemeClr val="phClr"/>
+          </a:solidFill>
+          <a:prstDash val="solid"/>
+          <a:miter lim="800000"/>
+        </a:ln>
+        <a:ln w="25400" cap="flat" cmpd="sng" algn="ctr">
+          <a:solidFill>
+            <a:schemeClr val="phClr"/>
+          </a:solidFill>
+          <a:prstDash val="solid"/>
+          <a:miter lim="800000"/>
+        </a:ln>
+      </a:lnStyleLst>
+      <a:effectStyleLst>
+        <a:effectStyle>
+          <a:effectLst/>
+        </a:effectStyle>
+        <a:effectStyle>
+          <a:effectLst/>
+        </a:effectStyle>
+        <a:effectStyle>
+          <a:effectLst>
+            <a:outerShdw blurRad="57150" dist="19050" dir="5400000" algn="ctr" rotWithShape="0">
+              <a:srgbClr val="000000">
+                <a:alpha val="63000"/>
+              </a:srgbClr>
+            </a:outerShdw>
+          </a:effectLst>
+        </a:effectStyle>
+      </a:effectStyleLst>
+      <a:bgFillStyleLst>
+        <a:solidFill>
+          <a:schemeClr val="phClr"/>
+        </a:solidFill>
+        <a:solidFill>
+          <a:schemeClr val="phClr">
+            <a:tint val="95000"/>
+            <a:satMod val="170000"/>
+          </a:schemeClr>
+        </a:solidFill>
+        <a:gradFill rotWithShape="1">
+          <a:gsLst>
+            <a:gs pos="0">
+              <a:schemeClr val="phClr">
+                <a:tint val="93000"/>
+                <a:satMod val="150000"/>
+                <a:shade val="98000"/>
+                <a:lumMod val="102000"/>
+              </a:schemeClr>
+            </a:gs>
+            <a:gs pos="50000">
+              <a:schemeClr val="phClr">
+                <a:tint val="98000"/>
+                <a:satMod val="130000"/>
+                <a:shade val="90000"/>
+                <a:lumMod val="103000"/>
+              </a:schemeClr>
+            </a:gs>
+            <a:gs pos="100000">
+              <a:schemeClr val="phClr">
+                <a:shade val="63000"/>
+                <a:satMod val="120000"/>
+              </a:schemeClr>
+            </a:gs>
+          </a:gsLst>
+          <a:lin ang="5400000" scaled="0"/>
+        </a:gradFill>
+      </a:bgFillStyleLst>
+    </a:fmtScheme>
+  </a:themeElements>
+  <a:objectDefaults>
+    <a:lnDef>
+      <a:spPr/>
+      <a:bodyPr/>
+      <a:lstStyle/>
+      <a:style>
+        <a:lnRef idx="2">
+          <a:schemeClr val="accent1"/>
+        </a:lnRef>
+        <a:fillRef idx="0">
+          <a:schemeClr val="accent1"/>
+        </a:fillRef>
+        <a:effectRef idx="1">
+          <a:schemeClr val="accent1"/>
+        </a:effectRef>
+        <a:fontRef idx="minor">
+          <a:schemeClr val="tx1"/>
+        </a:fontRef>
+      </a:style>
+    </a:lnDef>
+  </a:objectDefaults>
+  <a:extraClrSchemeLst/>
+  <a:extLst>
+    <a:ext uri="{05A4C25C-085E-4340-85A3-A5531E510DB2}">
+      <thm15:themeFamily xmlns:thm15="http://schemas.microsoft.com/office/thememl/2012/main" name="Office Theme" id="{2E142A2C-CD16-42D6-873A-C26D2A0506FA}" vid="{1BDDFF52-6CD6-40A5-AB3C-68EB2F1E4D0A}"/>
+    </a:ext>
+  </a:extLst>
+</a:theme>
 </file>
--- a/downloads/presentations/IED_Unit0_Lesson_0.1_Course_Launch_Engineering_Mindset.pptx
+++ b/downloads/presentations/IED_Unit0_Lesson_0.1_Course_Launch_Engineering_Mindset.pptx
@@ -2044,6 +2044,13 @@
             <a:prstDash val="solid"/>
           </a:ln>
         </p:spPr>
+        <p:txBody>
+          <a:bodyPr/>
+          <a:lstStyle/>
+          <a:p>
+            <a:endParaRPr lang="en-US"/>
+          </a:p>
+        </p:txBody>
       </p:sp>
       <p:pic>
         <p:nvPicPr>
@@ -2099,6 +2106,13 @@
             <a:prstDash val="solid"/>
           </a:ln>
         </p:spPr>
+        <p:txBody>
+          <a:bodyPr/>
+          <a:lstStyle/>
+          <a:p>
+            <a:endParaRPr lang="en-US"/>
+          </a:p>
+        </p:txBody>
       </p:sp>
       <p:sp>
         <p:nvSpPr>
@@ -2225,6 +2239,13 @@
             <a:prstDash val="solid"/>
           </a:ln>
         </p:spPr>
+        <p:txBody>
+          <a:bodyPr/>
+          <a:lstStyle/>
+          <a:p>
+            <a:endParaRPr lang="en-US"/>
+          </a:p>
+        </p:txBody>
       </p:sp>
       <p:sp>
         <p:nvSpPr>
@@ -2332,6 +2353,13 @@
             <a:prstDash val="solid"/>
           </a:ln>
         </p:spPr>
+        <p:txBody>
+          <a:bodyPr/>
+          <a:lstStyle/>
+          <a:p>
+            <a:endParaRPr lang="en-US"/>
+          </a:p>
+        </p:txBody>
       </p:sp>
       <p:sp>
         <p:nvSpPr>
@@ -2431,6 +2459,13 @@
             <a:prstDash val="solid"/>
           </a:ln>
         </p:spPr>
+        <p:txBody>
+          <a:bodyPr/>
+          <a:lstStyle/>
+          <a:p>
+            <a:endParaRPr lang="en-US"/>
+          </a:p>
+        </p:txBody>
       </p:sp>
       <p:sp>
         <p:nvSpPr>
@@ -2530,6 +2565,13 @@
             <a:prstDash val="solid"/>
           </a:ln>
         </p:spPr>
+        <p:txBody>
+          <a:bodyPr/>
+          <a:lstStyle/>
+          <a:p>
+            <a:endParaRPr lang="en-US"/>
+          </a:p>
+        </p:txBody>
       </p:sp>
       <p:sp>
         <p:nvSpPr>
@@ -2701,6 +2743,13 @@
             <a:prstDash val="solid"/>
           </a:ln>
         </p:spPr>
+        <p:txBody>
+          <a:bodyPr/>
+          <a:lstStyle/>
+          <a:p>
+            <a:endParaRPr lang="en-US"/>
+          </a:p>
+        </p:txBody>
       </p:sp>
       <p:sp>
         <p:nvSpPr>
@@ -2871,6 +2920,13 @@
             <a:prstDash val="solid"/>
           </a:ln>
         </p:spPr>
+        <p:txBody>
+          <a:bodyPr/>
+          <a:lstStyle/>
+          <a:p>
+            <a:endParaRPr lang="en-US"/>
+          </a:p>
+        </p:txBody>
       </p:sp>
       <p:sp>
         <p:nvSpPr>
@@ -2972,6 +3028,13 @@
             <a:prstDash val="solid"/>
           </a:ln>
         </p:spPr>
+        <p:txBody>
+          <a:bodyPr/>
+          <a:lstStyle/>
+          <a:p>
+            <a:endParaRPr lang="en-US"/>
+          </a:p>
+        </p:txBody>
       </p:sp>
       <p:sp>
         <p:nvSpPr>
@@ -3001,6 +3064,13 @@
             <a:prstDash val="solid"/>
           </a:ln>
         </p:spPr>
+        <p:txBody>
+          <a:bodyPr/>
+          <a:lstStyle/>
+          <a:p>
+            <a:endParaRPr lang="en-US"/>
+          </a:p>
+        </p:txBody>
       </p:sp>
       <p:sp>
         <p:nvSpPr>
@@ -3102,6 +3172,13 @@
             <a:prstDash val="solid"/>
           </a:ln>
         </p:spPr>
+        <p:txBody>
+          <a:bodyPr/>
+          <a:lstStyle/>
+          <a:p>
+            <a:endParaRPr lang="en-US"/>
+          </a:p>
+        </p:txBody>
       </p:sp>
       <p:sp>
         <p:nvSpPr>
@@ -3131,6 +3208,13 @@
             <a:prstDash val="solid"/>
           </a:ln>
         </p:spPr>
+        <p:txBody>
+          <a:bodyPr/>
+          <a:lstStyle/>
+          <a:p>
+            <a:endParaRPr lang="en-US"/>
+          </a:p>
+        </p:txBody>
       </p:sp>
       <p:sp>
         <p:nvSpPr>
@@ -3270,6 +3354,13 @@
             <a:prstDash val="solid"/>
           </a:ln>
         </p:spPr>
+        <p:txBody>
+          <a:bodyPr/>
+          <a:lstStyle/>
+          <a:p>
+            <a:endParaRPr lang="en-US"/>
+          </a:p>
+        </p:txBody>
       </p:sp>
       <p:sp>
         <p:nvSpPr>
@@ -3335,6 +3426,13 @@
             <a:prstDash val="solid"/>
           </a:ln>
         </p:spPr>
+        <p:txBody>
+          <a:bodyPr/>
+          <a:lstStyle/>
+          <a:p>
+            <a:endParaRPr lang="en-US"/>
+          </a:p>
+        </p:txBody>
       </p:sp>
       <p:sp>
         <p:nvSpPr>
@@ -3400,6 +3498,13 @@
             <a:prstDash val="solid"/>
           </a:ln>
         </p:spPr>
+        <p:txBody>
+          <a:bodyPr/>
+          <a:lstStyle/>
+          <a:p>
+            <a:endParaRPr lang="en-US"/>
+          </a:p>
+        </p:txBody>
       </p:sp>
       <p:sp>
         <p:nvSpPr>
@@ -3465,6 +3570,13 @@
             <a:prstDash val="solid"/>
           </a:ln>
         </p:spPr>
+        <p:txBody>
+          <a:bodyPr/>
+          <a:lstStyle/>
+          <a:p>
+            <a:endParaRPr lang="en-US"/>
+          </a:p>
+        </p:txBody>
       </p:sp>
       <p:sp>
         <p:nvSpPr>
@@ -3530,6 +3642,13 @@
             <a:prstDash val="solid"/>
           </a:ln>
         </p:spPr>
+        <p:txBody>
+          <a:bodyPr/>
+          <a:lstStyle/>
+          <a:p>
+            <a:endParaRPr lang="en-US"/>
+          </a:p>
+        </p:txBody>
       </p:sp>
       <p:sp>
         <p:nvSpPr>
@@ -3595,6 +3714,13 @@
             <a:prstDash val="solid"/>
           </a:ln>
         </p:spPr>
+        <p:txBody>
+          <a:bodyPr/>
+          <a:lstStyle/>
+          <a:p>
+            <a:endParaRPr lang="en-US"/>
+          </a:p>
+        </p:txBody>
       </p:sp>
       <p:sp>
         <p:nvSpPr>
@@ -3656,6 +3782,13 @@
             <a:prstDash val="solid"/>
           </a:ln>
         </p:spPr>
+        <p:txBody>
+          <a:bodyPr/>
+          <a:lstStyle/>
+          <a:p>
+            <a:endParaRPr lang="en-US"/>
+          </a:p>
+        </p:txBody>
       </p:sp>
       <p:sp>
         <p:nvSpPr>
@@ -3794,6 +3927,13 @@
             <a:prstDash val="solid"/>
           </a:ln>
         </p:spPr>
+        <p:txBody>
+          <a:bodyPr/>
+          <a:lstStyle/>
+          <a:p>
+            <a:endParaRPr lang="en-US"/>
+          </a:p>
+        </p:txBody>
       </p:sp>
       <p:sp>
         <p:nvSpPr>
@@ -3964,6 +4104,13 @@
             <a:prstDash val="solid"/>
           </a:ln>
         </p:spPr>
+        <p:txBody>
+          <a:bodyPr/>
+          <a:lstStyle/>
+          <a:p>
+            <a:endParaRPr lang="en-US"/>
+          </a:p>
+        </p:txBody>
       </p:sp>
       <p:sp>
         <p:nvSpPr>
@@ -4103,6 +4250,13 @@
             <a:prstDash val="solid"/>
           </a:ln>
         </p:spPr>
+        <p:txBody>
+          <a:bodyPr/>
+          <a:lstStyle/>
+          <a:p>
+            <a:endParaRPr lang="en-US"/>
+          </a:p>
+        </p:txBody>
       </p:sp>
       <p:sp>
         <p:nvSpPr>
@@ -4206,6 +4360,13 @@
             <a:prstDash val="solid"/>
           </a:ln>
         </p:spPr>
+        <p:txBody>
+          <a:bodyPr/>
+          <a:lstStyle/>
+          <a:p>
+            <a:endParaRPr lang="en-US"/>
+          </a:p>
+        </p:txBody>
       </p:sp>
       <p:sp>
         <p:nvSpPr>
@@ -4309,6 +4470,13 @@
             <a:prstDash val="solid"/>
           </a:ln>
         </p:spPr>
+        <p:txBody>
+          <a:bodyPr/>
+          <a:lstStyle/>
+          <a:p>
+            <a:endParaRPr lang="en-US"/>
+          </a:p>
+        </p:txBody>
       </p:sp>
       <p:sp>
         <p:nvSpPr>
@@ -4412,6 +4580,13 @@
             <a:prstDash val="solid"/>
           </a:ln>
         </p:spPr>
+        <p:txBody>
+          <a:bodyPr/>
+          <a:lstStyle/>
+          <a:p>
+            <a:endParaRPr lang="en-US"/>
+          </a:p>
+        </p:txBody>
       </p:sp>
       <p:sp>
         <p:nvSpPr>
@@ -4515,6 +4690,13 @@
             <a:prstDash val="solid"/>
           </a:ln>
         </p:spPr>
+        <p:txBody>
+          <a:bodyPr/>
+          <a:lstStyle/>
+          <a:p>
+            <a:endParaRPr lang="en-US"/>
+          </a:p>
+        </p:txBody>
       </p:sp>
       <p:sp>
         <p:nvSpPr>
@@ -4618,6 +4800,13 @@
             <a:prstDash val="solid"/>
           </a:ln>
         </p:spPr>
+        <p:txBody>
+          <a:bodyPr/>
+          <a:lstStyle/>
+          <a:p>
+            <a:endParaRPr lang="en-US"/>
+          </a:p>
+        </p:txBody>
       </p:sp>
       <p:sp>
         <p:nvSpPr>
@@ -4681,6 +4870,13 @@
             <a:prstDash val="solid"/>
           </a:ln>
         </p:spPr>
+        <p:txBody>
+          <a:bodyPr/>
+          <a:lstStyle/>
+          <a:p>
+            <a:endParaRPr lang="en-US"/>
+          </a:p>
+        </p:txBody>
       </p:sp>
       <p:sp>
         <p:nvSpPr>
@@ -4819,6 +5015,13 @@
             <a:prstDash val="solid"/>
           </a:ln>
         </p:spPr>
+        <p:txBody>
+          <a:bodyPr/>
+          <a:lstStyle/>
+          <a:p>
+            <a:endParaRPr lang="en-US"/>
+          </a:p>
+        </p:txBody>
       </p:sp>
       <p:sp>
         <p:nvSpPr>
@@ -5025,6 +5228,13 @@
             <a:prstDash val="solid"/>
           </a:ln>
         </p:spPr>
+        <p:txBody>
+          <a:bodyPr/>
+          <a:lstStyle/>
+          <a:p>
+            <a:endParaRPr lang="en-US"/>
+          </a:p>
+        </p:txBody>
       </p:sp>
       <p:sp>
         <p:nvSpPr>
@@ -5166,6 +5376,13 @@
             <a:prstDash val="solid"/>
           </a:ln>
         </p:spPr>
+        <p:txBody>
+          <a:bodyPr/>
+          <a:lstStyle/>
+          <a:p>
+            <a:endParaRPr lang="en-US"/>
+          </a:p>
+        </p:txBody>
       </p:sp>
       <p:sp>
         <p:nvSpPr>
@@ -5341,6 +5558,13 @@
             <a:prstDash val="solid"/>
           </a:ln>
         </p:spPr>
+        <p:txBody>
+          <a:bodyPr/>
+          <a:lstStyle/>
+          <a:p>
+            <a:endParaRPr lang="en-US"/>
+          </a:p>
+        </p:txBody>
       </p:sp>
       <p:sp>
         <p:nvSpPr>
@@ -5479,6 +5703,13 @@
             <a:prstDash val="solid"/>
           </a:ln>
         </p:spPr>
+        <p:txBody>
+          <a:bodyPr/>
+          <a:lstStyle/>
+          <a:p>
+            <a:endParaRPr lang="en-US"/>
+          </a:p>
+        </p:txBody>
       </p:sp>
       <p:sp>
         <p:nvSpPr>
@@ -5687,6 +5918,13 @@
             <a:prstDash val="solid"/>
           </a:ln>
         </p:spPr>
+        <p:txBody>
+          <a:bodyPr/>
+          <a:lstStyle/>
+          <a:p>
+            <a:endParaRPr lang="en-US"/>
+          </a:p>
+        </p:txBody>
       </p:sp>
       <p:sp>
         <p:nvSpPr>
@@ -5790,6 +6028,13 @@
             <a:prstDash val="solid"/>
           </a:ln>
         </p:spPr>
+        <p:txBody>
+          <a:bodyPr/>
+          <a:lstStyle/>
+          <a:p>
+            <a:endParaRPr lang="en-US"/>
+          </a:p>
+        </p:txBody>
       </p:sp>
       <p:sp>
         <p:nvSpPr>
@@ -5893,6 +6138,13 @@
             <a:prstDash val="solid"/>
           </a:ln>
         </p:spPr>
+        <p:txBody>
+          <a:bodyPr/>
+          <a:lstStyle/>
+          <a:p>
+            <a:endParaRPr lang="en-US"/>
+          </a:p>
+        </p:txBody>
       </p:sp>
       <p:sp>
         <p:nvSpPr>
@@ -5996,6 +6248,13 @@
             <a:prstDash val="solid"/>
           </a:ln>
         </p:spPr>
+        <p:txBody>
+          <a:bodyPr/>
+          <a:lstStyle/>
+          <a:p>
+            <a:endParaRPr lang="en-US"/>
+          </a:p>
+        </p:txBody>
       </p:sp>
       <p:sp>
         <p:nvSpPr>
@@ -6099,6 +6358,13 @@
             <a:prstDash val="solid"/>
           </a:ln>
         </p:spPr>
+        <p:txBody>
+          <a:bodyPr/>
+          <a:lstStyle/>
+          <a:p>
+            <a:endParaRPr lang="en-US"/>
+          </a:p>
+        </p:txBody>
       </p:sp>
       <p:sp>
         <p:nvSpPr>
@@ -6162,6 +6428,13 @@
             <a:prstDash val="solid"/>
           </a:ln>
         </p:spPr>
+        <p:txBody>
+          <a:bodyPr/>
+          <a:lstStyle/>
+          <a:p>
+            <a:endParaRPr lang="en-US"/>
+          </a:p>
+        </p:txBody>
       </p:sp>
       <p:sp>
         <p:nvSpPr>
@@ -6300,6 +6573,13 @@
             <a:prstDash val="solid"/>
           </a:ln>
         </p:spPr>
+        <p:txBody>
+          <a:bodyPr/>
+          <a:lstStyle/>
+          <a:p>
+            <a:endParaRPr lang="en-US"/>
+          </a:p>
+        </p:txBody>
       </p:sp>
       <p:sp>
         <p:nvSpPr>
@@ -6506,6 +6786,13 @@
             <a:prstDash val="solid"/>
           </a:ln>
         </p:spPr>
+        <p:txBody>
+          <a:bodyPr/>
+          <a:lstStyle/>
+          <a:p>
+            <a:endParaRPr lang="en-US"/>
+          </a:p>
+        </p:txBody>
       </p:sp>
       <p:sp>
         <p:nvSpPr>
@@ -6573,6 +6860,13 @@
             <a:prstDash val="solid"/>
           </a:ln>
         </p:spPr>
+        <p:txBody>
+          <a:bodyPr/>
+          <a:lstStyle/>
+          <a:p>
+            <a:endParaRPr lang="en-US"/>
+          </a:p>
+        </p:txBody>
       </p:sp>
       <p:sp>
         <p:nvSpPr>
@@ -6678,6 +6972,13 @@
             <a:prstDash val="solid"/>
           </a:ln>
         </p:spPr>
+        <p:txBody>
+          <a:bodyPr/>
+          <a:lstStyle/>
+          <a:p>
+            <a:endParaRPr lang="en-US"/>
+          </a:p>
+        </p:txBody>
       </p:sp>
       <p:sp>
         <p:nvSpPr>
@@ -6783,6 +7084,13 @@
             <a:prstDash val="solid"/>
           </a:ln>
         </p:spPr>
+        <p:txBody>
+          <a:bodyPr/>
+          <a:lstStyle/>
+          <a:p>
+            <a:endParaRPr lang="en-US"/>
+          </a:p>
+        </p:txBody>
       </p:sp>
       <p:sp>
         <p:nvSpPr>
@@ -6922,6 +7230,13 @@
             <a:prstDash val="solid"/>
           </a:ln>
         </p:spPr>
+        <p:txBody>
+          <a:bodyPr/>
+          <a:lstStyle/>
+          <a:p>
+            <a:endParaRPr lang="en-US"/>
+          </a:p>
+        </p:txBody>
       </p:sp>
       <p:sp>
         <p:nvSpPr>
@@ -7060,6 +7375,13 @@
             <a:prstDash val="solid"/>
           </a:ln>
         </p:spPr>
+        <p:txBody>
+          <a:bodyPr/>
+          <a:lstStyle/>
+          <a:p>
+            <a:endParaRPr lang="en-US"/>
+          </a:p>
+        </p:txBody>
       </p:sp>
       <p:sp>
         <p:nvSpPr>
@@ -7230,6 +7552,13 @@
             <a:prstDash val="solid"/>
           </a:ln>
         </p:spPr>
+        <p:txBody>
+          <a:bodyPr/>
+          <a:lstStyle/>
+          <a:p>
+            <a:endParaRPr lang="en-US"/>
+          </a:p>
+        </p:txBody>
       </p:sp>
       <p:sp>
         <p:nvSpPr>
@@ -7257,6 +7586,13 @@
             <a:prstDash val="solid"/>
           </a:ln>
         </p:spPr>
+        <p:txBody>
+          <a:bodyPr/>
+          <a:lstStyle/>
+          <a:p>
+            <a:endParaRPr lang="en-US"/>
+          </a:p>
+        </p:txBody>
       </p:sp>
       <p:sp>
         <p:nvSpPr>
@@ -7396,6 +7732,13 @@
             <a:prstDash val="solid"/>
           </a:ln>
         </p:spPr>
+        <p:txBody>
+          <a:bodyPr/>
+          <a:lstStyle/>
+          <a:p>
+            <a:endParaRPr lang="en-US"/>
+          </a:p>
+        </p:txBody>
       </p:sp>
       <p:sp>
         <p:nvSpPr>
@@ -7423,6 +7766,13 @@
             <a:prstDash val="solid"/>
           </a:ln>
         </p:spPr>
+        <p:txBody>
+          <a:bodyPr/>
+          <a:lstStyle/>
+          <a:p>
+            <a:endParaRPr lang="en-US"/>
+          </a:p>
+        </p:txBody>
       </p:sp>
       <p:sp>
         <p:nvSpPr>
@@ -7562,6 +7912,13 @@
             <a:prstDash val="solid"/>
           </a:ln>
         </p:spPr>
+        <p:txBody>
+          <a:bodyPr/>
+          <a:lstStyle/>
+          <a:p>
+            <a:endParaRPr lang="en-US"/>
+          </a:p>
+        </p:txBody>
       </p:sp>
       <p:sp>
         <p:nvSpPr>
@@ -7589,6 +7946,13 @@
             <a:prstDash val="solid"/>
           </a:ln>
         </p:spPr>
+        <p:txBody>
+          <a:bodyPr/>
+          <a:lstStyle/>
+          <a:p>
+            <a:endParaRPr lang="en-US"/>
+          </a:p>
+        </p:txBody>
       </p:sp>
       <p:sp>
         <p:nvSpPr>
@@ -7728,6 +8092,13 @@
             <a:prstDash val="solid"/>
           </a:ln>
         </p:spPr>
+        <p:txBody>
+          <a:bodyPr/>
+          <a:lstStyle/>
+          <a:p>
+            <a:endParaRPr lang="en-US"/>
+          </a:p>
+        </p:txBody>
       </p:sp>
       <p:sp>
         <p:nvSpPr>
@@ -7791,6 +8162,13 @@
             <a:prstDash val="solid"/>
           </a:ln>
         </p:spPr>
+        <p:txBody>
+          <a:bodyPr/>
+          <a:lstStyle/>
+          <a:p>
+            <a:endParaRPr lang="en-US"/>
+          </a:p>
+        </p:txBody>
       </p:sp>
       <p:sp>
         <p:nvSpPr>
@@ -7929,6 +8307,13 @@
             <a:prstDash val="solid"/>
           </a:ln>
         </p:spPr>
+        <p:txBody>
+          <a:bodyPr/>
+          <a:lstStyle/>
+          <a:p>
+            <a:endParaRPr lang="en-US"/>
+          </a:p>
+        </p:txBody>
       </p:sp>
       <p:sp>
         <p:nvSpPr>
@@ -8099,6 +8484,13 @@
             <a:prstDash val="solid"/>
           </a:ln>
         </p:spPr>
+        <p:txBody>
+          <a:bodyPr/>
+          <a:lstStyle/>
+          <a:p>
+            <a:endParaRPr lang="en-US"/>
+          </a:p>
+        </p:txBody>
       </p:sp>
       <p:sp>
         <p:nvSpPr>
@@ -8126,6 +8518,13 @@
             <a:prstDash val="solid"/>
           </a:ln>
         </p:spPr>
+        <p:txBody>
+          <a:bodyPr/>
+          <a:lstStyle/>
+          <a:p>
+            <a:endParaRPr lang="en-US"/>
+          </a:p>
+        </p:txBody>
       </p:sp>
       <p:sp>
         <p:nvSpPr>
@@ -8267,6 +8666,13 @@
             <a:prstDash val="solid"/>
           </a:ln>
         </p:spPr>
+        <p:txBody>
+          <a:bodyPr/>
+          <a:lstStyle/>
+          <a:p>
+            <a:endParaRPr lang="en-US"/>
+          </a:p>
+        </p:txBody>
       </p:sp>
       <p:sp>
         <p:nvSpPr>
@@ -8294,6 +8700,13 @@
             <a:prstDash val="solid"/>
           </a:ln>
         </p:spPr>
+        <p:txBody>
+          <a:bodyPr/>
+          <a:lstStyle/>
+          <a:p>
+            <a:endParaRPr lang="en-US"/>
+          </a:p>
+        </p:txBody>
       </p:sp>
       <p:sp>
         <p:nvSpPr>
@@ -8435,6 +8848,13 @@
             <a:prstDash val="solid"/>
           </a:ln>
         </p:spPr>
+        <p:txBody>
+          <a:bodyPr/>
+          <a:lstStyle/>
+          <a:p>
+            <a:endParaRPr lang="en-US"/>
+          </a:p>
+        </p:txBody>
       </p:sp>
       <p:sp>
         <p:nvSpPr>
@@ -8462,6 +8882,13 @@
             <a:prstDash val="solid"/>
           </a:ln>
         </p:spPr>
+        <p:txBody>
+          <a:bodyPr/>
+          <a:lstStyle/>
+          <a:p>
+            <a:endParaRPr lang="en-US"/>
+          </a:p>
+        </p:txBody>
       </p:sp>
       <p:sp>
         <p:nvSpPr>
@@ -8637,6 +9064,13 @@
             <a:prstDash val="solid"/>
           </a:ln>
         </p:spPr>
+        <p:txBody>
+          <a:bodyPr/>
+          <a:lstStyle/>
+          <a:p>
+            <a:endParaRPr lang="en-US"/>
+          </a:p>
+        </p:txBody>
       </p:sp>
       <p:sp>
         <p:nvSpPr>
@@ -8775,6 +9209,13 @@
             <a:prstDash val="solid"/>
           </a:ln>
         </p:spPr>
+        <p:txBody>
+          <a:bodyPr/>
+          <a:lstStyle/>
+          <a:p>
+            <a:endParaRPr lang="en-US"/>
+          </a:p>
+        </p:txBody>
       </p:sp>
       <p:sp>
         <p:nvSpPr>
@@ -8945,6 +9386,13 @@
             <a:prstDash val="solid"/>
           </a:ln>
         </p:spPr>
+        <p:txBody>
+          <a:bodyPr/>
+          <a:lstStyle/>
+          <a:p>
+            <a:endParaRPr lang="en-US"/>
+          </a:p>
+        </p:txBody>
       </p:sp>
       <p:sp>
         <p:nvSpPr>
@@ -9008,6 +9456,13 @@
             <a:prstDash val="solid"/>
           </a:ln>
         </p:spPr>
+        <p:txBody>
+          <a:bodyPr/>
+          <a:lstStyle/>
+          <a:p>
+            <a:endParaRPr lang="en-US"/>
+          </a:p>
+        </p:txBody>
       </p:sp>
       <p:sp>
         <p:nvSpPr>
@@ -9109,6 +9564,13 @@
             <a:prstDash val="solid"/>
           </a:ln>
         </p:spPr>
+        <p:txBody>
+          <a:bodyPr/>
+          <a:lstStyle/>
+          <a:p>
+            <a:endParaRPr lang="en-US"/>
+          </a:p>
+        </p:txBody>
       </p:sp>
       <p:sp>
         <p:nvSpPr>
@@ -9210,6 +9672,13 @@
             <a:prstDash val="solid"/>
           </a:ln>
         </p:spPr>
+        <p:txBody>
+          <a:bodyPr/>
+          <a:lstStyle/>
+          <a:p>
+            <a:endParaRPr lang="en-US"/>
+          </a:p>
+        </p:txBody>
       </p:sp>
       <p:sp>
         <p:nvSpPr>
@@ -9313,6 +9782,13 @@
             <a:prstDash val="solid"/>
           </a:ln>
         </p:spPr>
+        <p:txBody>
+          <a:bodyPr/>
+          <a:lstStyle/>
+          <a:p>
+            <a:endParaRPr lang="en-US"/>
+          </a:p>
+        </p:txBody>
       </p:sp>
       <p:sp>
         <p:nvSpPr>
@@ -9374,6 +9850,13 @@
             <a:prstDash val="solid"/>
           </a:ln>
         </p:spPr>
+        <p:txBody>
+          <a:bodyPr/>
+          <a:lstStyle/>
+          <a:p>
+            <a:endParaRPr lang="en-US"/>
+          </a:p>
+        </p:txBody>
       </p:sp>
       <p:sp>
         <p:nvSpPr>
@@ -9512,6 +9995,13 @@
             <a:prstDash val="solid"/>
           </a:ln>
         </p:spPr>
+        <p:txBody>
+          <a:bodyPr/>
+          <a:lstStyle/>
+          <a:p>
+            <a:endParaRPr lang="en-US"/>
+          </a:p>
+        </p:txBody>
       </p:sp>
       <p:sp>
         <p:nvSpPr>
@@ -9682,6 +10172,13 @@
             <a:prstDash val="solid"/>
           </a:ln>
         </p:spPr>
+        <p:txBody>
+          <a:bodyPr/>
+          <a:lstStyle/>
+          <a:p>
+            <a:endParaRPr lang="en-US"/>
+          </a:p>
+        </p:txBody>
       </p:sp>
       <p:sp>
         <p:nvSpPr>
@@ -9974,6 +10471,13 @@
             <a:prstDash val="solid"/>
           </a:ln>
         </p:spPr>
+        <p:txBody>
+          <a:bodyPr/>
+          <a:lstStyle/>
+          <a:p>
+            <a:endParaRPr lang="en-US"/>
+          </a:p>
+        </p:txBody>
       </p:sp>
       <p:sp>
         <p:nvSpPr>
@@ -10077,6 +10581,13 @@
             <a:prstDash val="solid"/>
           </a:ln>
         </p:spPr>
+        <p:txBody>
+          <a:bodyPr/>
+          <a:lstStyle/>
+          <a:p>
+            <a:endParaRPr lang="en-US"/>
+          </a:p>
+        </p:txBody>
       </p:sp>
       <p:sp>
         <p:nvSpPr>
@@ -10142,6 +10653,13 @@
             <a:prstDash val="solid"/>
           </a:ln>
         </p:spPr>
+        <p:txBody>
+          <a:bodyPr/>
+          <a:lstStyle/>
+          <a:p>
+            <a:endParaRPr lang="en-US"/>
+          </a:p>
+        </p:txBody>
       </p:sp>
       <p:sp>
         <p:nvSpPr>
@@ -10245,6 +10763,13 @@
             <a:prstDash val="solid"/>
           </a:ln>
         </p:spPr>
+        <p:txBody>
+          <a:bodyPr/>
+          <a:lstStyle/>
+          <a:p>
+            <a:endParaRPr lang="en-US"/>
+          </a:p>
+        </p:txBody>
       </p:sp>
       <p:sp>
         <p:nvSpPr>
@@ -10348,6 +10873,13 @@
             <a:prstDash val="solid"/>
           </a:ln>
         </p:spPr>
+        <p:txBody>
+          <a:bodyPr/>
+          <a:lstStyle/>
+          <a:p>
+            <a:endParaRPr lang="en-US"/>
+          </a:p>
+        </p:txBody>
       </p:sp>
       <p:sp>
         <p:nvSpPr>
@@ -10451,6 +10983,13 @@
             <a:prstDash val="solid"/>
           </a:ln>
         </p:spPr>
+        <p:txBody>
+          <a:bodyPr/>
+          <a:lstStyle/>
+          <a:p>
+            <a:endParaRPr lang="en-US"/>
+          </a:p>
+        </p:txBody>
       </p:sp>
       <p:sp>
         <p:nvSpPr>
@@ -10554,6 +11093,13 @@
             <a:prstDash val="solid"/>
           </a:ln>
         </p:spPr>
+        <p:txBody>
+          <a:bodyPr/>
+          <a:lstStyle/>
+          <a:p>
+            <a:endParaRPr lang="en-US"/>
+          </a:p>
+        </p:txBody>
       </p:sp>
       <p:sp>
         <p:nvSpPr>
@@ -10657,6 +11203,13 @@
             <a:prstDash val="solid"/>
           </a:ln>
         </p:spPr>
+        <p:txBody>
+          <a:bodyPr/>
+          <a:lstStyle/>
+          <a:p>
+            <a:endParaRPr lang="en-US"/>
+          </a:p>
+        </p:txBody>
       </p:sp>
       <p:sp>
         <p:nvSpPr>
@@ -10760,6 +11313,13 @@
             <a:prstDash val="solid"/>
           </a:ln>
         </p:spPr>
+        <p:txBody>
+          <a:bodyPr/>
+          <a:lstStyle/>
+          <a:p>
+            <a:endParaRPr lang="en-US"/>
+          </a:p>
+        </p:txBody>
       </p:sp>
       <p:sp>
         <p:nvSpPr>
@@ -10859,6 +11419,13 @@
             <a:prstDash val="solid"/>
           </a:ln>
         </p:spPr>
+        <p:txBody>
+          <a:bodyPr/>
+          <a:lstStyle/>
+          <a:p>
+            <a:endParaRPr lang="en-US"/>
+          </a:p>
+        </p:txBody>
       </p:sp>
       <p:sp>
         <p:nvSpPr>
@@ -10997,6 +11564,13 @@
             <a:prstDash val="solid"/>
           </a:ln>
         </p:spPr>
+        <p:txBody>
+          <a:bodyPr/>
+          <a:lstStyle/>
+          <a:p>
+            <a:endParaRPr lang="en-US"/>
+          </a:p>
+        </p:txBody>
       </p:sp>
       <p:sp>
         <p:nvSpPr>
@@ -11205,6 +11779,13 @@
             <a:prstDash val="solid"/>
           </a:ln>
         </p:spPr>
+        <p:txBody>
+          <a:bodyPr/>
+          <a:lstStyle/>
+          <a:p>
+            <a:endParaRPr lang="en-US"/>
+          </a:p>
+        </p:txBody>
       </p:sp>
       <p:sp>
         <p:nvSpPr>
@@ -11308,42 +11889,11 @@
             <a:prstDash val="solid"/>
           </a:ln>
         </p:spPr>
-      </p:sp>
-      <p:sp>
-        <p:nvSpPr>
-          <p:cNvPr id="12" name="Text 9"/>
-          <p:cNvSpPr/>
-          <p:nvPr/>
-        </p:nvSpPr>
-        <p:spPr>
-          <a:xfrm>
-            <a:off x="1600200" y="3776472"/>
-            <a:ext cx="8503920" cy="109728"/>
-          </a:xfrm>
-          <a:prstGeom prst="rect">
-            <a:avLst/>
-          </a:prstGeom>
-          <a:noFill/>
-          <a:ln/>
-        </p:spPr>
-        <p:txBody>
-          <a:bodyPr wrap="square" lIns="0" tIns="0" rIns="0" bIns="0" rtlCol="0" anchor="ctr">
-            <a:normAutofit/>
-          </a:bodyPr>
-          <a:lstStyle/>
-          <a:p>
-            <a:pPr marL="0" indent="0" algn="ctr">
-              <a:buNone/>
-            </a:pPr>
-            <a:r>
-              <a:rPr lang="en-US" sz="1080" b="1" dirty="0">
-                <a:solidFill>
-                  <a:srgbClr val="FFC857"/>
-                </a:solidFill>
-              </a:rPr>
-              <a:t>Examples from students might sound like: design, build, test, fix, invent, solve, measure, or improve.</a:t>
-            </a:r>
-            <a:endParaRPr lang="en-US" sz="1080" dirty="0"/>
+        <p:txBody>
+          <a:bodyPr/>
+          <a:lstStyle/>
+          <a:p>
+            <a:endParaRPr lang="en-US"/>
           </a:p>
         </p:txBody>
       </p:sp>
@@ -11409,6 +11959,13 @@
             <a:prstDash val="solid"/>
           </a:ln>
         </p:spPr>
+        <p:txBody>
+          <a:bodyPr/>
+          <a:lstStyle/>
+          <a:p>
+            <a:endParaRPr lang="en-US"/>
+          </a:p>
+        </p:txBody>
       </p:sp>
       <p:sp>
         <p:nvSpPr>
@@ -11547,6 +12104,13 @@
             <a:prstDash val="solid"/>
           </a:ln>
         </p:spPr>
+        <p:txBody>
+          <a:bodyPr/>
+          <a:lstStyle/>
+          <a:p>
+            <a:endParaRPr lang="en-US"/>
+          </a:p>
+        </p:txBody>
       </p:sp>
       <p:sp>
         <p:nvSpPr>
@@ -11755,6 +12319,13 @@
             <a:prstDash val="solid"/>
           </a:ln>
         </p:spPr>
+        <p:txBody>
+          <a:bodyPr/>
+          <a:lstStyle/>
+          <a:p>
+            <a:endParaRPr lang="en-US"/>
+          </a:p>
+        </p:txBody>
       </p:sp>
       <p:sp>
         <p:nvSpPr>
@@ -11860,6 +12431,13 @@
             <a:prstDash val="solid"/>
           </a:ln>
         </p:spPr>
+        <p:txBody>
+          <a:bodyPr/>
+          <a:lstStyle/>
+          <a:p>
+            <a:endParaRPr lang="en-US"/>
+          </a:p>
+        </p:txBody>
       </p:sp>
       <p:sp>
         <p:nvSpPr>
@@ -11965,6 +12543,13 @@
             <a:prstDash val="solid"/>
           </a:ln>
         </p:spPr>
+        <p:txBody>
+          <a:bodyPr/>
+          <a:lstStyle/>
+          <a:p>
+            <a:endParaRPr lang="en-US"/>
+          </a:p>
+        </p:txBody>
       </p:sp>
       <p:sp>
         <p:nvSpPr>
@@ -12070,6 +12655,13 @@
             <a:prstDash val="solid"/>
           </a:ln>
         </p:spPr>
+        <p:txBody>
+          <a:bodyPr/>
+          <a:lstStyle/>
+          <a:p>
+            <a:endParaRPr lang="en-US"/>
+          </a:p>
+        </p:txBody>
       </p:sp>
       <p:sp>
         <p:nvSpPr>
@@ -12209,6 +12801,13 @@
             <a:prstDash val="solid"/>
           </a:ln>
         </p:spPr>
+        <p:txBody>
+          <a:bodyPr/>
+          <a:lstStyle/>
+          <a:p>
+            <a:endParaRPr lang="en-US"/>
+          </a:p>
+        </p:txBody>
       </p:sp>
       <p:sp>
         <p:nvSpPr>
@@ -12347,6 +12946,13 @@
             <a:prstDash val="solid"/>
           </a:ln>
         </p:spPr>
+        <p:txBody>
+          <a:bodyPr/>
+          <a:lstStyle/>
+          <a:p>
+            <a:endParaRPr lang="en-US"/>
+          </a:p>
+        </p:txBody>
       </p:sp>
       <p:sp>
         <p:nvSpPr>
@@ -12553,6 +13159,13 @@
             <a:prstDash val="solid"/>
           </a:ln>
         </p:spPr>
+        <p:txBody>
+          <a:bodyPr/>
+          <a:lstStyle/>
+          <a:p>
+            <a:endParaRPr lang="en-US"/>
+          </a:p>
+        </p:txBody>
       </p:sp>
       <p:sp>
         <p:nvSpPr>
@@ -12580,6 +13193,13 @@
             <a:prstDash val="solid"/>
           </a:ln>
         </p:spPr>
+        <p:txBody>
+          <a:bodyPr/>
+          <a:lstStyle/>
+          <a:p>
+            <a:endParaRPr lang="en-US"/>
+          </a:p>
+        </p:txBody>
       </p:sp>
       <p:sp>
         <p:nvSpPr>
@@ -12719,6 +13339,13 @@
             <a:prstDash val="solid"/>
           </a:ln>
         </p:spPr>
+        <p:txBody>
+          <a:bodyPr/>
+          <a:lstStyle/>
+          <a:p>
+            <a:endParaRPr lang="en-US"/>
+          </a:p>
+        </p:txBody>
       </p:sp>
       <p:sp>
         <p:nvSpPr>
@@ -12746,6 +13373,13 @@
             <a:prstDash val="solid"/>
           </a:ln>
         </p:spPr>
+        <p:txBody>
+          <a:bodyPr/>
+          <a:lstStyle/>
+          <a:p>
+            <a:endParaRPr lang="en-US"/>
+          </a:p>
+        </p:txBody>
       </p:sp>
       <p:sp>
         <p:nvSpPr>
@@ -12885,6 +13519,13 @@
             <a:prstDash val="solid"/>
           </a:ln>
         </p:spPr>
+        <p:txBody>
+          <a:bodyPr/>
+          <a:lstStyle/>
+          <a:p>
+            <a:endParaRPr lang="en-US"/>
+          </a:p>
+        </p:txBody>
       </p:sp>
       <p:sp>
         <p:nvSpPr>
@@ -12912,6 +13553,13 @@
             <a:prstDash val="solid"/>
           </a:ln>
         </p:spPr>
+        <p:txBody>
+          <a:bodyPr/>
+          <a:lstStyle/>
+          <a:p>
+            <a:endParaRPr lang="en-US"/>
+          </a:p>
+        </p:txBody>
       </p:sp>
       <p:sp>
         <p:nvSpPr>
@@ -13051,6 +13699,13 @@
             <a:prstDash val="solid"/>
           </a:ln>
         </p:spPr>
+        <p:txBody>
+          <a:bodyPr/>
+          <a:lstStyle/>
+          <a:p>
+            <a:endParaRPr lang="en-US"/>
+          </a:p>
+        </p:txBody>
       </p:sp>
       <p:sp>
         <p:nvSpPr>
@@ -13078,6 +13733,13 @@
             <a:prstDash val="solid"/>
           </a:ln>
         </p:spPr>
+        <p:txBody>
+          <a:bodyPr/>
+          <a:lstStyle/>
+          <a:p>
+            <a:endParaRPr lang="en-US"/>
+          </a:p>
+        </p:txBody>
       </p:sp>
       <p:sp>
         <p:nvSpPr>
@@ -13217,6 +13879,13 @@
             <a:prstDash val="solid"/>
           </a:ln>
         </p:spPr>
+        <p:txBody>
+          <a:bodyPr/>
+          <a:lstStyle/>
+          <a:p>
+            <a:endParaRPr lang="en-US"/>
+          </a:p>
+        </p:txBody>
       </p:sp>
       <p:sp>
         <p:nvSpPr>
@@ -13280,6 +13949,13 @@
             <a:prstDash val="solid"/>
           </a:ln>
         </p:spPr>
+        <p:txBody>
+          <a:bodyPr/>
+          <a:lstStyle/>
+          <a:p>
+            <a:endParaRPr lang="en-US"/>
+          </a:p>
+        </p:txBody>
       </p:sp>
       <p:sp>
         <p:nvSpPr>
@@ -13418,6 +14094,13 @@
             <a:prstDash val="solid"/>
           </a:ln>
         </p:spPr>
+        <p:txBody>
+          <a:bodyPr/>
+          <a:lstStyle/>
+          <a:p>
+            <a:endParaRPr lang="en-US"/>
+          </a:p>
+        </p:txBody>
       </p:sp>
       <p:sp>
         <p:nvSpPr>
@@ -13624,6 +14307,13 @@
             <a:prstDash val="solid"/>
           </a:ln>
         </p:spPr>
+        <p:txBody>
+          <a:bodyPr/>
+          <a:lstStyle/>
+          <a:p>
+            <a:endParaRPr lang="en-US"/>
+          </a:p>
+        </p:txBody>
       </p:sp>
       <p:sp>
         <p:nvSpPr>
@@ -13691,6 +14381,13 @@
             <a:prstDash val="solid"/>
           </a:ln>
         </p:spPr>
+        <p:txBody>
+          <a:bodyPr/>
+          <a:lstStyle/>
+          <a:p>
+            <a:endParaRPr lang="en-US"/>
+          </a:p>
+        </p:txBody>
       </p:sp>
       <p:sp>
         <p:nvSpPr>
@@ -13796,6 +14493,13 @@
             <a:prstDash val="solid"/>
           </a:ln>
         </p:spPr>
+        <p:txBody>
+          <a:bodyPr/>
+          <a:lstStyle/>
+          <a:p>
+            <a:endParaRPr lang="en-US"/>
+          </a:p>
+        </p:txBody>
       </p:sp>
       <p:sp>
         <p:nvSpPr>
@@ -13901,6 +14605,13 @@
             <a:prstDash val="solid"/>
           </a:ln>
         </p:spPr>
+        <p:txBody>
+          <a:bodyPr/>
+          <a:lstStyle/>
+          <a:p>
+            <a:endParaRPr lang="en-US"/>
+          </a:p>
+        </p:txBody>
       </p:sp>
       <p:sp>
         <p:nvSpPr>
@@ -14002,6 +14713,13 @@
             <a:prstDash val="solid"/>
           </a:ln>
         </p:spPr>
+        <p:txBody>
+          <a:bodyPr/>
+          <a:lstStyle/>
+          <a:p>
+            <a:endParaRPr lang="en-US"/>
+          </a:p>
+        </p:txBody>
       </p:sp>
       <p:sp>
         <p:nvSpPr>
@@ -14140,6 +14858,13 @@
             <a:prstDash val="solid"/>
           </a:ln>
         </p:spPr>
+        <p:txBody>
+          <a:bodyPr/>
+          <a:lstStyle/>
+          <a:p>
+            <a:endParaRPr lang="en-US"/>
+          </a:p>
+        </p:txBody>
       </p:sp>
       <p:sp>
         <p:nvSpPr>
@@ -14310,6 +15035,13 @@
             <a:prstDash val="solid"/>
           </a:ln>
         </p:spPr>
+        <p:txBody>
+          <a:bodyPr/>
+          <a:lstStyle/>
+          <a:p>
+            <a:endParaRPr lang="en-US"/>
+          </a:p>
+        </p:txBody>
       </p:sp>
       <p:sp>
         <p:nvSpPr>
@@ -14760,6 +15492,13 @@
             <a:prstDash val="solid"/>
           </a:ln>
         </p:spPr>
+        <p:txBody>
+          <a:bodyPr/>
+          <a:lstStyle/>
+          <a:p>
+            <a:endParaRPr lang="en-US"/>
+          </a:p>
+        </p:txBody>
       </p:sp>
       <p:sp>
         <p:nvSpPr>
@@ -15206,6 +15945,13 @@
             <a:prstDash val="solid"/>
           </a:ln>
         </p:spPr>
+        <p:txBody>
+          <a:bodyPr/>
+          <a:lstStyle/>
+          <a:p>
+            <a:endParaRPr lang="en-US"/>
+          </a:p>
+        </p:txBody>
       </p:sp>
       <p:sp>
         <p:nvSpPr>
@@ -15231,6 +15977,13 @@
             <a:prstDash val="solid"/>
           </a:ln>
         </p:spPr>
+        <p:txBody>
+          <a:bodyPr/>
+          <a:lstStyle/>
+          <a:p>
+            <a:endParaRPr lang="en-US"/>
+          </a:p>
+        </p:txBody>
       </p:sp>
       <p:sp>
         <p:nvSpPr>
@@ -15369,6 +16122,13 @@
             <a:prstDash val="solid"/>
           </a:ln>
         </p:spPr>
+        <p:txBody>
+          <a:bodyPr/>
+          <a:lstStyle/>
+          <a:p>
+            <a:endParaRPr lang="en-US"/>
+          </a:p>
+        </p:txBody>
       </p:sp>
       <p:sp>
         <p:nvSpPr>
@@ -15539,6 +16299,13 @@
             <a:prstDash val="solid"/>
           </a:ln>
         </p:spPr>
+        <p:txBody>
+          <a:bodyPr/>
+          <a:lstStyle/>
+          <a:p>
+            <a:endParaRPr lang="en-US"/>
+          </a:p>
+        </p:txBody>
       </p:sp>
       <p:sp>
         <p:nvSpPr>
@@ -16063,6 +16830,13 @@
             <a:prstDash val="solid"/>
           </a:ln>
         </p:spPr>
+        <p:txBody>
+          <a:bodyPr/>
+          <a:lstStyle/>
+          <a:p>
+            <a:endParaRPr lang="en-US"/>
+          </a:p>
+        </p:txBody>
       </p:sp>
       <p:sp>
         <p:nvSpPr>
@@ -16128,6 +16902,13 @@
             <a:prstDash val="solid"/>
           </a:ln>
         </p:spPr>
+        <p:txBody>
+          <a:bodyPr/>
+          <a:lstStyle/>
+          <a:p>
+            <a:endParaRPr lang="en-US"/>
+          </a:p>
+        </p:txBody>
       </p:sp>
       <p:sp>
         <p:nvSpPr>
@@ -16231,6 +17012,13 @@
             <a:prstDash val="solid"/>
           </a:ln>
         </p:spPr>
+        <p:txBody>
+          <a:bodyPr/>
+          <a:lstStyle/>
+          <a:p>
+            <a:endParaRPr lang="en-US"/>
+          </a:p>
+        </p:txBody>
       </p:sp>
       <p:sp>
         <p:nvSpPr>
@@ -16334,6 +17122,13 @@
             <a:prstDash val="solid"/>
           </a:ln>
         </p:spPr>
+        <p:txBody>
+          <a:bodyPr/>
+          <a:lstStyle/>
+          <a:p>
+            <a:endParaRPr lang="en-US"/>
+          </a:p>
+        </p:txBody>
       </p:sp>
       <p:sp>
         <p:nvSpPr>
@@ -16437,6 +17232,13 @@
             <a:prstDash val="solid"/>
           </a:ln>
         </p:spPr>
+        <p:txBody>
+          <a:bodyPr/>
+          <a:lstStyle/>
+          <a:p>
+            <a:endParaRPr lang="en-US"/>
+          </a:p>
+        </p:txBody>
       </p:sp>
       <p:sp>
         <p:nvSpPr>
@@ -16540,6 +17342,13 @@
             <a:prstDash val="solid"/>
           </a:ln>
         </p:spPr>
+        <p:txBody>
+          <a:bodyPr/>
+          <a:lstStyle/>
+          <a:p>
+            <a:endParaRPr lang="en-US"/>
+          </a:p>
+        </p:txBody>
       </p:sp>
       <p:sp>
         <p:nvSpPr>
@@ -16677,6 +17486,13 @@
             <a:prstDash val="solid"/>
           </a:ln>
         </p:spPr>
+        <p:txBody>
+          <a:bodyPr/>
+          <a:lstStyle/>
+          <a:p>
+            <a:endParaRPr lang="en-US"/>
+          </a:p>
+        </p:txBody>
       </p:sp>
       <p:sp>
         <p:nvSpPr>
@@ -16815,6 +17631,13 @@
             <a:prstDash val="solid"/>
           </a:ln>
         </p:spPr>
+        <p:txBody>
+          <a:bodyPr/>
+          <a:lstStyle/>
+          <a:p>
+            <a:endParaRPr lang="en-US"/>
+          </a:p>
+        </p:txBody>
       </p:sp>
       <p:sp>
         <p:nvSpPr>
@@ -16985,6 +17808,13 @@
             <a:prstDash val="solid"/>
           </a:ln>
         </p:spPr>
+        <p:txBody>
+          <a:bodyPr/>
+          <a:lstStyle/>
+          <a:p>
+            <a:endParaRPr lang="en-US"/>
+          </a:p>
+        </p:txBody>
       </p:sp>
       <p:sp>
         <p:nvSpPr>
@@ -17394,6 +18224,13 @@
             <a:prstDash val="solid"/>
           </a:ln>
         </p:spPr>
+        <p:txBody>
+          <a:bodyPr/>
+          <a:lstStyle/>
+          <a:p>
+            <a:endParaRPr lang="en-US"/>
+          </a:p>
+        </p:txBody>
       </p:sp>
       <p:sp>
         <p:nvSpPr>
@@ -17801,6 +18638,13 @@
             <a:prstDash val="solid"/>
           </a:ln>
         </p:spPr>
+        <p:txBody>
+          <a:bodyPr/>
+          <a:lstStyle/>
+          <a:p>
+            <a:endParaRPr lang="en-US"/>
+          </a:p>
+        </p:txBody>
       </p:sp>
       <p:sp>
         <p:nvSpPr>
@@ -17826,6 +18670,13 @@
             <a:prstDash val="solid"/>
           </a:ln>
         </p:spPr>
+        <p:txBody>
+          <a:bodyPr/>
+          <a:lstStyle/>
+          <a:p>
+            <a:endParaRPr lang="en-US"/>
+          </a:p>
+        </p:txBody>
       </p:sp>
       <p:sp>
         <p:nvSpPr>

--- a/downloads/presentations/IED_Unit0_Lesson_0.1_Course_Launch_Engineering_Mindset.pptx
+++ b/downloads/presentations/IED_Unit0_Lesson_0.1_Course_Launch_Engineering_Mindset.pptx
@@ -2044,13 +2044,6 @@
             <a:prstDash val="solid"/>
           </a:ln>
         </p:spPr>
-        <p:txBody>
-          <a:bodyPr/>
-          <a:lstStyle/>
-          <a:p>
-            <a:endParaRPr lang="en-US"/>
-          </a:p>
-        </p:txBody>
       </p:sp>
       <p:pic>
         <p:nvPicPr>
@@ -2106,13 +2099,6 @@
             <a:prstDash val="solid"/>
           </a:ln>
         </p:spPr>
-        <p:txBody>
-          <a:bodyPr/>
-          <a:lstStyle/>
-          <a:p>
-            <a:endParaRPr lang="en-US"/>
-          </a:p>
-        </p:txBody>
       </p:sp>
       <p:sp>
         <p:nvSpPr>
@@ -2239,13 +2225,6 @@
             <a:prstDash val="solid"/>
           </a:ln>
         </p:spPr>
-        <p:txBody>
-          <a:bodyPr/>
-          <a:lstStyle/>
-          <a:p>
-            <a:endParaRPr lang="en-US"/>
-          </a:p>
-        </p:txBody>
       </p:sp>
       <p:sp>
         <p:nvSpPr>
@@ -2353,13 +2332,6 @@
             <a:prstDash val="solid"/>
           </a:ln>
         </p:spPr>
-        <p:txBody>
-          <a:bodyPr/>
-          <a:lstStyle/>
-          <a:p>
-            <a:endParaRPr lang="en-US"/>
-          </a:p>
-        </p:txBody>
       </p:sp>
       <p:sp>
         <p:nvSpPr>
@@ -2459,13 +2431,6 @@
             <a:prstDash val="solid"/>
           </a:ln>
         </p:spPr>
-        <p:txBody>
-          <a:bodyPr/>
-          <a:lstStyle/>
-          <a:p>
-            <a:endParaRPr lang="en-US"/>
-          </a:p>
-        </p:txBody>
       </p:sp>
       <p:sp>
         <p:nvSpPr>
@@ -2565,13 +2530,6 @@
             <a:prstDash val="solid"/>
           </a:ln>
         </p:spPr>
-        <p:txBody>
-          <a:bodyPr/>
-          <a:lstStyle/>
-          <a:p>
-            <a:endParaRPr lang="en-US"/>
-          </a:p>
-        </p:txBody>
       </p:sp>
       <p:sp>
         <p:nvSpPr>
@@ -2743,13 +2701,6 @@
             <a:prstDash val="solid"/>
           </a:ln>
         </p:spPr>
-        <p:txBody>
-          <a:bodyPr/>
-          <a:lstStyle/>
-          <a:p>
-            <a:endParaRPr lang="en-US"/>
-          </a:p>
-        </p:txBody>
       </p:sp>
       <p:sp>
         <p:nvSpPr>
@@ -2920,13 +2871,6 @@
             <a:prstDash val="solid"/>
           </a:ln>
         </p:spPr>
-        <p:txBody>
-          <a:bodyPr/>
-          <a:lstStyle/>
-          <a:p>
-            <a:endParaRPr lang="en-US"/>
-          </a:p>
-        </p:txBody>
       </p:sp>
       <p:sp>
         <p:nvSpPr>
@@ -3028,13 +2972,6 @@
             <a:prstDash val="solid"/>
           </a:ln>
         </p:spPr>
-        <p:txBody>
-          <a:bodyPr/>
-          <a:lstStyle/>
-          <a:p>
-            <a:endParaRPr lang="en-US"/>
-          </a:p>
-        </p:txBody>
       </p:sp>
       <p:sp>
         <p:nvSpPr>
@@ -3064,13 +3001,6 @@
             <a:prstDash val="solid"/>
           </a:ln>
         </p:spPr>
-        <p:txBody>
-          <a:bodyPr/>
-          <a:lstStyle/>
-          <a:p>
-            <a:endParaRPr lang="en-US"/>
-          </a:p>
-        </p:txBody>
       </p:sp>
       <p:sp>
         <p:nvSpPr>
@@ -3172,13 +3102,6 @@
             <a:prstDash val="solid"/>
           </a:ln>
         </p:spPr>
-        <p:txBody>
-          <a:bodyPr/>
-          <a:lstStyle/>
-          <a:p>
-            <a:endParaRPr lang="en-US"/>
-          </a:p>
-        </p:txBody>
       </p:sp>
       <p:sp>
         <p:nvSpPr>
@@ -3208,13 +3131,6 @@
             <a:prstDash val="solid"/>
           </a:ln>
         </p:spPr>
-        <p:txBody>
-          <a:bodyPr/>
-          <a:lstStyle/>
-          <a:p>
-            <a:endParaRPr lang="en-US"/>
-          </a:p>
-        </p:txBody>
       </p:sp>
       <p:sp>
         <p:nvSpPr>
@@ -3354,13 +3270,6 @@
             <a:prstDash val="solid"/>
           </a:ln>
         </p:spPr>
-        <p:txBody>
-          <a:bodyPr/>
-          <a:lstStyle/>
-          <a:p>
-            <a:endParaRPr lang="en-US"/>
-          </a:p>
-        </p:txBody>
       </p:sp>
       <p:sp>
         <p:nvSpPr>
@@ -3426,13 +3335,6 @@
             <a:prstDash val="solid"/>
           </a:ln>
         </p:spPr>
-        <p:txBody>
-          <a:bodyPr/>
-          <a:lstStyle/>
-          <a:p>
-            <a:endParaRPr lang="en-US"/>
-          </a:p>
-        </p:txBody>
       </p:sp>
       <p:sp>
         <p:nvSpPr>
@@ -3498,13 +3400,6 @@
             <a:prstDash val="solid"/>
           </a:ln>
         </p:spPr>
-        <p:txBody>
-          <a:bodyPr/>
-          <a:lstStyle/>
-          <a:p>
-            <a:endParaRPr lang="en-US"/>
-          </a:p>
-        </p:txBody>
       </p:sp>
       <p:sp>
         <p:nvSpPr>
@@ -3570,13 +3465,6 @@
             <a:prstDash val="solid"/>
           </a:ln>
         </p:spPr>
-        <p:txBody>
-          <a:bodyPr/>
-          <a:lstStyle/>
-          <a:p>
-            <a:endParaRPr lang="en-US"/>
-          </a:p>
-        </p:txBody>
       </p:sp>
       <p:sp>
         <p:nvSpPr>
@@ -3642,13 +3530,6 @@
             <a:prstDash val="solid"/>
           </a:ln>
         </p:spPr>
-        <p:txBody>
-          <a:bodyPr/>
-          <a:lstStyle/>
-          <a:p>
-            <a:endParaRPr lang="en-US"/>
-          </a:p>
-        </p:txBody>
       </p:sp>
       <p:sp>
         <p:nvSpPr>
@@ -3714,13 +3595,6 @@
             <a:prstDash val="solid"/>
           </a:ln>
         </p:spPr>
-        <p:txBody>
-          <a:bodyPr/>
-          <a:lstStyle/>
-          <a:p>
-            <a:endParaRPr lang="en-US"/>
-          </a:p>
-        </p:txBody>
       </p:sp>
       <p:sp>
         <p:nvSpPr>
@@ -3782,13 +3656,6 @@
             <a:prstDash val="solid"/>
           </a:ln>
         </p:spPr>
-        <p:txBody>
-          <a:bodyPr/>
-          <a:lstStyle/>
-          <a:p>
-            <a:endParaRPr lang="en-US"/>
-          </a:p>
-        </p:txBody>
       </p:sp>
       <p:sp>
         <p:nvSpPr>
@@ -3927,13 +3794,6 @@
             <a:prstDash val="solid"/>
           </a:ln>
         </p:spPr>
-        <p:txBody>
-          <a:bodyPr/>
-          <a:lstStyle/>
-          <a:p>
-            <a:endParaRPr lang="en-US"/>
-          </a:p>
-        </p:txBody>
       </p:sp>
       <p:sp>
         <p:nvSpPr>
@@ -4104,13 +3964,6 @@
             <a:prstDash val="solid"/>
           </a:ln>
         </p:spPr>
-        <p:txBody>
-          <a:bodyPr/>
-          <a:lstStyle/>
-          <a:p>
-            <a:endParaRPr lang="en-US"/>
-          </a:p>
-        </p:txBody>
       </p:sp>
       <p:sp>
         <p:nvSpPr>
@@ -4250,13 +4103,6 @@
             <a:prstDash val="solid"/>
           </a:ln>
         </p:spPr>
-        <p:txBody>
-          <a:bodyPr/>
-          <a:lstStyle/>
-          <a:p>
-            <a:endParaRPr lang="en-US"/>
-          </a:p>
-        </p:txBody>
       </p:sp>
       <p:sp>
         <p:nvSpPr>
@@ -4360,13 +4206,6 @@
             <a:prstDash val="solid"/>
           </a:ln>
         </p:spPr>
-        <p:txBody>
-          <a:bodyPr/>
-          <a:lstStyle/>
-          <a:p>
-            <a:endParaRPr lang="en-US"/>
-          </a:p>
-        </p:txBody>
       </p:sp>
       <p:sp>
         <p:nvSpPr>
@@ -4470,13 +4309,6 @@
             <a:prstDash val="solid"/>
           </a:ln>
         </p:spPr>
-        <p:txBody>
-          <a:bodyPr/>
-          <a:lstStyle/>
-          <a:p>
-            <a:endParaRPr lang="en-US"/>
-          </a:p>
-        </p:txBody>
       </p:sp>
       <p:sp>
         <p:nvSpPr>
@@ -4580,13 +4412,6 @@
             <a:prstDash val="solid"/>
           </a:ln>
         </p:spPr>
-        <p:txBody>
-          <a:bodyPr/>
-          <a:lstStyle/>
-          <a:p>
-            <a:endParaRPr lang="en-US"/>
-          </a:p>
-        </p:txBody>
       </p:sp>
       <p:sp>
         <p:nvSpPr>
@@ -4690,13 +4515,6 @@
             <a:prstDash val="solid"/>
           </a:ln>
         </p:spPr>
-        <p:txBody>
-          <a:bodyPr/>
-          <a:lstStyle/>
-          <a:p>
-            <a:endParaRPr lang="en-US"/>
-          </a:p>
-        </p:txBody>
       </p:sp>
       <p:sp>
         <p:nvSpPr>
@@ -4800,13 +4618,6 @@
             <a:prstDash val="solid"/>
           </a:ln>
         </p:spPr>
-        <p:txBody>
-          <a:bodyPr/>
-          <a:lstStyle/>
-          <a:p>
-            <a:endParaRPr lang="en-US"/>
-          </a:p>
-        </p:txBody>
       </p:sp>
       <p:sp>
         <p:nvSpPr>
@@ -4870,13 +4681,6 @@
             <a:prstDash val="solid"/>
           </a:ln>
         </p:spPr>
-        <p:txBody>
-          <a:bodyPr/>
-          <a:lstStyle/>
-          <a:p>
-            <a:endParaRPr lang="en-US"/>
-          </a:p>
-        </p:txBody>
       </p:sp>
       <p:sp>
         <p:nvSpPr>
@@ -5015,13 +4819,6 @@
             <a:prstDash val="solid"/>
           </a:ln>
         </p:spPr>
-        <p:txBody>
-          <a:bodyPr/>
-          <a:lstStyle/>
-          <a:p>
-            <a:endParaRPr lang="en-US"/>
-          </a:p>
-        </p:txBody>
       </p:sp>
       <p:sp>
         <p:nvSpPr>
@@ -5228,13 +5025,6 @@
             <a:prstDash val="solid"/>
           </a:ln>
         </p:spPr>
-        <p:txBody>
-          <a:bodyPr/>
-          <a:lstStyle/>
-          <a:p>
-            <a:endParaRPr lang="en-US"/>
-          </a:p>
-        </p:txBody>
       </p:sp>
       <p:sp>
         <p:nvSpPr>
@@ -5376,13 +5166,6 @@
             <a:prstDash val="solid"/>
           </a:ln>
         </p:spPr>
-        <p:txBody>
-          <a:bodyPr/>
-          <a:lstStyle/>
-          <a:p>
-            <a:endParaRPr lang="en-US"/>
-          </a:p>
-        </p:txBody>
       </p:sp>
       <p:sp>
         <p:nvSpPr>
@@ -5558,13 +5341,6 @@
             <a:prstDash val="solid"/>
           </a:ln>
         </p:spPr>
-        <p:txBody>
-          <a:bodyPr/>
-          <a:lstStyle/>
-          <a:p>
-            <a:endParaRPr lang="en-US"/>
-          </a:p>
-        </p:txBody>
       </p:sp>
       <p:sp>
         <p:nvSpPr>
@@ -5703,13 +5479,6 @@
             <a:prstDash val="solid"/>
           </a:ln>
         </p:spPr>
-        <p:txBody>
-          <a:bodyPr/>
-          <a:lstStyle/>
-          <a:p>
-            <a:endParaRPr lang="en-US"/>
-          </a:p>
-        </p:txBody>
       </p:sp>
       <p:sp>
         <p:nvSpPr>
@@ -5918,13 +5687,6 @@
             <a:prstDash val="solid"/>
           </a:ln>
         </p:spPr>
-        <p:txBody>
-          <a:bodyPr/>
-          <a:lstStyle/>
-          <a:p>
-            <a:endParaRPr lang="en-US"/>
-          </a:p>
-        </p:txBody>
       </p:sp>
       <p:sp>
         <p:nvSpPr>
@@ -6028,13 +5790,6 @@
             <a:prstDash val="solid"/>
           </a:ln>
         </p:spPr>
-        <p:txBody>
-          <a:bodyPr/>
-          <a:lstStyle/>
-          <a:p>
-            <a:endParaRPr lang="en-US"/>
-          </a:p>
-        </p:txBody>
       </p:sp>
       <p:sp>
         <p:nvSpPr>
@@ -6138,13 +5893,6 @@
             <a:prstDash val="solid"/>
           </a:ln>
         </p:spPr>
-        <p:txBody>
-          <a:bodyPr/>
-          <a:lstStyle/>
-          <a:p>
-            <a:endParaRPr lang="en-US"/>
-          </a:p>
-        </p:txBody>
       </p:sp>
       <p:sp>
         <p:nvSpPr>
@@ -6248,13 +5996,6 @@
             <a:prstDash val="solid"/>
           </a:ln>
         </p:spPr>
-        <p:txBody>
-          <a:bodyPr/>
-          <a:lstStyle/>
-          <a:p>
-            <a:endParaRPr lang="en-US"/>
-          </a:p>
-        </p:txBody>
       </p:sp>
       <p:sp>
         <p:nvSpPr>
@@ -6358,13 +6099,6 @@
             <a:prstDash val="solid"/>
           </a:ln>
         </p:spPr>
-        <p:txBody>
-          <a:bodyPr/>
-          <a:lstStyle/>
-          <a:p>
-            <a:endParaRPr lang="en-US"/>
-          </a:p>
-        </p:txBody>
       </p:sp>
       <p:sp>
         <p:nvSpPr>
@@ -6428,13 +6162,6 @@
             <a:prstDash val="solid"/>
           </a:ln>
         </p:spPr>
-        <p:txBody>
-          <a:bodyPr/>
-          <a:lstStyle/>
-          <a:p>
-            <a:endParaRPr lang="en-US"/>
-          </a:p>
-        </p:txBody>
       </p:sp>
       <p:sp>
         <p:nvSpPr>
@@ -6573,13 +6300,6 @@
             <a:prstDash val="solid"/>
           </a:ln>
         </p:spPr>
-        <p:txBody>
-          <a:bodyPr/>
-          <a:lstStyle/>
-          <a:p>
-            <a:endParaRPr lang="en-US"/>
-          </a:p>
-        </p:txBody>
       </p:sp>
       <p:sp>
         <p:nvSpPr>
@@ -6786,13 +6506,6 @@
             <a:prstDash val="solid"/>
           </a:ln>
         </p:spPr>
-        <p:txBody>
-          <a:bodyPr/>
-          <a:lstStyle/>
-          <a:p>
-            <a:endParaRPr lang="en-US"/>
-          </a:p>
-        </p:txBody>
       </p:sp>
       <p:sp>
         <p:nvSpPr>
@@ -6860,13 +6573,6 @@
             <a:prstDash val="solid"/>
           </a:ln>
         </p:spPr>
-        <p:txBody>
-          <a:bodyPr/>
-          <a:lstStyle/>
-          <a:p>
-            <a:endParaRPr lang="en-US"/>
-          </a:p>
-        </p:txBody>
       </p:sp>
       <p:sp>
         <p:nvSpPr>
@@ -6972,13 +6678,6 @@
             <a:prstDash val="solid"/>
           </a:ln>
         </p:spPr>
-        <p:txBody>
-          <a:bodyPr/>
-          <a:lstStyle/>
-          <a:p>
-            <a:endParaRPr lang="en-US"/>
-          </a:p>
-        </p:txBody>
       </p:sp>
       <p:sp>
         <p:nvSpPr>
@@ -7084,13 +6783,6 @@
             <a:prstDash val="solid"/>
           </a:ln>
         </p:spPr>
-        <p:txBody>
-          <a:bodyPr/>
-          <a:lstStyle/>
-          <a:p>
-            <a:endParaRPr lang="en-US"/>
-          </a:p>
-        </p:txBody>
       </p:sp>
       <p:sp>
         <p:nvSpPr>
@@ -7230,13 +6922,6 @@
             <a:prstDash val="solid"/>
           </a:ln>
         </p:spPr>
-        <p:txBody>
-          <a:bodyPr/>
-          <a:lstStyle/>
-          <a:p>
-            <a:endParaRPr lang="en-US"/>
-          </a:p>
-        </p:txBody>
       </p:sp>
       <p:sp>
         <p:nvSpPr>
@@ -7375,13 +7060,6 @@
             <a:prstDash val="solid"/>
           </a:ln>
         </p:spPr>
-        <p:txBody>
-          <a:bodyPr/>
-          <a:lstStyle/>
-          <a:p>
-            <a:endParaRPr lang="en-US"/>
-          </a:p>
-        </p:txBody>
       </p:sp>
       <p:sp>
         <p:nvSpPr>
@@ -7552,13 +7230,6 @@
             <a:prstDash val="solid"/>
           </a:ln>
         </p:spPr>
-        <p:txBody>
-          <a:bodyPr/>
-          <a:lstStyle/>
-          <a:p>
-            <a:endParaRPr lang="en-US"/>
-          </a:p>
-        </p:txBody>
       </p:sp>
       <p:sp>
         <p:nvSpPr>
@@ -7586,13 +7257,6 @@
             <a:prstDash val="solid"/>
           </a:ln>
         </p:spPr>
-        <p:txBody>
-          <a:bodyPr/>
-          <a:lstStyle/>
-          <a:p>
-            <a:endParaRPr lang="en-US"/>
-          </a:p>
-        </p:txBody>
       </p:sp>
       <p:sp>
         <p:nvSpPr>
@@ -7732,13 +7396,6 @@
             <a:prstDash val="solid"/>
           </a:ln>
         </p:spPr>
-        <p:txBody>
-          <a:bodyPr/>
-          <a:lstStyle/>
-          <a:p>
-            <a:endParaRPr lang="en-US"/>
-          </a:p>
-        </p:txBody>
       </p:sp>
       <p:sp>
         <p:nvSpPr>
@@ -7766,13 +7423,6 @@
             <a:prstDash val="solid"/>
           </a:ln>
         </p:spPr>
-        <p:txBody>
-          <a:bodyPr/>
-          <a:lstStyle/>
-          <a:p>
-            <a:endParaRPr lang="en-US"/>
-          </a:p>
-        </p:txBody>
       </p:sp>
       <p:sp>
         <p:nvSpPr>
@@ -7912,13 +7562,6 @@
             <a:prstDash val="solid"/>
           </a:ln>
         </p:spPr>
-        <p:txBody>
-          <a:bodyPr/>
-          <a:lstStyle/>
-          <a:p>
-            <a:endParaRPr lang="en-US"/>
-          </a:p>
-        </p:txBody>
       </p:sp>
       <p:sp>
         <p:nvSpPr>
@@ -7946,13 +7589,6 @@
             <a:prstDash val="solid"/>
           </a:ln>
         </p:spPr>
-        <p:txBody>
-          <a:bodyPr/>
-          <a:lstStyle/>
-          <a:p>
-            <a:endParaRPr lang="en-US"/>
-          </a:p>
-        </p:txBody>
       </p:sp>
       <p:sp>
         <p:nvSpPr>
@@ -8092,13 +7728,6 @@
             <a:prstDash val="solid"/>
           </a:ln>
         </p:spPr>
-        <p:txBody>
-          <a:bodyPr/>
-          <a:lstStyle/>
-          <a:p>
-            <a:endParaRPr lang="en-US"/>
-          </a:p>
-        </p:txBody>
       </p:sp>
       <p:sp>
         <p:nvSpPr>
@@ -8162,13 +7791,6 @@
             <a:prstDash val="solid"/>
           </a:ln>
         </p:spPr>
-        <p:txBody>
-          <a:bodyPr/>
-          <a:lstStyle/>
-          <a:p>
-            <a:endParaRPr lang="en-US"/>
-          </a:p>
-        </p:txBody>
       </p:sp>
       <p:sp>
         <p:nvSpPr>
@@ -8307,13 +7929,6 @@
             <a:prstDash val="solid"/>
           </a:ln>
         </p:spPr>
-        <p:txBody>
-          <a:bodyPr/>
-          <a:lstStyle/>
-          <a:p>
-            <a:endParaRPr lang="en-US"/>
-          </a:p>
-        </p:txBody>
       </p:sp>
       <p:sp>
         <p:nvSpPr>
@@ -8484,13 +8099,6 @@
             <a:prstDash val="solid"/>
           </a:ln>
         </p:spPr>
-        <p:txBody>
-          <a:bodyPr/>
-          <a:lstStyle/>
-          <a:p>
-            <a:endParaRPr lang="en-US"/>
-          </a:p>
-        </p:txBody>
       </p:sp>
       <p:sp>
         <p:nvSpPr>
@@ -8518,13 +8126,6 @@
             <a:prstDash val="solid"/>
           </a:ln>
         </p:spPr>
-        <p:txBody>
-          <a:bodyPr/>
-          <a:lstStyle/>
-          <a:p>
-            <a:endParaRPr lang="en-US"/>
-          </a:p>
-        </p:txBody>
       </p:sp>
       <p:sp>
         <p:nvSpPr>
@@ -8666,13 +8267,6 @@
             <a:prstDash val="solid"/>
           </a:ln>
         </p:spPr>
-        <p:txBody>
-          <a:bodyPr/>
-          <a:lstStyle/>
-          <a:p>
-            <a:endParaRPr lang="en-US"/>
-          </a:p>
-        </p:txBody>
       </p:sp>
       <p:sp>
         <p:nvSpPr>
@@ -8700,13 +8294,6 @@
             <a:prstDash val="solid"/>
           </a:ln>
         </p:spPr>
-        <p:txBody>
-          <a:bodyPr/>
-          <a:lstStyle/>
-          <a:p>
-            <a:endParaRPr lang="en-US"/>
-          </a:p>
-        </p:txBody>
       </p:sp>
       <p:sp>
         <p:nvSpPr>
@@ -8848,13 +8435,6 @@
             <a:prstDash val="solid"/>
           </a:ln>
         </p:spPr>
-        <p:txBody>
-          <a:bodyPr/>
-          <a:lstStyle/>
-          <a:p>
-            <a:endParaRPr lang="en-US"/>
-          </a:p>
-        </p:txBody>
       </p:sp>
       <p:sp>
         <p:nvSpPr>
@@ -8882,13 +8462,6 @@
             <a:prstDash val="solid"/>
           </a:ln>
         </p:spPr>
-        <p:txBody>
-          <a:bodyPr/>
-          <a:lstStyle/>
-          <a:p>
-            <a:endParaRPr lang="en-US"/>
-          </a:p>
-        </p:txBody>
       </p:sp>
       <p:sp>
         <p:nvSpPr>
@@ -9064,13 +8637,6 @@
             <a:prstDash val="solid"/>
           </a:ln>
         </p:spPr>
-        <p:txBody>
-          <a:bodyPr/>
-          <a:lstStyle/>
-          <a:p>
-            <a:endParaRPr lang="en-US"/>
-          </a:p>
-        </p:txBody>
       </p:sp>
       <p:sp>
         <p:nvSpPr>
@@ -9209,13 +8775,6 @@
             <a:prstDash val="solid"/>
           </a:ln>
         </p:spPr>
-        <p:txBody>
-          <a:bodyPr/>
-          <a:lstStyle/>
-          <a:p>
-            <a:endParaRPr lang="en-US"/>
-          </a:p>
-        </p:txBody>
       </p:sp>
       <p:sp>
         <p:nvSpPr>
@@ -9386,13 +8945,6 @@
             <a:prstDash val="solid"/>
           </a:ln>
         </p:spPr>
-        <p:txBody>
-          <a:bodyPr/>
-          <a:lstStyle/>
-          <a:p>
-            <a:endParaRPr lang="en-US"/>
-          </a:p>
-        </p:txBody>
       </p:sp>
       <p:sp>
         <p:nvSpPr>
@@ -9456,13 +9008,6 @@
             <a:prstDash val="solid"/>
           </a:ln>
         </p:spPr>
-        <p:txBody>
-          <a:bodyPr/>
-          <a:lstStyle/>
-          <a:p>
-            <a:endParaRPr lang="en-US"/>
-          </a:p>
-        </p:txBody>
       </p:sp>
       <p:sp>
         <p:nvSpPr>
@@ -9564,13 +9109,6 @@
             <a:prstDash val="solid"/>
           </a:ln>
         </p:spPr>
-        <p:txBody>
-          <a:bodyPr/>
-          <a:lstStyle/>
-          <a:p>
-            <a:endParaRPr lang="en-US"/>
-          </a:p>
-        </p:txBody>
       </p:sp>
       <p:sp>
         <p:nvSpPr>
@@ -9672,13 +9210,6 @@
             <a:prstDash val="solid"/>
           </a:ln>
         </p:spPr>
-        <p:txBody>
-          <a:bodyPr/>
-          <a:lstStyle/>
-          <a:p>
-            <a:endParaRPr lang="en-US"/>
-          </a:p>
-        </p:txBody>
       </p:sp>
       <p:sp>
         <p:nvSpPr>
@@ -9782,13 +9313,6 @@
             <a:prstDash val="solid"/>
           </a:ln>
         </p:spPr>
-        <p:txBody>
-          <a:bodyPr/>
-          <a:lstStyle/>
-          <a:p>
-            <a:endParaRPr lang="en-US"/>
-          </a:p>
-        </p:txBody>
       </p:sp>
       <p:sp>
         <p:nvSpPr>
@@ -9850,13 +9374,6 @@
             <a:prstDash val="solid"/>
           </a:ln>
         </p:spPr>
-        <p:txBody>
-          <a:bodyPr/>
-          <a:lstStyle/>
-          <a:p>
-            <a:endParaRPr lang="en-US"/>
-          </a:p>
-        </p:txBody>
       </p:sp>
       <p:sp>
         <p:nvSpPr>
@@ -9995,13 +9512,6 @@
             <a:prstDash val="solid"/>
           </a:ln>
         </p:spPr>
-        <p:txBody>
-          <a:bodyPr/>
-          <a:lstStyle/>
-          <a:p>
-            <a:endParaRPr lang="en-US"/>
-          </a:p>
-        </p:txBody>
       </p:sp>
       <p:sp>
         <p:nvSpPr>
@@ -10172,13 +9682,6 @@
             <a:prstDash val="solid"/>
           </a:ln>
         </p:spPr>
-        <p:txBody>
-          <a:bodyPr/>
-          <a:lstStyle/>
-          <a:p>
-            <a:endParaRPr lang="en-US"/>
-          </a:p>
-        </p:txBody>
       </p:sp>
       <p:sp>
         <p:nvSpPr>
@@ -10471,13 +9974,6 @@
             <a:prstDash val="solid"/>
           </a:ln>
         </p:spPr>
-        <p:txBody>
-          <a:bodyPr/>
-          <a:lstStyle/>
-          <a:p>
-            <a:endParaRPr lang="en-US"/>
-          </a:p>
-        </p:txBody>
       </p:sp>
       <p:sp>
         <p:nvSpPr>
@@ -10581,13 +10077,6 @@
             <a:prstDash val="solid"/>
           </a:ln>
         </p:spPr>
-        <p:txBody>
-          <a:bodyPr/>
-          <a:lstStyle/>
-          <a:p>
-            <a:endParaRPr lang="en-US"/>
-          </a:p>
-        </p:txBody>
       </p:sp>
       <p:sp>
         <p:nvSpPr>
@@ -10653,13 +10142,6 @@
             <a:prstDash val="solid"/>
           </a:ln>
         </p:spPr>
-        <p:txBody>
-          <a:bodyPr/>
-          <a:lstStyle/>
-          <a:p>
-            <a:endParaRPr lang="en-US"/>
-          </a:p>
-        </p:txBody>
       </p:sp>
       <p:sp>
         <p:nvSpPr>
@@ -10763,13 +10245,6 @@
             <a:prstDash val="solid"/>
           </a:ln>
         </p:spPr>
-        <p:txBody>
-          <a:bodyPr/>
-          <a:lstStyle/>
-          <a:p>
-            <a:endParaRPr lang="en-US"/>
-          </a:p>
-        </p:txBody>
       </p:sp>
       <p:sp>
         <p:nvSpPr>
@@ -10873,13 +10348,6 @@
             <a:prstDash val="solid"/>
           </a:ln>
         </p:spPr>
-        <p:txBody>
-          <a:bodyPr/>
-          <a:lstStyle/>
-          <a:p>
-            <a:endParaRPr lang="en-US"/>
-          </a:p>
-        </p:txBody>
       </p:sp>
       <p:sp>
         <p:nvSpPr>
@@ -10983,13 +10451,6 @@
             <a:prstDash val="solid"/>
           </a:ln>
         </p:spPr>
-        <p:txBody>
-          <a:bodyPr/>
-          <a:lstStyle/>
-          <a:p>
-            <a:endParaRPr lang="en-US"/>
-          </a:p>
-        </p:txBody>
       </p:sp>
       <p:sp>
         <p:nvSpPr>
@@ -11093,13 +10554,6 @@
             <a:prstDash val="solid"/>
           </a:ln>
         </p:spPr>
-        <p:txBody>
-          <a:bodyPr/>
-          <a:lstStyle/>
-          <a:p>
-            <a:endParaRPr lang="en-US"/>
-          </a:p>
-        </p:txBody>
       </p:sp>
       <p:sp>
         <p:nvSpPr>
@@ -11203,13 +10657,6 @@
             <a:prstDash val="solid"/>
           </a:ln>
         </p:spPr>
-        <p:txBody>
-          <a:bodyPr/>
-          <a:lstStyle/>
-          <a:p>
-            <a:endParaRPr lang="en-US"/>
-          </a:p>
-        </p:txBody>
       </p:sp>
       <p:sp>
         <p:nvSpPr>
@@ -11313,13 +10760,6 @@
             <a:prstDash val="solid"/>
           </a:ln>
         </p:spPr>
-        <p:txBody>
-          <a:bodyPr/>
-          <a:lstStyle/>
-          <a:p>
-            <a:endParaRPr lang="en-US"/>
-          </a:p>
-        </p:txBody>
       </p:sp>
       <p:sp>
         <p:nvSpPr>
@@ -11419,13 +10859,6 @@
             <a:prstDash val="solid"/>
           </a:ln>
         </p:spPr>
-        <p:txBody>
-          <a:bodyPr/>
-          <a:lstStyle/>
-          <a:p>
-            <a:endParaRPr lang="en-US"/>
-          </a:p>
-        </p:txBody>
       </p:sp>
       <p:sp>
         <p:nvSpPr>
@@ -11564,13 +10997,6 @@
             <a:prstDash val="solid"/>
           </a:ln>
         </p:spPr>
-        <p:txBody>
-          <a:bodyPr/>
-          <a:lstStyle/>
-          <a:p>
-            <a:endParaRPr lang="en-US"/>
-          </a:p>
-        </p:txBody>
       </p:sp>
       <p:sp>
         <p:nvSpPr>
@@ -11779,13 +11205,6 @@
             <a:prstDash val="solid"/>
           </a:ln>
         </p:spPr>
-        <p:txBody>
-          <a:bodyPr/>
-          <a:lstStyle/>
-          <a:p>
-            <a:endParaRPr lang="en-US"/>
-          </a:p>
-        </p:txBody>
       </p:sp>
       <p:sp>
         <p:nvSpPr>
@@ -11889,11 +11308,42 @@
             <a:prstDash val="solid"/>
           </a:ln>
         </p:spPr>
-        <p:txBody>
-          <a:bodyPr/>
-          <a:lstStyle/>
-          <a:p>
-            <a:endParaRPr lang="en-US"/>
+      </p:sp>
+      <p:sp>
+        <p:nvSpPr>
+          <p:cNvPr id="12" name="Text 9"/>
+          <p:cNvSpPr/>
+          <p:nvPr/>
+        </p:nvSpPr>
+        <p:spPr>
+          <a:xfrm>
+            <a:off x="1600200" y="3776472"/>
+            <a:ext cx="8503920" cy="109728"/>
+          </a:xfrm>
+          <a:prstGeom prst="rect">
+            <a:avLst/>
+          </a:prstGeom>
+          <a:noFill/>
+          <a:ln/>
+        </p:spPr>
+        <p:txBody>
+          <a:bodyPr wrap="square" lIns="0" tIns="0" rIns="0" bIns="0" rtlCol="0" anchor="ctr">
+            <a:normAutofit/>
+          </a:bodyPr>
+          <a:lstStyle/>
+          <a:p>
+            <a:pPr marL="0" indent="0" algn="ctr">
+              <a:buNone/>
+            </a:pPr>
+            <a:r>
+              <a:rPr lang="en-US" sz="1080" b="1" dirty="0">
+                <a:solidFill>
+                  <a:srgbClr val="FFC857"/>
+                </a:solidFill>
+              </a:rPr>
+              <a:t>Examples from students might sound like: design, build, test, fix, invent, solve, measure, or improve.</a:t>
+            </a:r>
+            <a:endParaRPr lang="en-US" sz="1080" dirty="0"/>
           </a:p>
         </p:txBody>
       </p:sp>
@@ -11959,13 +11409,6 @@
             <a:prstDash val="solid"/>
           </a:ln>
         </p:spPr>
-        <p:txBody>
-          <a:bodyPr/>
-          <a:lstStyle/>
-          <a:p>
-            <a:endParaRPr lang="en-US"/>
-          </a:p>
-        </p:txBody>
       </p:sp>
       <p:sp>
         <p:nvSpPr>
@@ -12104,13 +11547,6 @@
             <a:prstDash val="solid"/>
           </a:ln>
         </p:spPr>
-        <p:txBody>
-          <a:bodyPr/>
-          <a:lstStyle/>
-          <a:p>
-            <a:endParaRPr lang="en-US"/>
-          </a:p>
-        </p:txBody>
       </p:sp>
       <p:sp>
         <p:nvSpPr>
@@ -12319,13 +11755,6 @@
             <a:prstDash val="solid"/>
           </a:ln>
         </p:spPr>
-        <p:txBody>
-          <a:bodyPr/>
-          <a:lstStyle/>
-          <a:p>
-            <a:endParaRPr lang="en-US"/>
-          </a:p>
-        </p:txBody>
       </p:sp>
       <p:sp>
         <p:nvSpPr>
@@ -12431,13 +11860,6 @@
             <a:prstDash val="solid"/>
           </a:ln>
         </p:spPr>
-        <p:txBody>
-          <a:bodyPr/>
-          <a:lstStyle/>
-          <a:p>
-            <a:endParaRPr lang="en-US"/>
-          </a:p>
-        </p:txBody>
       </p:sp>
       <p:sp>
         <p:nvSpPr>
@@ -12543,13 +11965,6 @@
             <a:prstDash val="solid"/>
           </a:ln>
         </p:spPr>
-        <p:txBody>
-          <a:bodyPr/>
-          <a:lstStyle/>
-          <a:p>
-            <a:endParaRPr lang="en-US"/>
-          </a:p>
-        </p:txBody>
       </p:sp>
       <p:sp>
         <p:nvSpPr>
@@ -12655,13 +12070,6 @@
             <a:prstDash val="solid"/>
           </a:ln>
         </p:spPr>
-        <p:txBody>
-          <a:bodyPr/>
-          <a:lstStyle/>
-          <a:p>
-            <a:endParaRPr lang="en-US"/>
-          </a:p>
-        </p:txBody>
       </p:sp>
       <p:sp>
         <p:nvSpPr>
@@ -12801,13 +12209,6 @@
             <a:prstDash val="solid"/>
           </a:ln>
         </p:spPr>
-        <p:txBody>
-          <a:bodyPr/>
-          <a:lstStyle/>
-          <a:p>
-            <a:endParaRPr lang="en-US"/>
-          </a:p>
-        </p:txBody>
       </p:sp>
       <p:sp>
         <p:nvSpPr>
@@ -12946,13 +12347,6 @@
             <a:prstDash val="solid"/>
           </a:ln>
         </p:spPr>
-        <p:txBody>
-          <a:bodyPr/>
-          <a:lstStyle/>
-          <a:p>
-            <a:endParaRPr lang="en-US"/>
-          </a:p>
-        </p:txBody>
       </p:sp>
       <p:sp>
         <p:nvSpPr>
@@ -13159,13 +12553,6 @@
             <a:prstDash val="solid"/>
           </a:ln>
         </p:spPr>
-        <p:txBody>
-          <a:bodyPr/>
-          <a:lstStyle/>
-          <a:p>
-            <a:endParaRPr lang="en-US"/>
-          </a:p>
-        </p:txBody>
       </p:sp>
       <p:sp>
         <p:nvSpPr>
@@ -13193,13 +12580,6 @@
             <a:prstDash val="solid"/>
           </a:ln>
         </p:spPr>
-        <p:txBody>
-          <a:bodyPr/>
-          <a:lstStyle/>
-          <a:p>
-            <a:endParaRPr lang="en-US"/>
-          </a:p>
-        </p:txBody>
       </p:sp>
       <p:sp>
         <p:nvSpPr>
@@ -13339,13 +12719,6 @@
             <a:prstDash val="solid"/>
           </a:ln>
         </p:spPr>
-        <p:txBody>
-          <a:bodyPr/>
-          <a:lstStyle/>
-          <a:p>
-            <a:endParaRPr lang="en-US"/>
-          </a:p>
-        </p:txBody>
       </p:sp>
       <p:sp>
         <p:nvSpPr>
@@ -13373,13 +12746,6 @@
             <a:prstDash val="solid"/>
           </a:ln>
         </p:spPr>
-        <p:txBody>
-          <a:bodyPr/>
-          <a:lstStyle/>
-          <a:p>
-            <a:endParaRPr lang="en-US"/>
-          </a:p>
-        </p:txBody>
       </p:sp>
       <p:sp>
         <p:nvSpPr>
@@ -13519,13 +12885,6 @@
             <a:prstDash val="solid"/>
           </a:ln>
         </p:spPr>
-        <p:txBody>
-          <a:bodyPr/>
-          <a:lstStyle/>
-          <a:p>
-            <a:endParaRPr lang="en-US"/>
-          </a:p>
-        </p:txBody>
       </p:sp>
       <p:sp>
         <p:nvSpPr>
@@ -13553,13 +12912,6 @@
             <a:prstDash val="solid"/>
           </a:ln>
         </p:spPr>
-        <p:txBody>
-          <a:bodyPr/>
-          <a:lstStyle/>
-          <a:p>
-            <a:endParaRPr lang="en-US"/>
-          </a:p>
-        </p:txBody>
       </p:sp>
       <p:sp>
         <p:nvSpPr>
@@ -13699,13 +13051,6 @@
             <a:prstDash val="solid"/>
           </a:ln>
         </p:spPr>
-        <p:txBody>
-          <a:bodyPr/>
-          <a:lstStyle/>
-          <a:p>
-            <a:endParaRPr lang="en-US"/>
-          </a:p>
-        </p:txBody>
       </p:sp>
       <p:sp>
         <p:nvSpPr>
@@ -13733,13 +13078,6 @@
             <a:prstDash val="solid"/>
           </a:ln>
         </p:spPr>
-        <p:txBody>
-          <a:bodyPr/>
-          <a:lstStyle/>
-          <a:p>
-            <a:endParaRPr lang="en-US"/>
-          </a:p>
-        </p:txBody>
       </p:sp>
       <p:sp>
         <p:nvSpPr>
@@ -13879,13 +13217,6 @@
             <a:prstDash val="solid"/>
           </a:ln>
         </p:spPr>
-        <p:txBody>
-          <a:bodyPr/>
-          <a:lstStyle/>
-          <a:p>
-            <a:endParaRPr lang="en-US"/>
-          </a:p>
-        </p:txBody>
       </p:sp>
       <p:sp>
         <p:nvSpPr>
@@ -13949,13 +13280,6 @@
             <a:prstDash val="solid"/>
           </a:ln>
         </p:spPr>
-        <p:txBody>
-          <a:bodyPr/>
-          <a:lstStyle/>
-          <a:p>
-            <a:endParaRPr lang="en-US"/>
-          </a:p>
-        </p:txBody>
       </p:sp>
       <p:sp>
         <p:nvSpPr>
@@ -14094,13 +13418,6 @@
             <a:prstDash val="solid"/>
           </a:ln>
         </p:spPr>
-        <p:txBody>
-          <a:bodyPr/>
-          <a:lstStyle/>
-          <a:p>
-            <a:endParaRPr lang="en-US"/>
-          </a:p>
-        </p:txBody>
       </p:sp>
       <p:sp>
         <p:nvSpPr>
@@ -14307,13 +13624,6 @@
             <a:prstDash val="solid"/>
           </a:ln>
         </p:spPr>
-        <p:txBody>
-          <a:bodyPr/>
-          <a:lstStyle/>
-          <a:p>
-            <a:endParaRPr lang="en-US"/>
-          </a:p>
-        </p:txBody>
       </p:sp>
       <p:sp>
         <p:nvSpPr>
@@ -14381,13 +13691,6 @@
             <a:prstDash val="solid"/>
           </a:ln>
         </p:spPr>
-        <p:txBody>
-          <a:bodyPr/>
-          <a:lstStyle/>
-          <a:p>
-            <a:endParaRPr lang="en-US"/>
-          </a:p>
-        </p:txBody>
       </p:sp>
       <p:sp>
         <p:nvSpPr>
@@ -14493,13 +13796,6 @@
             <a:prstDash val="solid"/>
           </a:ln>
         </p:spPr>
-        <p:txBody>
-          <a:bodyPr/>
-          <a:lstStyle/>
-          <a:p>
-            <a:endParaRPr lang="en-US"/>
-          </a:p>
-        </p:txBody>
       </p:sp>
       <p:sp>
         <p:nvSpPr>
@@ -14605,13 +13901,6 @@
             <a:prstDash val="solid"/>
           </a:ln>
         </p:spPr>
-        <p:txBody>
-          <a:bodyPr/>
-          <a:lstStyle/>
-          <a:p>
-            <a:endParaRPr lang="en-US"/>
-          </a:p>
-        </p:txBody>
       </p:sp>
       <p:sp>
         <p:nvSpPr>
@@ -14713,13 +14002,6 @@
             <a:prstDash val="solid"/>
           </a:ln>
         </p:spPr>
-        <p:txBody>
-          <a:bodyPr/>
-          <a:lstStyle/>
-          <a:p>
-            <a:endParaRPr lang="en-US"/>
-          </a:p>
-        </p:txBody>
       </p:sp>
       <p:sp>
         <p:nvSpPr>
@@ -14858,13 +14140,6 @@
             <a:prstDash val="solid"/>
           </a:ln>
         </p:spPr>
-        <p:txBody>
-          <a:bodyPr/>
-          <a:lstStyle/>
-          <a:p>
-            <a:endParaRPr lang="en-US"/>
-          </a:p>
-        </p:txBody>
       </p:sp>
       <p:sp>
         <p:nvSpPr>
@@ -15035,13 +14310,6 @@
             <a:prstDash val="solid"/>
           </a:ln>
         </p:spPr>
-        <p:txBody>
-          <a:bodyPr/>
-          <a:lstStyle/>
-          <a:p>
-            <a:endParaRPr lang="en-US"/>
-          </a:p>
-        </p:txBody>
       </p:sp>
       <p:sp>
         <p:nvSpPr>
@@ -15492,13 +14760,6 @@
             <a:prstDash val="solid"/>
           </a:ln>
         </p:spPr>
-        <p:txBody>
-          <a:bodyPr/>
-          <a:lstStyle/>
-          <a:p>
-            <a:endParaRPr lang="en-US"/>
-          </a:p>
-        </p:txBody>
       </p:sp>
       <p:sp>
         <p:nvSpPr>
@@ -15945,13 +15206,6 @@
             <a:prstDash val="solid"/>
           </a:ln>
         </p:spPr>
-        <p:txBody>
-          <a:bodyPr/>
-          <a:lstStyle/>
-          <a:p>
-            <a:endParaRPr lang="en-US"/>
-          </a:p>
-        </p:txBody>
       </p:sp>
       <p:sp>
         <p:nvSpPr>
@@ -15977,13 +15231,6 @@
             <a:prstDash val="solid"/>
           </a:ln>
         </p:spPr>
-        <p:txBody>
-          <a:bodyPr/>
-          <a:lstStyle/>
-          <a:p>
-            <a:endParaRPr lang="en-US"/>
-          </a:p>
-        </p:txBody>
       </p:sp>
       <p:sp>
         <p:nvSpPr>
@@ -16122,13 +15369,6 @@
             <a:prstDash val="solid"/>
           </a:ln>
         </p:spPr>
-        <p:txBody>
-          <a:bodyPr/>
-          <a:lstStyle/>
-          <a:p>
-            <a:endParaRPr lang="en-US"/>
-          </a:p>
-        </p:txBody>
       </p:sp>
       <p:sp>
         <p:nvSpPr>
@@ -16299,13 +15539,6 @@
             <a:prstDash val="solid"/>
           </a:ln>
         </p:spPr>
-        <p:txBody>
-          <a:bodyPr/>
-          <a:lstStyle/>
-          <a:p>
-            <a:endParaRPr lang="en-US"/>
-          </a:p>
-        </p:txBody>
       </p:sp>
       <p:sp>
         <p:nvSpPr>
@@ -16830,13 +16063,6 @@
             <a:prstDash val="solid"/>
           </a:ln>
         </p:spPr>
-        <p:txBody>
-          <a:bodyPr/>
-          <a:lstStyle/>
-          <a:p>
-            <a:endParaRPr lang="en-US"/>
-          </a:p>
-        </p:txBody>
       </p:sp>
       <p:sp>
         <p:nvSpPr>
@@ -16902,13 +16128,6 @@
             <a:prstDash val="solid"/>
           </a:ln>
         </p:spPr>
-        <p:txBody>
-          <a:bodyPr/>
-          <a:lstStyle/>
-          <a:p>
-            <a:endParaRPr lang="en-US"/>
-          </a:p>
-        </p:txBody>
       </p:sp>
       <p:sp>
         <p:nvSpPr>
@@ -17012,13 +16231,6 @@
             <a:prstDash val="solid"/>
           </a:ln>
         </p:spPr>
-        <p:txBody>
-          <a:bodyPr/>
-          <a:lstStyle/>
-          <a:p>
-            <a:endParaRPr lang="en-US"/>
-          </a:p>
-        </p:txBody>
       </p:sp>
       <p:sp>
         <p:nvSpPr>
@@ -17122,13 +16334,6 @@
             <a:prstDash val="solid"/>
           </a:ln>
         </p:spPr>
-        <p:txBody>
-          <a:bodyPr/>
-          <a:lstStyle/>
-          <a:p>
-            <a:endParaRPr lang="en-US"/>
-          </a:p>
-        </p:txBody>
       </p:sp>
       <p:sp>
         <p:nvSpPr>
@@ -17232,13 +16437,6 @@
             <a:prstDash val="solid"/>
           </a:ln>
         </p:spPr>
-        <p:txBody>
-          <a:bodyPr/>
-          <a:lstStyle/>
-          <a:p>
-            <a:endParaRPr lang="en-US"/>
-          </a:p>
-        </p:txBody>
       </p:sp>
       <p:sp>
         <p:nvSpPr>
@@ -17342,13 +16540,6 @@
             <a:prstDash val="solid"/>
           </a:ln>
         </p:spPr>
-        <p:txBody>
-          <a:bodyPr/>
-          <a:lstStyle/>
-          <a:p>
-            <a:endParaRPr lang="en-US"/>
-          </a:p>
-        </p:txBody>
       </p:sp>
       <p:sp>
         <p:nvSpPr>
@@ -17486,13 +16677,6 @@
             <a:prstDash val="solid"/>
           </a:ln>
         </p:spPr>
-        <p:txBody>
-          <a:bodyPr/>
-          <a:lstStyle/>
-          <a:p>
-            <a:endParaRPr lang="en-US"/>
-          </a:p>
-        </p:txBody>
       </p:sp>
       <p:sp>
         <p:nvSpPr>
@@ -17631,13 +16815,6 @@
             <a:prstDash val="solid"/>
           </a:ln>
         </p:spPr>
-        <p:txBody>
-          <a:bodyPr/>
-          <a:lstStyle/>
-          <a:p>
-            <a:endParaRPr lang="en-US"/>
-          </a:p>
-        </p:txBody>
       </p:sp>
       <p:sp>
         <p:nvSpPr>
@@ -17808,13 +16985,6 @@
             <a:prstDash val="solid"/>
           </a:ln>
         </p:spPr>
-        <p:txBody>
-          <a:bodyPr/>
-          <a:lstStyle/>
-          <a:p>
-            <a:endParaRPr lang="en-US"/>
-          </a:p>
-        </p:txBody>
       </p:sp>
       <p:sp>
         <p:nvSpPr>
@@ -18224,13 +17394,6 @@
             <a:prstDash val="solid"/>
           </a:ln>
         </p:spPr>
-        <p:txBody>
-          <a:bodyPr/>
-          <a:lstStyle/>
-          <a:p>
-            <a:endParaRPr lang="en-US"/>
-          </a:p>
-        </p:txBody>
       </p:sp>
       <p:sp>
         <p:nvSpPr>
@@ -18638,13 +17801,6 @@
             <a:prstDash val="solid"/>
           </a:ln>
         </p:spPr>
-        <p:txBody>
-          <a:bodyPr/>
-          <a:lstStyle/>
-          <a:p>
-            <a:endParaRPr lang="en-US"/>
-          </a:p>
-        </p:txBody>
       </p:sp>
       <p:sp>
         <p:nvSpPr>
@@ -18670,13 +17826,6 @@
             <a:prstDash val="solid"/>
           </a:ln>
         </p:spPr>
-        <p:txBody>
-          <a:bodyPr/>
-          <a:lstStyle/>
-          <a:p>
-            <a:endParaRPr lang="en-US"/>
-          </a:p>
-        </p:txBody>
       </p:sp>
       <p:sp>
         <p:nvSpPr>
